--- a/docs/presentation.pptx
+++ b/docs/presentation.pptx
@@ -13993,7 +13993,7 @@
                 <a:ea typeface="Calibri" pitchFamily="34" charset="-122"/>
                 <a:cs typeface="Calibri" pitchFamily="34" charset="-120"/>
               </a:rPr>
-              <a:t>IRSA 4종으로 권한 분리</a:t>
+              <a:t>IRSA로 파드 단위 권한 분리</a:t>
             </a:r>
             <a:endParaRPr lang="en-US" sz="1200" dirty="0"/>
           </a:p>
@@ -15694,7 +15694,7 @@
                 <a:ea typeface="Calibri" pitchFamily="34" charset="-122"/>
                 <a:cs typeface="Calibri" pitchFamily="34" charset="-120"/>
               </a:rPr>
-              <a:t>AI 텍스트 요약 API  ·  FastAPI + Claude API + RDS  ·  단일 파일 90줄</a:t>
+              <a:t>AI 텍스트 요약 API  ·  FastAPI + Claude API + RDS  ·  단일 파일 88줄</a:t>
             </a:r>
             <a:endParaRPr lang="en-US" sz="1500" dirty="0"/>
           </a:p>

--- a/docs/presentation.pptx
+++ b/docs/presentation.pptx
@@ -10897,7 +10897,7 @@
                 <a:ea typeface="Calibri" pitchFamily="34" charset="-122"/>
                 <a:cs typeface="Calibri" pitchFamily="34" charset="-120"/>
               </a:rPr>
-              <a:t>솔루션 엔지니어로서 Docker 컨테이너 · PostgreSQL · 모니터링 시스템 운영과 장애 대응 수행</a:t>
+              <a:t>통합관제 솔루션(ZENIUS) 기술지원 — 클라우드·온프레미스에 관제 시스템 구축, Linux·PostgreSQL 기반 장애 분석</a:t>
             </a:r>
             <a:endParaRPr lang="en-US" sz="1350" dirty="0"/>
           </a:p>
@@ -10915,7 +10915,25 @@
                 <a:ea typeface="Calibri" pitchFamily="34" charset="-122"/>
                 <a:cs typeface="Calibri" pitchFamily="34" charset="-120"/>
               </a:rPr>
-              <a:t>배포·재구축·장애 대응이 수작업에 의존하는 한계 체감 → 설계·구축·자동화 관점으로 확장하는 프로젝트 기획</a:t>
+              <a:t>AI 클라우드 운영 — Docker 이미지 표준화로 개발 환경 제공 시간 40% 단축 (NHN·Naver Cloud)</a:t>
+            </a:r>
+            <a:endParaRPr lang="en-US" sz="1350" dirty="0"/>
+          </a:p>
+          <a:p>
+            <a:pPr marL="342900" indent="-342900">
+              <a:buSzPct val="100000"/>
+              <a:buChar char="•"/>
+            </a:pPr>
+            <a:r>
+              <a:rPr lang="en-US" sz="1350" dirty="0">
+                <a:solidFill>
+                  <a:srgbClr val="3A3F52"/>
+                </a:solidFill>
+                <a:latin typeface="Calibri" pitchFamily="34" charset="0"/>
+                <a:ea typeface="Calibri" pitchFamily="34" charset="-122"/>
+                <a:cs typeface="Calibri" pitchFamily="34" charset="-120"/>
+              </a:rPr>
+              <a:t>운영에서 체감한 수작업의 한계를, AWS SA Professional 설계 지식 기반의 직접 구축·검증으로 해소</a:t>
             </a:r>
             <a:endParaRPr lang="en-US" sz="1350" dirty="0"/>
           </a:p>

--- a/docs/presentation.pptx
+++ b/docs/presentation.pptx
@@ -10854,7 +10854,7 @@
                 <a:ea typeface="Cambria" pitchFamily="34" charset="-122"/>
                 <a:cs typeface="Cambria" pitchFamily="34" charset="-120"/>
               </a:rPr>
-              <a:t>“모니터링하던 시스템을, 이번에는 처음부터 직접 세워보기”</a:t>
+              <a:t>“고객의 인프라를 관제하던 엔지니어가, 내 인프라 전체를 설계하다”</a:t>
             </a:r>
             <a:endParaRPr lang="en-US" sz="2100" dirty="0"/>
           </a:p>

--- a/docs/presentation.pptx
+++ b/docs/presentation.pptx
@@ -10854,7 +10854,7 @@
                 <a:ea typeface="Cambria" pitchFamily="34" charset="-122"/>
                 <a:cs typeface="Cambria" pitchFamily="34" charset="-120"/>
               </a:rPr>
-              <a:t>“고객의 인프라를 관제하던 엔지니어가, 내 인프라 전체를 설계하다”</a:t>
+              <a:t>“고객의 인프라를 관제하고 운영하던 엔지니어가, 내 인프라 전체를 설계하다”</a:t>
             </a:r>
             <a:endParaRPr lang="en-US" sz="2100" dirty="0"/>
           </a:p>

--- a/docs/presentation.pptx
+++ b/docs/presentation.pptx
@@ -10854,7 +10854,7 @@
                 <a:ea typeface="Cambria" pitchFamily="34" charset="-122"/>
                 <a:cs typeface="Cambria" pitchFamily="34" charset="-120"/>
               </a:rPr>
-              <a:t>“고객의 인프라를 관제하고 운영하던 엔지니어가, 내 인프라 전체를 설계하다”</a:t>
+              <a:t>“관제하고 운영하던 클라우드를, 이번에는 직접 설계하다”</a:t>
             </a:r>
             <a:endParaRPr lang="en-US" sz="2100" dirty="0"/>
           </a:p>

--- a/docs/presentation.pptx
+++ b/docs/presentation.pptx
@@ -10897,7 +10897,7 @@
                 <a:ea typeface="Calibri" pitchFamily="34" charset="-122"/>
                 <a:cs typeface="Calibri" pitchFamily="34" charset="-120"/>
               </a:rPr>
-              <a:t>통합관제 솔루션(ZENIUS) 기술지원 — 클라우드·온프레미스에 관제 시스템 구축, Linux·PostgreSQL 기반 장애 분석</a:t>
+              <a:t>통합관제 솔루션(ZENIUS) 기술지원 — KT Cloud(PPP)·온프레미스에 관제 시스템 구축, Linux·PostgreSQL 장애 분석</a:t>
             </a:r>
             <a:endParaRPr lang="en-US" sz="1350" dirty="0"/>
           </a:p>

--- a/docs/presentation.pptx
+++ b/docs/presentation.pptx
@@ -3526,7 +3526,7 @@
 
 <file path=ppt/slides/slide11.xml><?xml version="1.0" encoding="utf-8"?>
 <p:sld xmlns:a="http://schemas.openxmlformats.org/drawingml/2006/main" xmlns:r="http://schemas.openxmlformats.org/officeDocument/2006/relationships" xmlns:p="http://schemas.openxmlformats.org/presentationml/2006/main">
-  <p:cSld name="Slide 11">
+  <p:cSld name="Slide 1">
     <p:bg>
       <p:bgPr>
         <a:solidFill>
@@ -3569,7 +3569,7 @@
           <a:bodyPr wrap="square" lIns="0" tIns="0" rIns="0" bIns="0" rtlCol="0" anchor="ctr"/>
           <a:lstStyle/>
           <a:p>
-            <a:pPr algn="l" indent="0" marL="0">
+            <a:pPr indent="0" marL="0">
               <a:buNone/>
             </a:pPr>
             <a:r>
@@ -3628,14 +3628,140 @@
       </p:sp>
       <p:sp>
         <p:nvSpPr>
-          <p:cNvPr id="4" name="Shape 2"/>
-          <p:cNvSpPr/>
-          <p:nvPr/>
-        </p:nvSpPr>
-        <p:spPr>
-          <a:xfrm>
-            <a:off x="640080" y="1563624"/>
-            <a:ext cx="402336" cy="402336"/>
+          <p:cNvPr id="4" name="Text 2"/>
+          <p:cNvSpPr/>
+          <p:nvPr/>
+        </p:nvSpPr>
+        <p:spPr>
+          <a:xfrm>
+            <a:off x="548640" y="1024128"/>
+            <a:ext cx="11064240" cy="256032"/>
+          </a:xfrm>
+          <a:prstGeom prst="rect">
+            <a:avLst/>
+          </a:prstGeom>
+          <a:noFill/>
+          <a:ln/>
+        </p:spPr>
+        <p:txBody>
+          <a:bodyPr wrap="square" lIns="0" tIns="0" rIns="0" bIns="0" rtlCol="0" anchor="ctr"/>
+          <a:lstStyle/>
+          <a:p>
+            <a:pPr indent="0" marL="0">
+              <a:buNone/>
+            </a:pPr>
+            <a:r>
+              <a:rPr lang="en-US" sz="1150" b="1" dirty="0">
+                <a:solidFill>
+                  <a:srgbClr val="6B7089"/>
+                </a:solidFill>
+                <a:latin typeface="Calibri" pitchFamily="34" charset="0"/>
+                <a:ea typeface="Calibri" pitchFamily="34" charset="-122"/>
+                <a:cs typeface="Calibri" pitchFamily="34" charset="-120"/>
+              </a:rPr>
+              <a:t>kubectl get hpa · get pods — CPU 50% 기준 2~6 구성, 파드가 서로 다른 노드(AZ)에 분산 배치</a:t>
+            </a:r>
+            <a:endParaRPr lang="en-US" sz="1150" dirty="0"/>
+          </a:p>
+        </p:txBody>
+      </p:sp>
+      <p:pic>
+        <p:nvPicPr>
+          <p:cNvPr id="5" name="Image 0" descr="/Users/kohyeokbae/고혁배/claude/eks-gitops-portfolio/docs/images/HPA Status.png">    </p:cNvPr>
+          <p:cNvPicPr>
+            <a:picLocks noChangeAspect="1"/>
+          </p:cNvPicPr>
+          <p:nvPr/>
+        </p:nvPicPr>
+        <p:blipFill>
+          <a:blip r:embed="rId1"/>
+          <a:stretch>
+            <a:fillRect/>
+          </a:stretch>
+        </p:blipFill>
+        <p:spPr>
+          <a:xfrm>
+            <a:off x="548640" y="1298448"/>
+            <a:ext cx="11064240" cy="1664208"/>
+          </a:xfrm>
+          <a:prstGeom prst="rect">
+            <a:avLst/>
+          </a:prstGeom>
+        </p:spPr>
+      </p:pic>
+      <p:sp>
+        <p:nvSpPr>
+          <p:cNvPr id="6" name="Text 3"/>
+          <p:cNvSpPr/>
+          <p:nvPr/>
+        </p:nvSpPr>
+        <p:spPr>
+          <a:xfrm>
+            <a:off x="548640" y="3127248"/>
+            <a:ext cx="5669280" cy="256032"/>
+          </a:xfrm>
+          <a:prstGeom prst="rect">
+            <a:avLst/>
+          </a:prstGeom>
+          <a:noFill/>
+          <a:ln/>
+        </p:spPr>
+        <p:txBody>
+          <a:bodyPr wrap="square" lIns="0" tIns="0" rIns="0" bIns="0" rtlCol="0" anchor="ctr"/>
+          <a:lstStyle/>
+          <a:p>
+            <a:pPr indent="0" marL="0">
+              <a:buNone/>
+            </a:pPr>
+            <a:r>
+              <a:rPr lang="en-US" sz="1150" b="1" dirty="0">
+                <a:solidFill>
+                  <a:srgbClr val="6B7089"/>
+                </a:solidFill>
+                <a:latin typeface="Calibri" pitchFamily="34" charset="0"/>
+                <a:ea typeface="Calibri" pitchFamily="34" charset="-122"/>
+                <a:cs typeface="Calibri" pitchFamily="34" charset="-120"/>
+              </a:rPr>
+              <a:t>Grafana — 부하 투입 시 CPU 306% 스파이크 → summarizer 파드 6개로 증설(범례)</a:t>
+            </a:r>
+            <a:endParaRPr lang="en-US" sz="1150" dirty="0"/>
+          </a:p>
+        </p:txBody>
+      </p:sp>
+      <p:pic>
+        <p:nvPicPr>
+          <p:cNvPr id="7" name="Image 1" descr="/Users/kohyeokbae/고혁배/claude/eks-gitops-portfolio/docs/images/app pods monitoring1.png">    </p:cNvPr>
+          <p:cNvPicPr>
+            <a:picLocks noChangeAspect="1"/>
+          </p:cNvPicPr>
+          <p:nvPr/>
+        </p:nvPicPr>
+        <p:blipFill>
+          <a:blip r:embed="rId2"/>
+          <a:stretch>
+            <a:fillRect/>
+          </a:stretch>
+        </p:blipFill>
+        <p:spPr>
+          <a:xfrm>
+            <a:off x="548640" y="3401568"/>
+            <a:ext cx="5230368" cy="3063240"/>
+          </a:xfrm>
+          <a:prstGeom prst="rect">
+            <a:avLst/>
+          </a:prstGeom>
+        </p:spPr>
+      </p:pic>
+      <p:sp>
+        <p:nvSpPr>
+          <p:cNvPr id="8" name="Shape 4"/>
+          <p:cNvSpPr/>
+          <p:nvPr/>
+        </p:nvSpPr>
+        <p:spPr>
+          <a:xfrm>
+            <a:off x="6172200" y="3310128"/>
+            <a:ext cx="310896" cy="310896"/>
           </a:xfrm>
           <a:prstGeom prst="ellipse">
             <a:avLst/>
@@ -3648,14 +3774,14 @@
       </p:sp>
       <p:sp>
         <p:nvSpPr>
-          <p:cNvPr id="5" name="Text 3"/>
-          <p:cNvSpPr/>
-          <p:nvPr/>
-        </p:nvSpPr>
-        <p:spPr>
-          <a:xfrm>
-            <a:off x="640080" y="1563624"/>
-            <a:ext cx="402336" cy="402336"/>
+          <p:cNvPr id="9" name="Text 5"/>
+          <p:cNvSpPr/>
+          <p:nvPr/>
+        </p:nvSpPr>
+        <p:spPr>
+          <a:xfrm>
+            <a:off x="6172200" y="3310128"/>
+            <a:ext cx="310896" cy="310896"/>
           </a:xfrm>
           <a:prstGeom prst="rect">
             <a:avLst/>
@@ -3671,7 +3797,7 @@
               <a:buNone/>
             </a:pPr>
             <a:r>
-              <a:rPr lang="en-US" sz="1400" b="1" dirty="0">
+              <a:rPr lang="en-US" sz="1200" b="1" dirty="0">
                 <a:solidFill>
                   <a:srgbClr val="FFFFFF"/>
                 </a:solidFill>
@@ -3681,65 +3807,20 @@
               </a:rPr>
               <a:t>1</a:t>
             </a:r>
-            <a:endParaRPr lang="en-US" sz="1400" dirty="0"/>
-          </a:p>
-        </p:txBody>
-      </p:sp>
-      <p:sp>
-        <p:nvSpPr>
-          <p:cNvPr id="6" name="Shape 4"/>
-          <p:cNvSpPr/>
-          <p:nvPr/>
-        </p:nvSpPr>
-        <p:spPr>
-          <a:xfrm>
-            <a:off x="841248" y="1993392"/>
-            <a:ext cx="0" cy="530352"/>
-          </a:xfrm>
-          <a:prstGeom prst="line">
-            <a:avLst/>
-          </a:prstGeom>
-          <a:noFill/>
-          <a:ln w="31750">
-            <a:solidFill>
-              <a:srgbClr val="CADCFC"/>
-            </a:solidFill>
-            <a:prstDash val="solid"/>
-          </a:ln>
-        </p:spPr>
-      </p:sp>
-      <p:sp>
-        <p:nvSpPr>
-          <p:cNvPr id="7" name="Shape 5"/>
-          <p:cNvSpPr/>
-          <p:nvPr/>
-        </p:nvSpPr>
-        <p:spPr>
-          <a:xfrm>
-            <a:off x="1280160" y="1417320"/>
-            <a:ext cx="5120640" cy="777240"/>
-          </a:xfrm>
-          <a:prstGeom prst="roundRect">
-            <a:avLst>
-              <a:gd name="adj" fmla="val 8235"/>
-            </a:avLst>
-          </a:prstGeom>
-          <a:solidFill>
-            <a:srgbClr val="F4F6FC"/>
-          </a:solidFill>
-          <a:ln/>
-        </p:spPr>
-      </p:sp>
-      <p:sp>
-        <p:nvSpPr>
-          <p:cNvPr id="8" name="Text 6"/>
-          <p:cNvSpPr/>
-          <p:nvPr/>
-        </p:nvSpPr>
-        <p:spPr>
-          <a:xfrm>
-            <a:off x="1554480" y="1417320"/>
-            <a:ext cx="4663440" cy="777240"/>
+            <a:endParaRPr lang="en-US" sz="1200" dirty="0"/>
+          </a:p>
+        </p:txBody>
+      </p:sp>
+      <p:sp>
+        <p:nvSpPr>
+          <p:cNvPr id="10" name="Text 6"/>
+          <p:cNvSpPr/>
+          <p:nvPr/>
+        </p:nvSpPr>
+        <p:spPr>
+          <a:xfrm>
+            <a:off x="6629400" y="3264408"/>
+            <a:ext cx="5029200" cy="411480"/>
           </a:xfrm>
           <a:prstGeom prst="rect">
             <a:avLst/>
@@ -3755,20 +3836,6 @@
               <a:buNone/>
             </a:pPr>
             <a:r>
-              <a:rPr lang="en-US" sz="1400" b="1" dirty="0">
-                <a:solidFill>
-                  <a:srgbClr val="1E2761"/>
-                </a:solidFill>
-                <a:latin typeface="Calibri" pitchFamily="34" charset="0"/>
-                <a:ea typeface="Calibri" pitchFamily="34" charset="-122"/>
-                <a:cs typeface="Calibri" pitchFamily="34" charset="-120"/>
-              </a:rPr>
-              <a:t>부하 투입    </a:t>
-            </a:r>
-            <a:pPr indent="0" marL="0">
-              <a:buNone/>
-            </a:pPr>
-            <a:r>
               <a:rPr lang="en-US" sz="1250" dirty="0">
                 <a:solidFill>
                   <a:srgbClr val="3A3F52"/>
@@ -3777,22 +3844,22 @@
                 <a:ea typeface="Calibri" pitchFamily="34" charset="-122"/>
                 <a:cs typeface="Calibri" pitchFamily="34" charset="-120"/>
               </a:rPr>
-              <a:t>busybox 무한 요청 3기 가동</a:t>
-            </a:r>
-            <a:endParaRPr lang="en-US" sz="1400" dirty="0"/>
-          </a:p>
-        </p:txBody>
-      </p:sp>
-      <p:sp>
-        <p:nvSpPr>
-          <p:cNvPr id="9" name="Shape 7"/>
-          <p:cNvSpPr/>
-          <p:nvPr/>
-        </p:nvSpPr>
-        <p:spPr>
-          <a:xfrm>
-            <a:off x="640080" y="2642616"/>
-            <a:ext cx="402336" cy="402336"/>
+              <a:t>부하 투입 — busybox 무한 요청 3기</a:t>
+            </a:r>
+            <a:endParaRPr lang="en-US" sz="1250" dirty="0"/>
+          </a:p>
+        </p:txBody>
+      </p:sp>
+      <p:sp>
+        <p:nvSpPr>
+          <p:cNvPr id="11" name="Shape 7"/>
+          <p:cNvSpPr/>
+          <p:nvPr/>
+        </p:nvSpPr>
+        <p:spPr>
+          <a:xfrm>
+            <a:off x="6172200" y="3877056"/>
+            <a:ext cx="310896" cy="310896"/>
           </a:xfrm>
           <a:prstGeom prst="ellipse">
             <a:avLst/>
@@ -3805,14 +3872,14 @@
       </p:sp>
       <p:sp>
         <p:nvSpPr>
-          <p:cNvPr id="10" name="Text 8"/>
-          <p:cNvSpPr/>
-          <p:nvPr/>
-        </p:nvSpPr>
-        <p:spPr>
-          <a:xfrm>
-            <a:off x="640080" y="2642616"/>
-            <a:ext cx="402336" cy="402336"/>
+          <p:cNvPr id="12" name="Text 8"/>
+          <p:cNvSpPr/>
+          <p:nvPr/>
+        </p:nvSpPr>
+        <p:spPr>
+          <a:xfrm>
+            <a:off x="6172200" y="3877056"/>
+            <a:ext cx="310896" cy="310896"/>
           </a:xfrm>
           <a:prstGeom prst="rect">
             <a:avLst/>
@@ -3828,7 +3895,7 @@
               <a:buNone/>
             </a:pPr>
             <a:r>
-              <a:rPr lang="en-US" sz="1400" b="1" dirty="0">
+              <a:rPr lang="en-US" sz="1200" b="1" dirty="0">
                 <a:solidFill>
                   <a:srgbClr val="FFFFFF"/>
                 </a:solidFill>
@@ -3838,65 +3905,20 @@
               </a:rPr>
               <a:t>2</a:t>
             </a:r>
-            <a:endParaRPr lang="en-US" sz="1400" dirty="0"/>
-          </a:p>
-        </p:txBody>
-      </p:sp>
-      <p:sp>
-        <p:nvSpPr>
-          <p:cNvPr id="11" name="Shape 9"/>
-          <p:cNvSpPr/>
-          <p:nvPr/>
-        </p:nvSpPr>
-        <p:spPr>
-          <a:xfrm>
-            <a:off x="841248" y="3072384"/>
-            <a:ext cx="0" cy="530352"/>
-          </a:xfrm>
-          <a:prstGeom prst="line">
-            <a:avLst/>
-          </a:prstGeom>
-          <a:noFill/>
-          <a:ln w="31750">
-            <a:solidFill>
-              <a:srgbClr val="CADCFC"/>
-            </a:solidFill>
-            <a:prstDash val="solid"/>
-          </a:ln>
-        </p:spPr>
-      </p:sp>
-      <p:sp>
-        <p:nvSpPr>
-          <p:cNvPr id="12" name="Shape 10"/>
-          <p:cNvSpPr/>
-          <p:nvPr/>
-        </p:nvSpPr>
-        <p:spPr>
-          <a:xfrm>
-            <a:off x="1280160" y="2496312"/>
-            <a:ext cx="5120640" cy="777240"/>
-          </a:xfrm>
-          <a:prstGeom prst="roundRect">
-            <a:avLst>
-              <a:gd name="adj" fmla="val 8235"/>
-            </a:avLst>
-          </a:prstGeom>
-          <a:solidFill>
-            <a:srgbClr val="F4F6FC"/>
-          </a:solidFill>
-          <a:ln/>
-        </p:spPr>
-      </p:sp>
-      <p:sp>
-        <p:nvSpPr>
-          <p:cNvPr id="13" name="Text 11"/>
-          <p:cNvSpPr/>
-          <p:nvPr/>
-        </p:nvSpPr>
-        <p:spPr>
-          <a:xfrm>
-            <a:off x="1554480" y="2496312"/>
-            <a:ext cx="4663440" cy="777240"/>
+            <a:endParaRPr lang="en-US" sz="1200" dirty="0"/>
+          </a:p>
+        </p:txBody>
+      </p:sp>
+      <p:sp>
+        <p:nvSpPr>
+          <p:cNvPr id="13" name="Text 9"/>
+          <p:cNvSpPr/>
+          <p:nvPr/>
+        </p:nvSpPr>
+        <p:spPr>
+          <a:xfrm>
+            <a:off x="6629400" y="3831336"/>
+            <a:ext cx="5029200" cy="411480"/>
           </a:xfrm>
           <a:prstGeom prst="rect">
             <a:avLst/>
@@ -3912,20 +3934,6 @@
               <a:buNone/>
             </a:pPr>
             <a:r>
-              <a:rPr lang="en-US" sz="1400" b="1" dirty="0">
-                <a:solidFill>
-                  <a:srgbClr val="1E2761"/>
-                </a:solidFill>
-                <a:latin typeface="Calibri" pitchFamily="34" charset="0"/>
-                <a:ea typeface="Calibri" pitchFamily="34" charset="-122"/>
-                <a:cs typeface="Calibri" pitchFamily="34" charset="-120"/>
-              </a:rPr>
-              <a:t>감지 · 증설    </a:t>
-            </a:r>
-            <a:pPr indent="0" marL="0">
-              <a:buNone/>
-            </a:pPr>
-            <a:r>
               <a:rPr lang="en-US" sz="1250" dirty="0">
                 <a:solidFill>
                   <a:srgbClr val="3A3F52"/>
@@ -3934,22 +3942,22 @@
                 <a:ea typeface="Calibri" pitchFamily="34" charset="-122"/>
                 <a:cs typeface="Calibri" pitchFamily="34" charset="-120"/>
               </a:rPr>
-              <a:t>CPU 306% 감지 → 파드 2 → 6 (약 2분)</a:t>
-            </a:r>
-            <a:endParaRPr lang="en-US" sz="1400" dirty="0"/>
-          </a:p>
-        </p:txBody>
-      </p:sp>
-      <p:sp>
-        <p:nvSpPr>
-          <p:cNvPr id="14" name="Shape 12"/>
-          <p:cNvSpPr/>
-          <p:nvPr/>
-        </p:nvSpPr>
-        <p:spPr>
-          <a:xfrm>
-            <a:off x="640080" y="3721608"/>
-            <a:ext cx="402336" cy="402336"/>
+              <a:t>CPU 306% 감지 → 파드 2 → 6 증설 (약 2분)</a:t>
+            </a:r>
+            <a:endParaRPr lang="en-US" sz="1250" dirty="0"/>
+          </a:p>
+        </p:txBody>
+      </p:sp>
+      <p:sp>
+        <p:nvSpPr>
+          <p:cNvPr id="14" name="Shape 10"/>
+          <p:cNvSpPr/>
+          <p:nvPr/>
+        </p:nvSpPr>
+        <p:spPr>
+          <a:xfrm>
+            <a:off x="6172200" y="4443984"/>
+            <a:ext cx="310896" cy="310896"/>
           </a:xfrm>
           <a:prstGeom prst="ellipse">
             <a:avLst/>
@@ -3962,14 +3970,14 @@
       </p:sp>
       <p:sp>
         <p:nvSpPr>
-          <p:cNvPr id="15" name="Text 13"/>
-          <p:cNvSpPr/>
-          <p:nvPr/>
-        </p:nvSpPr>
-        <p:spPr>
-          <a:xfrm>
-            <a:off x="640080" y="3721608"/>
-            <a:ext cx="402336" cy="402336"/>
+          <p:cNvPr id="15" name="Text 11"/>
+          <p:cNvSpPr/>
+          <p:nvPr/>
+        </p:nvSpPr>
+        <p:spPr>
+          <a:xfrm>
+            <a:off x="6172200" y="4443984"/>
+            <a:ext cx="310896" cy="310896"/>
           </a:xfrm>
           <a:prstGeom prst="rect">
             <a:avLst/>
@@ -3985,7 +3993,7 @@
               <a:buNone/>
             </a:pPr>
             <a:r>
-              <a:rPr lang="en-US" sz="1400" b="1" dirty="0">
+              <a:rPr lang="en-US" sz="1200" b="1" dirty="0">
                 <a:solidFill>
                   <a:srgbClr val="FFFFFF"/>
                 </a:solidFill>
@@ -3995,65 +4003,20 @@
               </a:rPr>
               <a:t>3</a:t>
             </a:r>
-            <a:endParaRPr lang="en-US" sz="1400" dirty="0"/>
-          </a:p>
-        </p:txBody>
-      </p:sp>
-      <p:sp>
-        <p:nvSpPr>
-          <p:cNvPr id="16" name="Shape 14"/>
-          <p:cNvSpPr/>
-          <p:nvPr/>
-        </p:nvSpPr>
-        <p:spPr>
-          <a:xfrm>
-            <a:off x="841248" y="4151376"/>
-            <a:ext cx="0" cy="530352"/>
-          </a:xfrm>
-          <a:prstGeom prst="line">
-            <a:avLst/>
-          </a:prstGeom>
-          <a:noFill/>
-          <a:ln w="31750">
-            <a:solidFill>
-              <a:srgbClr val="CADCFC"/>
-            </a:solidFill>
-            <a:prstDash val="solid"/>
-          </a:ln>
-        </p:spPr>
-      </p:sp>
-      <p:sp>
-        <p:nvSpPr>
-          <p:cNvPr id="17" name="Shape 15"/>
-          <p:cNvSpPr/>
-          <p:nvPr/>
-        </p:nvSpPr>
-        <p:spPr>
-          <a:xfrm>
-            <a:off x="1280160" y="3575304"/>
-            <a:ext cx="5120640" cy="777240"/>
-          </a:xfrm>
-          <a:prstGeom prst="roundRect">
-            <a:avLst>
-              <a:gd name="adj" fmla="val 8235"/>
-            </a:avLst>
-          </a:prstGeom>
-          <a:solidFill>
-            <a:srgbClr val="F4F6FC"/>
-          </a:solidFill>
-          <a:ln/>
-        </p:spPr>
-      </p:sp>
-      <p:sp>
-        <p:nvSpPr>
-          <p:cNvPr id="18" name="Text 16"/>
-          <p:cNvSpPr/>
-          <p:nvPr/>
-        </p:nvSpPr>
-        <p:spPr>
-          <a:xfrm>
-            <a:off x="1554480" y="3575304"/>
-            <a:ext cx="4663440" cy="777240"/>
+            <a:endParaRPr lang="en-US" sz="1200" dirty="0"/>
+          </a:p>
+        </p:txBody>
+      </p:sp>
+      <p:sp>
+        <p:nvSpPr>
+          <p:cNvPr id="16" name="Text 12"/>
+          <p:cNvSpPr/>
+          <p:nvPr/>
+        </p:nvSpPr>
+        <p:spPr>
+          <a:xfrm>
+            <a:off x="6629400" y="4398264"/>
+            <a:ext cx="5029200" cy="411480"/>
           </a:xfrm>
           <a:prstGeom prst="rect">
             <a:avLst/>
@@ -4069,20 +4032,6 @@
               <a:buNone/>
             </a:pPr>
             <a:r>
-              <a:rPr lang="en-US" sz="1400" b="1" dirty="0">
-                <a:solidFill>
-                  <a:srgbClr val="1E2761"/>
-                </a:solidFill>
-                <a:latin typeface="Calibri" pitchFamily="34" charset="0"/>
-                <a:ea typeface="Calibri" pitchFamily="34" charset="-122"/>
-                <a:cs typeface="Calibri" pitchFamily="34" charset="-120"/>
-              </a:rPr>
-              <a:t>부하 제거    </a:t>
-            </a:r>
-            <a:pPr indent="0" marL="0">
-              <a:buNone/>
-            </a:pPr>
-            <a:r>
               <a:rPr lang="en-US" sz="1250" dirty="0">
                 <a:solidFill>
                   <a:srgbClr val="3A3F52"/>
@@ -4091,22 +4040,22 @@
                 <a:ea typeface="Calibri" pitchFamily="34" charset="-122"/>
                 <a:cs typeface="Calibri" pitchFamily="34" charset="-120"/>
               </a:rPr>
-              <a:t>CPU 2%로 하락 — 안정화 창 대기</a:t>
-            </a:r>
-            <a:endParaRPr lang="en-US" sz="1400" dirty="0"/>
-          </a:p>
-        </p:txBody>
-      </p:sp>
-      <p:sp>
-        <p:nvSpPr>
-          <p:cNvPr id="19" name="Shape 17"/>
-          <p:cNvSpPr/>
-          <p:nvPr/>
-        </p:nvSpPr>
-        <p:spPr>
-          <a:xfrm>
-            <a:off x="640080" y="4800600"/>
-            <a:ext cx="402336" cy="402336"/>
+              <a:t>부하 제거 → CPU 2%, 안정화 창 대기</a:t>
+            </a:r>
+            <a:endParaRPr lang="en-US" sz="1250" dirty="0"/>
+          </a:p>
+        </p:txBody>
+      </p:sp>
+      <p:sp>
+        <p:nvSpPr>
+          <p:cNvPr id="17" name="Shape 13"/>
+          <p:cNvSpPr/>
+          <p:nvPr/>
+        </p:nvSpPr>
+        <p:spPr>
+          <a:xfrm>
+            <a:off x="6172200" y="5010912"/>
+            <a:ext cx="310896" cy="310896"/>
           </a:xfrm>
           <a:prstGeom prst="ellipse">
             <a:avLst/>
@@ -4119,14 +4068,14 @@
       </p:sp>
       <p:sp>
         <p:nvSpPr>
-          <p:cNvPr id="20" name="Text 18"/>
-          <p:cNvSpPr/>
-          <p:nvPr/>
-        </p:nvSpPr>
-        <p:spPr>
-          <a:xfrm>
-            <a:off x="640080" y="4800600"/>
-            <a:ext cx="402336" cy="402336"/>
+          <p:cNvPr id="18" name="Text 14"/>
+          <p:cNvSpPr/>
+          <p:nvPr/>
+        </p:nvSpPr>
+        <p:spPr>
+          <a:xfrm>
+            <a:off x="6172200" y="5010912"/>
+            <a:ext cx="310896" cy="310896"/>
           </a:xfrm>
           <a:prstGeom prst="rect">
             <a:avLst/>
@@ -4142,7 +4091,7 @@
               <a:buNone/>
             </a:pPr>
             <a:r>
-              <a:rPr lang="en-US" sz="1400" b="1" dirty="0">
+              <a:rPr lang="en-US" sz="1200" b="1" dirty="0">
                 <a:solidFill>
                   <a:srgbClr val="FFFFFF"/>
                 </a:solidFill>
@@ -4152,221 +4101,63 @@
               </a:rPr>
               <a:t>4</a:t>
             </a:r>
-            <a:endParaRPr lang="en-US" sz="1400" dirty="0"/>
-          </a:p>
-        </p:txBody>
-      </p:sp>
-      <p:sp>
-        <p:nvSpPr>
-          <p:cNvPr id="21" name="Shape 19"/>
-          <p:cNvSpPr/>
-          <p:nvPr/>
-        </p:nvSpPr>
-        <p:spPr>
-          <a:xfrm>
-            <a:off x="1280160" y="4654296"/>
-            <a:ext cx="5120640" cy="777240"/>
+            <a:endParaRPr lang="en-US" sz="1200" dirty="0"/>
+          </a:p>
+        </p:txBody>
+      </p:sp>
+      <p:sp>
+        <p:nvSpPr>
+          <p:cNvPr id="19" name="Text 15"/>
+          <p:cNvSpPr/>
+          <p:nvPr/>
+        </p:nvSpPr>
+        <p:spPr>
+          <a:xfrm>
+            <a:off x="6629400" y="4965192"/>
+            <a:ext cx="5029200" cy="411480"/>
+          </a:xfrm>
+          <a:prstGeom prst="rect">
+            <a:avLst/>
+          </a:prstGeom>
+          <a:noFill/>
+          <a:ln/>
+        </p:spPr>
+        <p:txBody>
+          <a:bodyPr wrap="square" lIns="0" tIns="0" rIns="0" bIns="0" rtlCol="0" anchor="ctr"/>
+          <a:lstStyle/>
+          <a:p>
+            <a:pPr indent="0" marL="0">
+              <a:buNone/>
+            </a:pPr>
+            <a:r>
+              <a:rPr lang="en-US" sz="1250" dirty="0">
+                <a:solidFill>
+                  <a:srgbClr val="3A3F52"/>
+                </a:solidFill>
+                <a:latin typeface="Calibri" pitchFamily="34" charset="0"/>
+                <a:ea typeface="Calibri" pitchFamily="34" charset="-122"/>
+                <a:cs typeface="Calibri" pitchFamily="34" charset="-120"/>
+              </a:rPr>
+              <a:t>약 6.5분 후 6 → 2 자동 축소 (설계된 지연)</a:t>
+            </a:r>
+            <a:endParaRPr lang="en-US" sz="1250" dirty="0"/>
+          </a:p>
+        </p:txBody>
+      </p:sp>
+      <p:sp>
+        <p:nvSpPr>
+          <p:cNvPr id="20" name="Shape 16"/>
+          <p:cNvSpPr/>
+          <p:nvPr/>
+        </p:nvSpPr>
+        <p:spPr>
+          <a:xfrm>
+            <a:off x="6172200" y="5623560"/>
+            <a:ext cx="5468112" cy="868680"/>
           </a:xfrm>
           <a:prstGeom prst="roundRect">
             <a:avLst>
-              <a:gd name="adj" fmla="val 8235"/>
-            </a:avLst>
-          </a:prstGeom>
-          <a:solidFill>
-            <a:srgbClr val="1E2761"/>
-          </a:solidFill>
-          <a:ln/>
-        </p:spPr>
-      </p:sp>
-      <p:sp>
-        <p:nvSpPr>
-          <p:cNvPr id="22" name="Text 20"/>
-          <p:cNvSpPr/>
-          <p:nvPr/>
-        </p:nvSpPr>
-        <p:spPr>
-          <a:xfrm>
-            <a:off x="1554480" y="4654296"/>
-            <a:ext cx="4663440" cy="777240"/>
-          </a:xfrm>
-          <a:prstGeom prst="rect">
-            <a:avLst/>
-          </a:prstGeom>
-          <a:noFill/>
-          <a:ln/>
-        </p:spPr>
-        <p:txBody>
-          <a:bodyPr wrap="square" lIns="0" tIns="0" rIns="0" bIns="0" rtlCol="0" anchor="ctr"/>
-          <a:lstStyle/>
-          <a:p>
-            <a:pPr indent="0" marL="0">
-              <a:buNone/>
-            </a:pPr>
-            <a:r>
-              <a:rPr lang="en-US" sz="1400" b="1" dirty="0">
-                <a:solidFill>
-                  <a:srgbClr val="FFFFFF"/>
-                </a:solidFill>
-                <a:latin typeface="Calibri" pitchFamily="34" charset="0"/>
-                <a:ea typeface="Calibri" pitchFamily="34" charset="-122"/>
-                <a:cs typeface="Calibri" pitchFamily="34" charset="-120"/>
-              </a:rPr>
-              <a:t>원상 복귀    </a:t>
-            </a:r>
-            <a:pPr indent="0" marL="0">
-              <a:buNone/>
-            </a:pPr>
-            <a:r>
-              <a:rPr lang="en-US" sz="1250" dirty="0">
-                <a:solidFill>
-                  <a:srgbClr val="CADCFC"/>
-                </a:solidFill>
-                <a:latin typeface="Calibri" pitchFamily="34" charset="0"/>
-                <a:ea typeface="Calibri" pitchFamily="34" charset="-122"/>
-                <a:cs typeface="Calibri" pitchFamily="34" charset="-120"/>
-              </a:rPr>
-              <a:t>약 6.5분 후 6 → 2 자동 축소</a:t>
-            </a:r>
-            <a:endParaRPr lang="en-US" sz="1400" dirty="0"/>
-          </a:p>
-        </p:txBody>
-      </p:sp>
-      <p:sp>
-        <p:nvSpPr>
-          <p:cNvPr id="23" name="Text 21"/>
-          <p:cNvSpPr/>
-          <p:nvPr/>
-        </p:nvSpPr>
-        <p:spPr>
-          <a:xfrm>
-            <a:off x="640080" y="5806440"/>
-            <a:ext cx="5760720" cy="502920"/>
-          </a:xfrm>
-          <a:prstGeom prst="rect">
-            <a:avLst/>
-          </a:prstGeom>
-          <a:noFill/>
-          <a:ln/>
-        </p:spPr>
-        <p:txBody>
-          <a:bodyPr wrap="square" lIns="0" tIns="0" rIns="0" bIns="0" rtlCol="0" anchor="ctr"/>
-          <a:lstStyle/>
-          <a:p>
-            <a:pPr indent="0" marL="0">
-              <a:buNone/>
-            </a:pPr>
-            <a:r>
-              <a:rPr lang="en-US" sz="1250" dirty="0">
-                <a:solidFill>
-                  <a:srgbClr val="6B7089"/>
-                </a:solidFill>
-                <a:latin typeface="Calibri" pitchFamily="34" charset="0"/>
-                <a:ea typeface="Calibri" pitchFamily="34" charset="-122"/>
-                <a:cs typeface="Calibri" pitchFamily="34" charset="-120"/>
-              </a:rPr>
-              <a:t>축소가 느린 것은 결함이 아니라 설계 — 출렁임(flapping) 방지용 안정화 창</a:t>
-            </a:r>
-            <a:endParaRPr lang="en-US" sz="1250" dirty="0"/>
-          </a:p>
-        </p:txBody>
-      </p:sp>
-      <p:sp>
-        <p:nvSpPr>
-          <p:cNvPr id="24" name="Shape 22"/>
-          <p:cNvSpPr/>
-          <p:nvPr/>
-        </p:nvSpPr>
-        <p:spPr>
-          <a:xfrm>
-            <a:off x="6858000" y="1417320"/>
-            <a:ext cx="4754880" cy="2743200"/>
-          </a:xfrm>
-          <a:prstGeom prst="roundRect">
-            <a:avLst>
-              <a:gd name="adj" fmla="val 2667"/>
-            </a:avLst>
-          </a:prstGeom>
-          <a:solidFill>
-            <a:srgbClr val="F4F6FC"/>
-          </a:solidFill>
-          <a:ln w="19050">
-            <a:solidFill>
-              <a:srgbClr val="B9C6EA"/>
-            </a:solidFill>
-            <a:prstDash val="dash"/>
-          </a:ln>
-        </p:spPr>
-      </p:sp>
-      <p:sp>
-        <p:nvSpPr>
-          <p:cNvPr id="25" name="Text 23"/>
-          <p:cNvSpPr/>
-          <p:nvPr/>
-        </p:nvSpPr>
-        <p:spPr>
-          <a:xfrm>
-            <a:off x="7040880" y="2468880"/>
-            <a:ext cx="4389120" cy="731520"/>
-          </a:xfrm>
-          <a:prstGeom prst="rect">
-            <a:avLst/>
-          </a:prstGeom>
-          <a:noFill/>
-          <a:ln/>
-        </p:spPr>
-        <p:txBody>
-          <a:bodyPr wrap="square" lIns="0" tIns="0" rIns="0" bIns="0" rtlCol="0" anchor="ctr"/>
-          <a:lstStyle/>
-          <a:p>
-            <a:pPr algn="ctr" indent="0" marL="0">
-              <a:buNone/>
-            </a:pPr>
-            <a:r>
-              <a:rPr lang="en-US" sz="1350" dirty="0">
-                <a:solidFill>
-                  <a:srgbClr val="6B7089"/>
-                </a:solidFill>
-                <a:latin typeface="Calibri" pitchFamily="34" charset="0"/>
-                <a:ea typeface="Calibri" pitchFamily="34" charset="-122"/>
-                <a:cs typeface="Calibri" pitchFamily="34" charset="-120"/>
-              </a:rPr>
-              <a:t>kubectl get hpa / Grafana CPU 그래프</a:t>
-            </a:r>
-            <a:endParaRPr lang="en-US" sz="1350" dirty="0"/>
-          </a:p>
-          <a:p>
-            <a:pPr algn="ctr" indent="0" marL="0">
-              <a:buNone/>
-            </a:pPr>
-            <a:r>
-              <a:rPr lang="en-US" sz="1350" dirty="0">
-                <a:solidFill>
-                  <a:srgbClr val="6B7089"/>
-                </a:solidFill>
-                <a:latin typeface="Calibri" pitchFamily="34" charset="0"/>
-                <a:ea typeface="Calibri" pitchFamily="34" charset="-122"/>
-                <a:cs typeface="Calibri" pitchFamily="34" charset="-120"/>
-              </a:rPr>
-              <a:t>스크린샷 삽입 자리</a:t>
-            </a:r>
-            <a:endParaRPr lang="en-US" sz="1350" dirty="0"/>
-          </a:p>
-        </p:txBody>
-      </p:sp>
-      <p:sp>
-        <p:nvSpPr>
-          <p:cNvPr id="26" name="Shape 24"/>
-          <p:cNvSpPr/>
-          <p:nvPr/>
-        </p:nvSpPr>
-        <p:spPr>
-          <a:xfrm>
-            <a:off x="6858000" y="4389120"/>
-            <a:ext cx="4754880" cy="1783080"/>
-          </a:xfrm>
-          <a:prstGeom prst="roundRect">
-            <a:avLst>
-              <a:gd name="adj" fmla="val 4103"/>
+              <a:gd name="adj" fmla="val 8421"/>
             </a:avLst>
           </a:prstGeom>
           <a:solidFill>
@@ -4377,30 +4168,30 @@
       </p:sp>
       <p:sp>
         <p:nvSpPr>
-          <p:cNvPr id="27" name="Text 25"/>
-          <p:cNvSpPr/>
-          <p:nvPr/>
-        </p:nvSpPr>
-        <p:spPr>
-          <a:xfrm>
-            <a:off x="7086600" y="4526280"/>
-            <a:ext cx="4297680" cy="1508760"/>
-          </a:xfrm>
-          <a:prstGeom prst="rect">
-            <a:avLst/>
-          </a:prstGeom>
-          <a:noFill/>
-          <a:ln/>
-        </p:spPr>
-        <p:txBody>
-          <a:bodyPr wrap="square" lIns="0" tIns="0" rIns="0" bIns="0" rtlCol="0" anchor="t"/>
+          <p:cNvPr id="21" name="Text 17"/>
+          <p:cNvSpPr/>
+          <p:nvPr/>
+        </p:nvSpPr>
+        <p:spPr>
+          <a:xfrm>
+            <a:off x="6400800" y="5623560"/>
+            <a:ext cx="5074920" cy="868680"/>
+          </a:xfrm>
+          <a:prstGeom prst="rect">
+            <a:avLst/>
+          </a:prstGeom>
+          <a:noFill/>
+          <a:ln/>
+        </p:spPr>
+        <p:txBody>
+          <a:bodyPr wrap="square" lIns="0" tIns="0" rIns="0" bIns="0" rtlCol="0" anchor="ctr"/>
           <a:lstStyle/>
           <a:p>
             <a:pPr indent="0" marL="0">
               <a:buNone/>
             </a:pPr>
             <a:r>
-              <a:rPr lang="en-US" sz="1400" b="1" dirty="0">
+              <a:rPr lang="en-US" sz="1200" b="1" dirty="0">
                 <a:solidFill>
                   <a:srgbClr val="1E2761"/>
                 </a:solidFill>
@@ -4408,14 +4199,14 @@
                 <a:ea typeface="Calibri" pitchFamily="34" charset="-122"/>
                 <a:cs typeface="Calibri" pitchFamily="34" charset="-120"/>
               </a:rPr>
-              <a:t>관찰 — HPA의 한계까지 확인
+              <a:t>관찰 — 6번째 파드 Pending(“Too many pods”)
 </a:t>
             </a:r>
             <a:pPr indent="0" marL="0">
               <a:buNone/>
             </a:pPr>
             <a:r>
-              <a:rPr lang="en-US" sz="1250" dirty="0">
+              <a:rPr lang="en-US" sz="1150" dirty="0">
                 <a:solidFill>
                   <a:srgbClr val="24305E"/>
                 </a:solidFill>
@@ -4423,43 +4214,9 @@
                 <a:ea typeface="Calibri" pitchFamily="34" charset="-122"/>
                 <a:cs typeface="Calibri" pitchFamily="34" charset="-120"/>
               </a:rPr>
-              <a:t>6번째 파드가 Pending: “Too many pods”</a:t>
-            </a:r>
-            <a:endParaRPr lang="en-US" sz="1400" dirty="0"/>
-          </a:p>
-          <a:p>
-            <a:pPr indent="0" marL="0">
-              <a:buNone/>
-            </a:pPr>
-            <a:r>
-              <a:rPr lang="en-US" sz="1250" dirty="0">
-                <a:solidFill>
-                  <a:srgbClr val="24305E"/>
-                </a:solidFill>
-                <a:latin typeface="Calibri" pitchFamily="34" charset="0"/>
-                <a:ea typeface="Calibri" pitchFamily="34" charset="-122"/>
-                <a:cs typeface="Calibri" pitchFamily="34" charset="-120"/>
-              </a:rPr>
-              <a:t>노드 자원이 바닥나면 HPA는 무력 —</a:t>
-            </a:r>
-            <a:endParaRPr lang="en-US" sz="1400" dirty="0"/>
-          </a:p>
-          <a:p>
-            <a:pPr indent="0" marL="0">
-              <a:buNone/>
-            </a:pPr>
-            <a:r>
-              <a:rPr lang="en-US" sz="1250" dirty="0">
-                <a:solidFill>
-                  <a:srgbClr val="24305E"/>
-                </a:solidFill>
-                <a:latin typeface="Calibri" pitchFamily="34" charset="0"/>
-                <a:ea typeface="Calibri" pitchFamily="34" charset="-122"/>
-                <a:cs typeface="Calibri" pitchFamily="34" charset="-120"/>
-              </a:rPr>
-              <a:t>노드 확장은 Cluster Autoscaler의 몫 (백로그 근거)</a:t>
-            </a:r>
-            <a:endParaRPr lang="en-US" sz="1400" dirty="0"/>
+              <a:t>노드 확장은 Cluster Autoscaler의 몫 — HPA의 한계까지 실증 (백로그 근거)</a:t>
+            </a:r>
+            <a:endParaRPr lang="en-US" sz="1200" dirty="0"/>
           </a:p>
         </p:txBody>
       </p:sp>

--- a/docs/presentation.pptx
+++ b/docs/presentation.pptx
@@ -2856,7 +2856,7 @@
 
 <file path=ppt/slides/slide10.xml><?xml version="1.0" encoding="utf-8"?>
 <p:sld xmlns:a="http://schemas.openxmlformats.org/drawingml/2006/main" xmlns:r="http://schemas.openxmlformats.org/officeDocument/2006/relationships" xmlns:p="http://schemas.openxmlformats.org/presentationml/2006/main">
-  <p:cSld name="Slide 10">
+  <p:cSld name="Slide 2">
     <p:bg>
       <p:bgPr>
         <a:solidFill>
@@ -2899,7 +2899,7 @@
           <a:bodyPr wrap="square" lIns="0" tIns="0" rIns="0" bIns="0" rtlCol="0" anchor="ctr"/>
           <a:lstStyle/>
           <a:p>
-            <a:pPr algn="l" indent="0" marL="0">
+            <a:pPr indent="0" marL="0">
               <a:buNone/>
             </a:pPr>
             <a:r>
@@ -2965,7 +2965,7 @@
         <p:spPr>
           <a:xfrm>
             <a:off x="548640" y="1463040"/>
-            <a:ext cx="1600200" cy="566928"/>
+            <a:ext cx="1737360" cy="566928"/>
           </a:xfrm>
           <a:prstGeom prst="roundRect">
             <a:avLst>
@@ -2992,7 +2992,7 @@
         <p:spPr>
           <a:xfrm>
             <a:off x="594360" y="1463040"/>
-            <a:ext cx="1508760" cy="566928"/>
+            <a:ext cx="1645920" cy="566928"/>
           </a:xfrm>
           <a:prstGeom prst="rect">
             <a:avLst/>
@@ -3030,8 +3030,8 @@
         </p:nvSpPr>
         <p:spPr>
           <a:xfrm>
-            <a:off x="2176272" y="1645920"/>
-            <a:ext cx="219456" cy="201168"/>
+            <a:off x="2313432" y="1645920"/>
+            <a:ext cx="237744" cy="201168"/>
           </a:xfrm>
           <a:prstGeom prst="rightArrow">
             <a:avLst/>
@@ -3050,8 +3050,8 @@
         </p:nvSpPr>
         <p:spPr>
           <a:xfrm>
-            <a:off x="2423160" y="1463040"/>
-            <a:ext cx="1600200" cy="566928"/>
+            <a:off x="2560320" y="1463040"/>
+            <a:ext cx="1737360" cy="566928"/>
           </a:xfrm>
           <a:prstGeom prst="roundRect">
             <a:avLst>
@@ -3077,8 +3077,8 @@
         </p:nvSpPr>
         <p:spPr>
           <a:xfrm>
-            <a:off x="2468880" y="1463040"/>
-            <a:ext cx="1508760" cy="566928"/>
+            <a:off x="2606040" y="1463040"/>
+            <a:ext cx="1645920" cy="566928"/>
           </a:xfrm>
           <a:prstGeom prst="rect">
             <a:avLst/>
@@ -3116,8 +3116,8 @@
         </p:nvSpPr>
         <p:spPr>
           <a:xfrm>
-            <a:off x="4050792" y="1645920"/>
-            <a:ext cx="219456" cy="201168"/>
+            <a:off x="4325112" y="1645920"/>
+            <a:ext cx="237744" cy="201168"/>
           </a:xfrm>
           <a:prstGeom prst="rightArrow">
             <a:avLst/>
@@ -3136,8 +3136,8 @@
         </p:nvSpPr>
         <p:spPr>
           <a:xfrm>
-            <a:off x="4297680" y="1463040"/>
-            <a:ext cx="1600200" cy="566928"/>
+            <a:off x="4572000" y="1463040"/>
+            <a:ext cx="1737360" cy="566928"/>
           </a:xfrm>
           <a:prstGeom prst="roundRect">
             <a:avLst>
@@ -3163,8 +3163,8 @@
         </p:nvSpPr>
         <p:spPr>
           <a:xfrm>
-            <a:off x="4343400" y="1463040"/>
-            <a:ext cx="1508760" cy="566928"/>
+            <a:off x="4617720" y="1463040"/>
+            <a:ext cx="1645920" cy="566928"/>
           </a:xfrm>
           <a:prstGeom prst="rect">
             <a:avLst/>
@@ -3202,8 +3202,8 @@
         </p:nvSpPr>
         <p:spPr>
           <a:xfrm>
-            <a:off x="548640" y="2240280"/>
-            <a:ext cx="5760720" cy="548640"/>
+            <a:off x="548640" y="2286000"/>
+            <a:ext cx="8138160" cy="365760"/>
           </a:xfrm>
           <a:prstGeom prst="rect">
             <a:avLst/>
@@ -3241,8 +3241,8 @@
         </p:nvSpPr>
         <p:spPr>
           <a:xfrm>
-            <a:off x="548640" y="3017520"/>
-            <a:ext cx="5760720" cy="365760"/>
+            <a:off x="548640" y="2971800"/>
+            <a:ext cx="8138160" cy="365760"/>
           </a:xfrm>
           <a:prstGeom prst="rect">
             <a:avLst/>
@@ -3280,8 +3280,8 @@
         </p:nvSpPr>
         <p:spPr>
           <a:xfrm>
-            <a:off x="548640" y="3474720"/>
-            <a:ext cx="5760720" cy="1737360"/>
+            <a:off x="548640" y="3429000"/>
+            <a:ext cx="8138160" cy="2103120"/>
           </a:xfrm>
           <a:prstGeom prst="rect">
             <a:avLst/>
@@ -3336,6 +3336,9 @@
           </a:p>
           <a:p>
             <a:pPr marL="342900" indent="-342900">
+              <a:spcAft>
+                <a:spcPts val="1000"/>
+              </a:spcAft>
               <a:buSzPct val="100000"/>
               <a:buChar char="•"/>
             </a:pPr>
@@ -3348,10 +3351,28 @@
                 <a:ea typeface="Calibri" pitchFamily="34" charset="-122"/>
                 <a:cs typeface="Calibri" pitchFamily="34" charset="-120"/>
               </a:rPr>
-              <a:t>파드 삭제 시 자동 복구(self-healing)도 이 과정에서 함께 실증</a:t>
+              <a:t>파드 삭제 시 자동 복구(self-healing)도 같은 실험에서 실증</a:t>
             </a:r>
             <a:endParaRPr lang="en-US" sz="1350" dirty="0"/>
           </a:p>
+          <a:p>
+            <a:pPr marL="342900" indent="-342900">
+              <a:buSzPct val="100000"/>
+              <a:buChar char="•"/>
+            </a:pPr>
+            <a:r>
+              <a:rPr lang="en-US" sz="1350" dirty="0">
+                <a:solidFill>
+                  <a:srgbClr val="3A3F52"/>
+                </a:solidFill>
+                <a:latin typeface="Calibri" pitchFamily="34" charset="0"/>
+                <a:ea typeface="Calibri" pitchFamily="34" charset="-122"/>
+                <a:cs typeface="Calibri" pitchFamily="34" charset="-120"/>
+              </a:rPr>
+              <a:t>실전 사례 — Grafana OOMKilled도 이 알람 경로에 실제 이벤트로 포착</a:t>
+            </a:r>
+            <a:endParaRPr lang="en-US" sz="1350" dirty="0"/>
+          </a:p>
         </p:txBody>
       </p:sp>
       <p:sp>
@@ -3362,8 +3383,8 @@
         </p:nvSpPr>
         <p:spPr>
           <a:xfrm>
-            <a:off x="548640" y="5212080"/>
-            <a:ext cx="5760720" cy="1005840"/>
+            <a:off x="548640" y="5623560"/>
+            <a:ext cx="8138160" cy="640080"/>
           </a:xfrm>
           <a:prstGeom prst="rect">
             <a:avLst/>
@@ -3379,7 +3400,7 @@
               <a:buNone/>
             </a:pPr>
             <a:r>
-              <a:rPr lang="en-US" sz="1700" b="1" i="1" dirty="0">
+              <a:rPr lang="en-US" sz="1800" b="1" i="1" dirty="0">
                 <a:solidFill>
                   <a:srgbClr val="1E2761"/>
                 </a:solidFill>
@@ -3387,82 +3408,38 @@
                 <a:ea typeface="Cambria" pitchFamily="34" charset="-122"/>
                 <a:cs typeface="Cambria" pitchFamily="34" charset="-120"/>
               </a:rPr>
-              <a:t>“알림이 오는 것을 확인한 알람만</a:t>
-            </a:r>
-            <a:endParaRPr lang="en-US" sz="1700" dirty="0"/>
-          </a:p>
+              <a:t>“알림이 오는 것을 확인한 알람만 믿을 수 있다”</a:t>
+            </a:r>
+            <a:endParaRPr lang="en-US" sz="1800" dirty="0"/>
+          </a:p>
+        </p:txBody>
+      </p:sp>
+      <p:sp>
+        <p:nvSpPr>
+          <p:cNvPr id="16" name="Text 14"/>
+          <p:cNvSpPr/>
+          <p:nvPr/>
+        </p:nvSpPr>
+        <p:spPr>
+          <a:xfrm>
+            <a:off x="9098280" y="1051560"/>
+            <a:ext cx="2560320" cy="256032"/>
+          </a:xfrm>
+          <a:prstGeom prst="rect">
+            <a:avLst/>
+          </a:prstGeom>
+          <a:noFill/>
+          <a:ln/>
+        </p:spPr>
+        <p:txBody>
+          <a:bodyPr wrap="square" lIns="0" tIns="0" rIns="0" bIns="0" rtlCol="0" anchor="ctr"/>
+          <a:lstStyle/>
           <a:p>
             <a:pPr indent="0" marL="0">
               <a:buNone/>
             </a:pPr>
             <a:r>
-              <a:rPr lang="en-US" sz="1700" b="1" i="1" dirty="0">
-                <a:solidFill>
-                  <a:srgbClr val="1E2761"/>
-                </a:solidFill>
-                <a:latin typeface="Cambria" pitchFamily="34" charset="0"/>
-                <a:ea typeface="Cambria" pitchFamily="34" charset="-122"/>
-                <a:cs typeface="Cambria" pitchFamily="34" charset="-120"/>
-              </a:rPr>
-              <a:t>믿을 수 있다”</a:t>
-            </a:r>
-            <a:endParaRPr lang="en-US" sz="1700" dirty="0"/>
-          </a:p>
-        </p:txBody>
-      </p:sp>
-      <p:sp>
-        <p:nvSpPr>
-          <p:cNvPr id="16" name="Shape 14"/>
-          <p:cNvSpPr/>
-          <p:nvPr/>
-        </p:nvSpPr>
-        <p:spPr>
-          <a:xfrm>
-            <a:off x="6675120" y="1463040"/>
-            <a:ext cx="4937760" cy="4754880"/>
-          </a:xfrm>
-          <a:prstGeom prst="roundRect">
-            <a:avLst>
-              <a:gd name="adj" fmla="val 1538"/>
-            </a:avLst>
-          </a:prstGeom>
-          <a:solidFill>
-            <a:srgbClr val="F4F6FC"/>
-          </a:solidFill>
-          <a:ln w="19050">
-            <a:solidFill>
-              <a:srgbClr val="B9C6EA"/>
-            </a:solidFill>
-            <a:prstDash val="dash"/>
-          </a:ln>
-        </p:spPr>
-      </p:sp>
-      <p:sp>
-        <p:nvSpPr>
-          <p:cNvPr id="17" name="Text 15"/>
-          <p:cNvSpPr/>
-          <p:nvPr/>
-        </p:nvSpPr>
-        <p:spPr>
-          <a:xfrm>
-            <a:off x="6903720" y="2926080"/>
-            <a:ext cx="4480560" cy="1828800"/>
-          </a:xfrm>
-          <a:prstGeom prst="rect">
-            <a:avLst/>
-          </a:prstGeom>
-          <a:noFill/>
-          <a:ln/>
-        </p:spPr>
-        <p:txBody>
-          <a:bodyPr wrap="square" lIns="0" tIns="0" rIns="0" bIns="0" rtlCol="0" anchor="ctr"/>
-          <a:lstStyle/>
-          <a:p>
-            <a:pPr algn="ctr" indent="0" marL="0">
-              <a:buNone/>
-            </a:pPr>
-            <a:r>
-              <a:rPr lang="en-US" sz="1400" dirty="0">
+              <a:rPr lang="en-US" sz="1150" b="1" dirty="0">
                 <a:solidFill>
                   <a:srgbClr val="6B7089"/>
                 </a:solidFill>
@@ -3470,52 +3447,36 @@
                 <a:ea typeface="Calibri" pitchFamily="34" charset="-122"/>
                 <a:cs typeface="Calibri" pitchFamily="34" charset="-120"/>
               </a:rPr>
-              <a:t>Slack 알람 스크린샷 삽입 자리</a:t>
-            </a:r>
-            <a:endParaRPr lang="en-US" sz="1400" dirty="0"/>
-          </a:p>
-          <a:p>
-            <a:pPr algn="ctr" indent="0" marL="0">
-              <a:buNone/>
-            </a:pPr>
-            <a:endParaRPr lang="en-US" sz="1400" dirty="0"/>
-          </a:p>
-          <a:p>
-            <a:pPr algn="ctr" indent="0" marL="0">
-              <a:buNone/>
-            </a:pPr>
-            <a:r>
-              <a:rPr lang="en-US" sz="1400" dirty="0">
-                <a:solidFill>
-                  <a:srgbClr val="6B7089"/>
-                </a:solidFill>
-                <a:latin typeface="Calibri" pitchFamily="34" charset="0"/>
-                <a:ea typeface="Calibri" pitchFamily="34" charset="-122"/>
-                <a:cs typeface="Calibri" pitchFamily="34" charset="-120"/>
-              </a:rPr>
-              <a:t>[FIRING] AppPodRestarting</a:t>
-            </a:r>
-            <a:endParaRPr lang="en-US" sz="1400" dirty="0"/>
-          </a:p>
-          <a:p>
-            <a:pPr algn="ctr" indent="0" marL="0">
-              <a:buNone/>
-            </a:pPr>
-            <a:r>
-              <a:rPr lang="en-US" sz="1400" dirty="0">
-                <a:solidFill>
-                  <a:srgbClr val="6B7089"/>
-                </a:solidFill>
-                <a:latin typeface="Calibri" pitchFamily="34" charset="0"/>
-                <a:ea typeface="Calibri" pitchFamily="34" charset="-122"/>
-                <a:cs typeface="Calibri" pitchFamily="34" charset="-120"/>
-              </a:rPr>
-              <a:t>→ [RESOLVED] 복구 통보</a:t>
-            </a:r>
-            <a:endParaRPr lang="en-US" sz="1400" dirty="0"/>
-          </a:p>
-        </p:txBody>
-      </p:sp>
+              <a:t>Slack — FIRING → RESOLVED 실수신</a:t>
+            </a:r>
+            <a:endParaRPr lang="en-US" sz="1150" dirty="0"/>
+          </a:p>
+        </p:txBody>
+      </p:sp>
+      <p:pic>
+        <p:nvPicPr>
+          <p:cNvPr id="17" name="Image 0" descr="/Users/kohyeokbae/고혁배/claude/eks-gitops-portfolio/docs/images/slack alert.png">    </p:cNvPr>
+          <p:cNvPicPr>
+            <a:picLocks noChangeAspect="1"/>
+          </p:cNvPicPr>
+          <p:nvPr/>
+        </p:nvPicPr>
+        <p:blipFill>
+          <a:blip r:embed="rId1"/>
+          <a:stretch>
+            <a:fillRect/>
+          </a:stretch>
+        </p:blipFill>
+        <p:spPr>
+          <a:xfrm>
+            <a:off x="9189720" y="1325880"/>
+            <a:ext cx="2450592" cy="5029200"/>
+          </a:xfrm>
+          <a:prstGeom prst="rect">
+            <a:avLst/>
+          </a:prstGeom>
+        </p:spPr>
+      </p:pic>
     </p:spTree>
   </p:cSld>
   <p:clrMapOvr>
@@ -16365,7 +16326,7 @@
 
 <file path=ppt/slides/slide9.xml><?xml version="1.0" encoding="utf-8"?>
 <p:sld xmlns:a="http://schemas.openxmlformats.org/drawingml/2006/main" xmlns:r="http://schemas.openxmlformats.org/officeDocument/2006/relationships" xmlns:p="http://schemas.openxmlformats.org/presentationml/2006/main">
-  <p:cSld name="Slide 9">
+  <p:cSld name="Slide 1">
     <p:bg>
       <p:bgPr>
         <a:solidFill>
@@ -16408,7 +16369,7 @@
           <a:bodyPr wrap="square" lIns="0" tIns="0" rIns="0" bIns="0" rtlCol="0" anchor="ctr"/>
           <a:lstStyle/>
           <a:p>
-            <a:pPr algn="l" indent="0" marL="0">
+            <a:pPr indent="0" marL="0">
               <a:buNone/>
             </a:pPr>
             <a:r>
@@ -16509,6 +16470,34 @@
             <a:pPr algn="ctr" indent="0" marL="0">
               <a:buNone/>
             </a:pPr>
+            <a:endParaRPr lang="en-US" sz="1400" dirty="0"/>
+          </a:p>
+        </p:txBody>
+      </p:sp>
+      <p:sp>
+        <p:nvSpPr>
+          <p:cNvPr id="6" name="Text 4"/>
+          <p:cNvSpPr/>
+          <p:nvPr/>
+        </p:nvSpPr>
+        <p:spPr>
+          <a:xfrm>
+            <a:off x="640080" y="1490472"/>
+            <a:ext cx="402336" cy="402336"/>
+          </a:xfrm>
+          <a:prstGeom prst="rect">
+            <a:avLst/>
+          </a:prstGeom>
+          <a:noFill/>
+          <a:ln/>
+        </p:spPr>
+        <p:txBody>
+          <a:bodyPr wrap="square" lIns="0" tIns="0" rIns="0" bIns="0" rtlCol="0" anchor="ctr"/>
+          <a:lstStyle/>
+          <a:p>
+            <a:pPr algn="ctr" indent="0" marL="0">
+              <a:buNone/>
+            </a:pPr>
             <a:r>
               <a:rPr lang="en-US" sz="1400" b="1" dirty="0">
                 <a:solidFill>
@@ -16526,7 +16515,7 @@
       </p:sp>
       <p:sp>
         <p:nvSpPr>
-          <p:cNvPr id="6" name="Shape 4"/>
+          <p:cNvPr id="7" name="Shape 5"/>
           <p:cNvSpPr/>
           <p:nvPr/>
         </p:nvSpPr>
@@ -16549,7 +16538,7 @@
       </p:sp>
       <p:sp>
         <p:nvSpPr>
-          <p:cNvPr id="7" name="Shape 5"/>
+          <p:cNvPr id="8" name="Shape 6"/>
           <p:cNvSpPr/>
           <p:nvPr/>
         </p:nvSpPr>
@@ -16571,7 +16560,7 @@
       </p:sp>
       <p:sp>
         <p:nvSpPr>
-          <p:cNvPr id="8" name="Text 6"/>
+          <p:cNvPr id="9" name="Text 7"/>
           <p:cNvSpPr/>
           <p:nvPr/>
         </p:nvSpPr>
@@ -16624,7 +16613,7 @@
       </p:sp>
       <p:sp>
         <p:nvSpPr>
-          <p:cNvPr id="9" name="Shape 7"/>
+          <p:cNvPr id="10" name="Shape 8"/>
           <p:cNvSpPr/>
           <p:nvPr/>
         </p:nvSpPr>
@@ -16644,7 +16633,7 @@
       </p:sp>
       <p:sp>
         <p:nvSpPr>
-          <p:cNvPr id="10" name="Text 8"/>
+          <p:cNvPr id="11" name="Text 9"/>
           <p:cNvSpPr/>
           <p:nvPr/>
         </p:nvSpPr>
@@ -16666,6 +16655,34 @@
             <a:pPr algn="ctr" indent="0" marL="0">
               <a:buNone/>
             </a:pPr>
+            <a:endParaRPr lang="en-US" sz="1400" dirty="0"/>
+          </a:p>
+        </p:txBody>
+      </p:sp>
+      <p:sp>
+        <p:nvSpPr>
+          <p:cNvPr id="12" name="Text 10"/>
+          <p:cNvSpPr/>
+          <p:nvPr/>
+        </p:nvSpPr>
+        <p:spPr>
+          <a:xfrm>
+            <a:off x="640080" y="2459736"/>
+            <a:ext cx="402336" cy="402336"/>
+          </a:xfrm>
+          <a:prstGeom prst="rect">
+            <a:avLst/>
+          </a:prstGeom>
+          <a:noFill/>
+          <a:ln/>
+        </p:spPr>
+        <p:txBody>
+          <a:bodyPr wrap="square" lIns="0" tIns="0" rIns="0" bIns="0" rtlCol="0" anchor="ctr"/>
+          <a:lstStyle/>
+          <a:p>
+            <a:pPr algn="ctr" indent="0" marL="0">
+              <a:buNone/>
+            </a:pPr>
             <a:r>
               <a:rPr lang="en-US" sz="1400" b="1" dirty="0">
                 <a:solidFill>
@@ -16683,7 +16700,7 @@
       </p:sp>
       <p:sp>
         <p:nvSpPr>
-          <p:cNvPr id="11" name="Shape 9"/>
+          <p:cNvPr id="13" name="Shape 11"/>
           <p:cNvSpPr/>
           <p:nvPr/>
         </p:nvSpPr>
@@ -16706,7 +16723,7 @@
       </p:sp>
       <p:sp>
         <p:nvSpPr>
-          <p:cNvPr id="12" name="Shape 10"/>
+          <p:cNvPr id="14" name="Shape 12"/>
           <p:cNvSpPr/>
           <p:nvPr/>
         </p:nvSpPr>
@@ -16728,7 +16745,7 @@
       </p:sp>
       <p:sp>
         <p:nvSpPr>
-          <p:cNvPr id="13" name="Text 11"/>
+          <p:cNvPr id="15" name="Text 13"/>
           <p:cNvSpPr/>
           <p:nvPr/>
         </p:nvSpPr>
@@ -16781,7 +16798,7 @@
       </p:sp>
       <p:sp>
         <p:nvSpPr>
-          <p:cNvPr id="14" name="Shape 12"/>
+          <p:cNvPr id="16" name="Shape 14"/>
           <p:cNvSpPr/>
           <p:nvPr/>
         </p:nvSpPr>
@@ -16801,7 +16818,7 @@
       </p:sp>
       <p:sp>
         <p:nvSpPr>
-          <p:cNvPr id="15" name="Text 13"/>
+          <p:cNvPr id="17" name="Text 15"/>
           <p:cNvSpPr/>
           <p:nvPr/>
         </p:nvSpPr>
@@ -16823,6 +16840,34 @@
             <a:pPr algn="ctr" indent="0" marL="0">
               <a:buNone/>
             </a:pPr>
+            <a:endParaRPr lang="en-US" sz="1400" dirty="0"/>
+          </a:p>
+        </p:txBody>
+      </p:sp>
+      <p:sp>
+        <p:nvSpPr>
+          <p:cNvPr id="18" name="Text 16"/>
+          <p:cNvSpPr/>
+          <p:nvPr/>
+        </p:nvSpPr>
+        <p:spPr>
+          <a:xfrm>
+            <a:off x="640080" y="3429000"/>
+            <a:ext cx="402336" cy="402336"/>
+          </a:xfrm>
+          <a:prstGeom prst="rect">
+            <a:avLst/>
+          </a:prstGeom>
+          <a:noFill/>
+          <a:ln/>
+        </p:spPr>
+        <p:txBody>
+          <a:bodyPr wrap="square" lIns="0" tIns="0" rIns="0" bIns="0" rtlCol="0" anchor="ctr"/>
+          <a:lstStyle/>
+          <a:p>
+            <a:pPr algn="ctr" indent="0" marL="0">
+              <a:buNone/>
+            </a:pPr>
             <a:r>
               <a:rPr lang="en-US" sz="1400" b="1" dirty="0">
                 <a:solidFill>
@@ -16840,7 +16885,7 @@
       </p:sp>
       <p:sp>
         <p:nvSpPr>
-          <p:cNvPr id="16" name="Shape 14"/>
+          <p:cNvPr id="19" name="Shape 17"/>
           <p:cNvSpPr/>
           <p:nvPr/>
         </p:nvSpPr>
@@ -16863,7 +16908,7 @@
       </p:sp>
       <p:sp>
         <p:nvSpPr>
-          <p:cNvPr id="17" name="Shape 15"/>
+          <p:cNvPr id="20" name="Shape 18"/>
           <p:cNvSpPr/>
           <p:nvPr/>
         </p:nvSpPr>
@@ -16885,7 +16930,7 @@
       </p:sp>
       <p:sp>
         <p:nvSpPr>
-          <p:cNvPr id="18" name="Text 16"/>
+          <p:cNvPr id="21" name="Text 19"/>
           <p:cNvSpPr/>
           <p:nvPr/>
         </p:nvSpPr>
@@ -16938,7 +16983,7 @@
       </p:sp>
       <p:sp>
         <p:nvSpPr>
-          <p:cNvPr id="19" name="Shape 17"/>
+          <p:cNvPr id="22" name="Shape 20"/>
           <p:cNvSpPr/>
           <p:nvPr/>
         </p:nvSpPr>
@@ -16958,7 +17003,7 @@
       </p:sp>
       <p:sp>
         <p:nvSpPr>
-          <p:cNvPr id="20" name="Text 18"/>
+          <p:cNvPr id="23" name="Text 21"/>
           <p:cNvSpPr/>
           <p:nvPr/>
         </p:nvSpPr>
@@ -16980,6 +17025,34 @@
             <a:pPr algn="ctr" indent="0" marL="0">
               <a:buNone/>
             </a:pPr>
+            <a:endParaRPr lang="en-US" sz="1400" dirty="0"/>
+          </a:p>
+        </p:txBody>
+      </p:sp>
+      <p:sp>
+        <p:nvSpPr>
+          <p:cNvPr id="24" name="Text 22"/>
+          <p:cNvSpPr/>
+          <p:nvPr/>
+        </p:nvSpPr>
+        <p:spPr>
+          <a:xfrm>
+            <a:off x="640080" y="4398264"/>
+            <a:ext cx="402336" cy="402336"/>
+          </a:xfrm>
+          <a:prstGeom prst="rect">
+            <a:avLst/>
+          </a:prstGeom>
+          <a:noFill/>
+          <a:ln/>
+        </p:spPr>
+        <p:txBody>
+          <a:bodyPr wrap="square" lIns="0" tIns="0" rIns="0" bIns="0" rtlCol="0" anchor="ctr"/>
+          <a:lstStyle/>
+          <a:p>
+            <a:pPr algn="ctr" indent="0" marL="0">
+              <a:buNone/>
+            </a:pPr>
             <a:r>
               <a:rPr lang="en-US" sz="1400" b="1" dirty="0">
                 <a:solidFill>
@@ -16997,7 +17070,7 @@
       </p:sp>
       <p:sp>
         <p:nvSpPr>
-          <p:cNvPr id="21" name="Shape 19"/>
+          <p:cNvPr id="25" name="Shape 23"/>
           <p:cNvSpPr/>
           <p:nvPr/>
         </p:nvSpPr>
@@ -17020,7 +17093,7 @@
       </p:sp>
       <p:sp>
         <p:nvSpPr>
-          <p:cNvPr id="22" name="Shape 20"/>
+          <p:cNvPr id="26" name="Shape 24"/>
           <p:cNvSpPr/>
           <p:nvPr/>
         </p:nvSpPr>
@@ -17042,7 +17115,7 @@
       </p:sp>
       <p:sp>
         <p:nvSpPr>
-          <p:cNvPr id="23" name="Text 21"/>
+          <p:cNvPr id="27" name="Text 25"/>
           <p:cNvSpPr/>
           <p:nvPr/>
         </p:nvSpPr>
@@ -17095,7 +17168,7 @@
       </p:sp>
       <p:sp>
         <p:nvSpPr>
-          <p:cNvPr id="24" name="Shape 22"/>
+          <p:cNvPr id="28" name="Shape 26"/>
           <p:cNvSpPr/>
           <p:nvPr/>
         </p:nvSpPr>
@@ -17115,7 +17188,7 @@
       </p:sp>
       <p:sp>
         <p:nvSpPr>
-          <p:cNvPr id="25" name="Text 23"/>
+          <p:cNvPr id="29" name="Text 27"/>
           <p:cNvSpPr/>
           <p:nvPr/>
         </p:nvSpPr>
@@ -17137,6 +17210,34 @@
             <a:pPr algn="ctr" indent="0" marL="0">
               <a:buNone/>
             </a:pPr>
+            <a:endParaRPr lang="en-US" sz="1400" dirty="0"/>
+          </a:p>
+        </p:txBody>
+      </p:sp>
+      <p:sp>
+        <p:nvSpPr>
+          <p:cNvPr id="30" name="Text 28"/>
+          <p:cNvSpPr/>
+          <p:nvPr/>
+        </p:nvSpPr>
+        <p:spPr>
+          <a:xfrm>
+            <a:off x="640080" y="5367528"/>
+            <a:ext cx="402336" cy="402336"/>
+          </a:xfrm>
+          <a:prstGeom prst="rect">
+            <a:avLst/>
+          </a:prstGeom>
+          <a:noFill/>
+          <a:ln/>
+        </p:spPr>
+        <p:txBody>
+          <a:bodyPr wrap="square" lIns="0" tIns="0" rIns="0" bIns="0" rtlCol="0" anchor="ctr"/>
+          <a:lstStyle/>
+          <a:p>
+            <a:pPr algn="ctr" indent="0" marL="0">
+              <a:buNone/>
+            </a:pPr>
             <a:r>
               <a:rPr lang="en-US" sz="1400" b="1" dirty="0">
                 <a:solidFill>
@@ -17154,7 +17255,7 @@
       </p:sp>
       <p:sp>
         <p:nvSpPr>
-          <p:cNvPr id="26" name="Shape 24"/>
+          <p:cNvPr id="31" name="Shape 29"/>
           <p:cNvSpPr/>
           <p:nvPr/>
         </p:nvSpPr>
@@ -17176,7 +17277,7 @@
       </p:sp>
       <p:sp>
         <p:nvSpPr>
-          <p:cNvPr id="27" name="Text 25"/>
+          <p:cNvPr id="32" name="Text 30"/>
           <p:cNvSpPr/>
           <p:nvPr/>
         </p:nvSpPr>
@@ -17229,53 +17330,14 @@
       </p:sp>
       <p:sp>
         <p:nvSpPr>
-          <p:cNvPr id="28" name="Text 26"/>
-          <p:cNvSpPr/>
-          <p:nvPr/>
-        </p:nvSpPr>
-        <p:spPr>
-          <a:xfrm>
-            <a:off x="7772400" y="1371600"/>
-            <a:ext cx="3840480" cy="365760"/>
-          </a:xfrm>
-          <a:prstGeom prst="rect">
-            <a:avLst/>
-          </a:prstGeom>
-          <a:noFill/>
-          <a:ln/>
-        </p:spPr>
-        <p:txBody>
-          <a:bodyPr wrap="square" lIns="0" tIns="0" rIns="0" bIns="0" rtlCol="0" anchor="ctr"/>
-          <a:lstStyle/>
-          <a:p>
-            <a:pPr indent="0" marL="0">
-              <a:buNone/>
-            </a:pPr>
-            <a:r>
-              <a:rPr lang="en-US" sz="1600" b="1" dirty="0">
-                <a:solidFill>
-                  <a:srgbClr val="1E2761"/>
-                </a:solidFill>
-                <a:latin typeface="Cambria" pitchFamily="34" charset="0"/>
-                <a:ea typeface="Cambria" pitchFamily="34" charset="-122"/>
-                <a:cs typeface="Cambria" pitchFamily="34" charset="-120"/>
-              </a:rPr>
-              <a:t>GitOps 구조</a:t>
-            </a:r>
-            <a:endParaRPr lang="en-US" sz="1600" dirty="0"/>
-          </a:p>
-        </p:txBody>
-      </p:sp>
-      <p:sp>
-        <p:nvSpPr>
-          <p:cNvPr id="29" name="Text 27"/>
-          <p:cNvSpPr/>
-          <p:nvPr/>
-        </p:nvSpPr>
-        <p:spPr>
-          <a:xfrm>
-            <a:off x="7772400" y="1828800"/>
-            <a:ext cx="3886200" cy="2377440"/>
+          <p:cNvPr id="33" name="Text 31"/>
+          <p:cNvSpPr/>
+          <p:nvPr/>
+        </p:nvSpPr>
+        <p:spPr>
+          <a:xfrm>
+            <a:off x="7680960" y="1371600"/>
+            <a:ext cx="3977640" cy="1737360"/>
           </a:xfrm>
           <a:prstGeom prst="rect">
             <a:avLst/>
@@ -17289,13 +17351,13 @@
           <a:p>
             <a:pPr marL="342900" indent="-342900">
               <a:spcAft>
-                <a:spcPts val="1000"/>
+                <a:spcPts val="800"/>
               </a:spcAft>
               <a:buSzPct val="100000"/>
               <a:buChar char="•"/>
             </a:pPr>
             <a:r>
-              <a:rPr lang="en-US" sz="1350" dirty="0">
+              <a:rPr lang="en-US" sz="1250" dirty="0">
                 <a:solidFill>
                   <a:srgbClr val="3A3F52"/>
                 </a:solidFill>
@@ -17303,30 +17365,9 @@
                 <a:ea typeface="Calibri" pitchFamily="34" charset="-122"/>
                 <a:cs typeface="Calibri" pitchFamily="34" charset="-120"/>
               </a:rPr>
-              <a:t>앱 repo(공개) · 매니페스트 repo(비공개) 분리 — Git이 배포 상태의 단일 진실 공급원</a:t>
-            </a:r>
-            <a:endParaRPr lang="en-US" sz="1350" dirty="0"/>
-          </a:p>
-          <a:p>
-            <a:pPr marL="342900" indent="-342900">
-              <a:spcAft>
-                <a:spcPts val="1000"/>
-              </a:spcAft>
-              <a:buSzPct val="100000"/>
-              <a:buChar char="•"/>
-            </a:pPr>
-            <a:r>
-              <a:rPr lang="en-US" sz="1350" dirty="0">
-                <a:solidFill>
-                  <a:srgbClr val="3A3F52"/>
-                </a:solidFill>
-                <a:latin typeface="Calibri" pitchFamily="34" charset="0"/>
-                <a:ea typeface="Calibri" pitchFamily="34" charset="-122"/>
-                <a:cs typeface="Calibri" pitchFamily="34" charset="-120"/>
-              </a:rPr>
-              <a:t>수동 변경이 섞여도 ArgoCD가 drift 감지 후 Git 상태로 복원</a:t>
-            </a:r>
-            <a:endParaRPr lang="en-US" sz="1350" dirty="0"/>
+              <a:t>앱 repo(공개) · 매니페스트 repo(비공개) 분리 — Git이 단일 진실 공급원</a:t>
+            </a:r>
+            <a:endParaRPr lang="en-US" sz="1250" dirty="0"/>
           </a:p>
           <a:p>
             <a:pPr marL="342900" indent="-342900">
@@ -17334,7 +17375,7 @@
               <a:buChar char="•"/>
             </a:pPr>
             <a:r>
-              <a:rPr lang="en-US" sz="1350" dirty="0">
+              <a:rPr lang="en-US" sz="1250" dirty="0">
                 <a:solidFill>
                   <a:srgbClr val="3A3F52"/>
                 </a:solidFill>
@@ -17342,107 +17383,75 @@
                 <a:ea typeface="Calibri" pitchFamily="34" charset="-122"/>
                 <a:cs typeface="Calibri" pitchFamily="34" charset="-120"/>
               </a:rPr>
-              <a:t>롤백 = 매니페스트 repo git revert 한 번</a:t>
-            </a:r>
-            <a:endParaRPr lang="en-US" sz="1350" dirty="0"/>
-          </a:p>
-        </p:txBody>
-      </p:sp>
-      <p:sp>
-        <p:nvSpPr>
-          <p:cNvPr id="30" name="Shape 28"/>
-          <p:cNvSpPr/>
-          <p:nvPr/>
-        </p:nvSpPr>
-        <p:spPr>
-          <a:xfrm>
-            <a:off x="7772400" y="4572000"/>
-            <a:ext cx="3886200" cy="1417320"/>
-          </a:xfrm>
-          <a:prstGeom prst="roundRect">
-            <a:avLst>
-              <a:gd name="adj" fmla="val 5161"/>
-            </a:avLst>
-          </a:prstGeom>
-          <a:solidFill>
-            <a:srgbClr val="10163F"/>
-          </a:solidFill>
-          <a:ln/>
-        </p:spPr>
-      </p:sp>
-      <p:sp>
-        <p:nvSpPr>
-          <p:cNvPr id="31" name="Text 29"/>
-          <p:cNvSpPr/>
-          <p:nvPr/>
-        </p:nvSpPr>
-        <p:spPr>
-          <a:xfrm>
-            <a:off x="8001000" y="4709160"/>
-            <a:ext cx="3474720" cy="1143000"/>
-          </a:xfrm>
-          <a:prstGeom prst="rect">
-            <a:avLst/>
-          </a:prstGeom>
-          <a:noFill/>
-          <a:ln/>
-        </p:spPr>
-        <p:txBody>
-          <a:bodyPr wrap="square" lIns="0" tIns="0" rIns="0" bIns="0" rtlCol="0" anchor="t"/>
+              <a:t>drift는 ArgoCD가 감지해 Git 상태로 복원 · 롤백 = git revert 한 번</a:t>
+            </a:r>
+            <a:endParaRPr lang="en-US" sz="1250" dirty="0"/>
+          </a:p>
+        </p:txBody>
+      </p:sp>
+      <p:sp>
+        <p:nvSpPr>
+          <p:cNvPr id="34" name="Text 32"/>
+          <p:cNvSpPr/>
+          <p:nvPr/>
+        </p:nvSpPr>
+        <p:spPr>
+          <a:xfrm>
+            <a:off x="7680960" y="3246120"/>
+            <a:ext cx="3977640" cy="256032"/>
+          </a:xfrm>
+          <a:prstGeom prst="rect">
+            <a:avLst/>
+          </a:prstGeom>
+          <a:noFill/>
+          <a:ln/>
+        </p:spPr>
+        <p:txBody>
+          <a:bodyPr wrap="square" lIns="0" tIns="0" rIns="0" bIns="0" rtlCol="0" anchor="ctr"/>
           <a:lstStyle/>
           <a:p>
             <a:pPr indent="0" marL="0">
               <a:buNone/>
             </a:pPr>
             <a:r>
-              <a:rPr lang="en-US" sz="1250" dirty="0">
-                <a:solidFill>
-                  <a:srgbClr val="9FB6E8"/>
-                </a:solidFill>
-                <a:latin typeface="Courier New" pitchFamily="34" charset="0"/>
-                <a:ea typeface="Courier New" pitchFamily="34" charset="-122"/>
-                <a:cs typeface="Courier New" pitchFamily="34" charset="-120"/>
-              </a:rPr>
-              <a:t>$ curl http://&lt;ALB&gt;/healthz</a:t>
-            </a:r>
-            <a:endParaRPr lang="en-US" sz="1250" dirty="0"/>
-          </a:p>
-          <a:p>
-            <a:pPr indent="0" marL="0">
-              <a:buNone/>
-            </a:pPr>
-            <a:r>
-              <a:rPr lang="en-US" sz="1250" dirty="0">
-                <a:solidFill>
-                  <a:srgbClr val="7FE3A8"/>
-                </a:solidFill>
-                <a:latin typeface="Courier New" pitchFamily="34" charset="0"/>
-                <a:ea typeface="Courier New" pitchFamily="34" charset="-122"/>
-                <a:cs typeface="Courier New" pitchFamily="34" charset="-120"/>
-              </a:rPr>
-              <a:t>{"status":"ok",</a:t>
-            </a:r>
-            <a:endParaRPr lang="en-US" sz="1250" dirty="0"/>
-          </a:p>
-          <a:p>
-            <a:pPr indent="0" marL="0">
-              <a:buNone/>
-            </a:pPr>
-            <a:r>
-              <a:rPr lang="en-US" sz="1250" dirty="0">
-                <a:solidFill>
-                  <a:srgbClr val="7FE3A8"/>
-                </a:solidFill>
-                <a:latin typeface="Courier New" pitchFamily="34" charset="0"/>
-                <a:ea typeface="Courier New" pitchFamily="34" charset="-122"/>
-                <a:cs typeface="Courier New" pitchFamily="34" charset="-120"/>
-              </a:rPr>
-              <a:t> "version":"0.2.1"}</a:t>
-            </a:r>
-            <a:endParaRPr lang="en-US" sz="1250" dirty="0"/>
-          </a:p>
-        </p:txBody>
-      </p:sp>
+              <a:rPr lang="en-US" sz="1150" b="1" dirty="0">
+                <a:solidFill>
+                  <a:srgbClr val="6B7089"/>
+                </a:solidFill>
+                <a:latin typeface="Calibri" pitchFamily="34" charset="0"/>
+                <a:ea typeface="Calibri" pitchFamily="34" charset="-122"/>
+                <a:cs typeface="Calibri" pitchFamily="34" charset="-120"/>
+              </a:rPr>
+              <a:t>ArgoCD — Synced / Healthy, hpa 포함 리소스 트리</a:t>
+            </a:r>
+            <a:endParaRPr lang="en-US" sz="1150" dirty="0"/>
+          </a:p>
+        </p:txBody>
+      </p:sp>
+      <p:pic>
+        <p:nvPicPr>
+          <p:cNvPr id="35" name="Image 0" descr="/Users/kohyeokbae/고혁배/claude/eks-gitops-portfolio/docs/images/ArgoCD.png">    </p:cNvPr>
+          <p:cNvPicPr>
+            <a:picLocks noChangeAspect="1"/>
+          </p:cNvPicPr>
+          <p:nvPr/>
+        </p:nvPicPr>
+        <p:blipFill>
+          <a:blip r:embed="rId1"/>
+          <a:stretch>
+            <a:fillRect/>
+          </a:stretch>
+        </p:blipFill>
+        <p:spPr>
+          <a:xfrm>
+            <a:off x="7680960" y="3520440"/>
+            <a:ext cx="3977640" cy="2322576"/>
+          </a:xfrm>
+          <a:prstGeom prst="rect">
+            <a:avLst/>
+          </a:prstGeom>
+        </p:spPr>
+      </p:pic>
     </p:spTree>
   </p:cSld>
   <p:clrMapOvr>

--- a/docs/presentation.pptx
+++ b/docs/presentation.pptx
@@ -8954,7 +8954,7 @@
 
 <file path=ppt/slides/slide19.xml><?xml version="1.0" encoding="utf-8"?>
 <p:sld xmlns:a="http://schemas.openxmlformats.org/drawingml/2006/main" xmlns:r="http://schemas.openxmlformats.org/officeDocument/2006/relationships" xmlns:p="http://schemas.openxmlformats.org/presentationml/2006/main">
-  <p:cSld name="Slide 19">
+  <p:cSld name="Slide 1">
     <p:bg>
       <p:bgPr>
         <a:solidFill>
@@ -9024,7 +9024,7 @@
         </p:nvSpPr>
         <p:spPr>
           <a:xfrm>
-            <a:off x="822960" y="1554480"/>
+            <a:off x="822960" y="1234440"/>
             <a:ext cx="10515600" cy="914400"/>
           </a:xfrm>
           <a:prstGeom prst="rect">
@@ -9063,7 +9063,7 @@
         </p:nvSpPr>
         <p:spPr>
           <a:xfrm>
-            <a:off x="822960" y="2651760"/>
+            <a:off x="822960" y="2331720"/>
             <a:ext cx="10515600" cy="457200"/>
           </a:xfrm>
           <a:prstGeom prst="rect">
@@ -9102,7 +9102,7 @@
         </p:nvSpPr>
         <p:spPr>
           <a:xfrm>
-            <a:off x="822960" y="3657600"/>
+            <a:off x="822960" y="3154680"/>
             <a:ext cx="10515600" cy="365760"/>
           </a:xfrm>
           <a:prstGeom prst="rect">
@@ -9141,7 +9141,7 @@
         </p:nvSpPr>
         <p:spPr>
           <a:xfrm>
-            <a:off x="822960" y="4114800"/>
+            <a:off x="822960" y="3611880"/>
             <a:ext cx="10515600" cy="1280160"/>
           </a:xfrm>
           <a:prstGeom prst="rect">
@@ -9212,45 +9212,30 @@
           </a:p>
         </p:txBody>
       </p:sp>
-      <p:sp>
-        <p:nvSpPr>
-          <p:cNvPr id="8" name="Text 6"/>
-          <p:cNvSpPr/>
-          <p:nvPr/>
-        </p:nvSpPr>
-        <p:spPr>
-          <a:xfrm>
-            <a:off x="8778240" y="6309360"/>
-            <a:ext cx="3017520" cy="320040"/>
-          </a:xfrm>
-          <a:prstGeom prst="rect">
-            <a:avLst/>
-          </a:prstGeom>
-          <a:noFill/>
-          <a:ln/>
-        </p:spPr>
-        <p:txBody>
-          <a:bodyPr wrap="square" lIns="0" tIns="0" rIns="0" bIns="0" rtlCol="0" anchor="ctr"/>
-          <a:lstStyle/>
-          <a:p>
-            <a:pPr algn="r" indent="0" marL="0">
-              <a:buNone/>
-            </a:pPr>
-            <a:r>
-              <a:rPr lang="en-US" sz="1000" dirty="0">
-                <a:solidFill>
-                  <a:srgbClr val="6B7BC4"/>
-                </a:solidFill>
-                <a:latin typeface="Calibri" pitchFamily="34" charset="0"/>
-                <a:ea typeface="Calibri" pitchFamily="34" charset="-122"/>
-                <a:cs typeface="Calibri" pitchFamily="34" charset="-120"/>
-              </a:rPr>
-              <a:t>(QR코드 삽입 자리 — 우하단)</a:t>
-            </a:r>
-            <a:endParaRPr lang="en-US" sz="1000" dirty="0"/>
-          </a:p>
-        </p:txBody>
-      </p:sp>
+      <p:pic>
+        <p:nvPicPr>
+          <p:cNvPr id="8" name="Image 0" descr="/private/tmp/claude-501/-Users-kohyeokbae-----claude/54364cdd-dcdd-49c1-bb3a-3e6e8bf637be/scratchpad/qr.png">    </p:cNvPr>
+          <p:cNvPicPr>
+            <a:picLocks noChangeAspect="1"/>
+          </p:cNvPicPr>
+          <p:nvPr/>
+        </p:nvPicPr>
+        <p:blipFill>
+          <a:blip r:embed="rId1"/>
+          <a:stretch>
+            <a:fillRect/>
+          </a:stretch>
+        </p:blipFill>
+        <p:spPr>
+          <a:xfrm>
+            <a:off x="5431536" y="5074920"/>
+            <a:ext cx="1325880" cy="1325880"/>
+          </a:xfrm>
+          <a:prstGeom prst="rect">
+            <a:avLst/>
+          </a:prstGeom>
+        </p:spPr>
+      </p:pic>
     </p:spTree>
   </p:cSld>
   <p:clrMapOvr>

--- a/docs/presentation.pptx
+++ b/docs/presentation.pptx
@@ -22,6 +22,7 @@
     <p:sldId id="270" r:id="rId16"/>
     <p:sldId id="271" r:id="rId17"/>
     <p:sldId id="272" r:id="rId18"/>
+    <p:sldId id="275" r:id="rId26"/>
     <p:sldId id="273" r:id="rId19"/>
     <p:sldId id="274" r:id="rId20"/>
   </p:sldIdLst>
@@ -6489,7 +6490,7 @@
 
 <file path=ppt/slides/slide16.xml><?xml version="1.0" encoding="utf-8"?>
 <p:sld xmlns:a="http://schemas.openxmlformats.org/drawingml/2006/main" xmlns:r="http://schemas.openxmlformats.org/officeDocument/2006/relationships" xmlns:p="http://schemas.openxmlformats.org/presentationml/2006/main">
-  <p:cSld name="Slide 16">
+  <p:cSld name="Slide 1">
     <p:bg>
       <p:bgPr>
         <a:solidFill>
@@ -6532,7 +6533,7 @@
           <a:bodyPr wrap="square" lIns="0" tIns="0" rIns="0" bIns="0" rtlCol="0" anchor="ctr"/>
           <a:lstStyle/>
           <a:p>
-            <a:pPr algn="l" indent="0" marL="0">
+            <a:pPr indent="0" marL="0">
               <a:buNone/>
             </a:pPr>
             <a:r>
@@ -6591,7 +6592,7 @@
       </p:sp>
       <p:graphicFrame>
         <p:nvGraphicFramePr>
-          <p:cNvPr id="17" name="Table 0"/>
+          <p:cNvPr id="2" name="Table 0"/>
           <p:cNvGraphicFramePr>
             <a:graphicFrameLocks noGrp="1"/>
           </p:cNvGraphicFramePr>
@@ -6604,7 +6605,7 @@
           </p:nvPr>
         </p:nvGraphicFramePr>
         <p:xfrm>
-          <a:off x="548640" y="1325880"/>
+          <a:off x="548640" y="1207008"/>
           <a:ext cx="11064240" cy="914400"/>
         </p:xfrm>
         <a:graphic>
@@ -6612,11 +6613,11 @@
             <a:tbl>
               <a:tblPr/>
               <a:tblGrid>
-                <a:gridCol w="1920240"/>
-                <a:gridCol w="2468880"/>
-                <a:gridCol w="6675120"/>
+                <a:gridCol w="1737360"/>
+                <a:gridCol w="2286000"/>
+                <a:gridCol w="7040880"/>
               </a:tblGrid>
-              <a:tr h="457200">
+              <a:tr h="420624">
                 <a:tc>
                   <a:txBody>
                     <a:bodyPr/>
@@ -6626,7 +6627,7 @@
                         <a:buNone/>
                       </a:pPr>
                       <a:r>
-                        <a:rPr lang="en-US" sz="1400" b="1" dirty="0">
+                        <a:rPr lang="en-US" sz="1350" b="1" dirty="0">
                           <a:solidFill>
                             <a:srgbClr val="FFFFFF"/>
                           </a:solidFill>
@@ -6636,14 +6637,14 @@
                         </a:rPr>
                         <a:t>결정 항목</a:t>
                       </a:r>
-                      <a:endParaRPr lang="en-US" sz="1400" dirty="0">
+                      <a:endParaRPr lang="en-US" sz="1350" dirty="0">
                         <a:latin typeface="Calibri" charset="0"/>
                         <a:ea typeface="Calibri" charset="0"/>
                         <a:cs typeface="Calibri" charset="0"/>
                       </a:endParaRPr>
                     </a:p>
                   </a:txBody>
-                  <a:tcPr marL="91440" marR="91440" marT="91440" marB="91440" anchor="ctr">
+                  <a:tcPr marL="82296" marR="82296" marT="82296" marB="82296" anchor="ctr">
                     <a:lnL w="12700" cap="flat" cmpd="sng" algn="ctr">
                       <a:solidFill>
                         <a:srgbClr val="E1E6F5"/>
@@ -6694,7 +6695,7 @@
                         <a:buNone/>
                       </a:pPr>
                       <a:r>
-                        <a:rPr lang="en-US" sz="1400" b="1" dirty="0">
+                        <a:rPr lang="en-US" sz="1350" b="1" dirty="0">
                           <a:solidFill>
                             <a:srgbClr val="FFFFFF"/>
                           </a:solidFill>
@@ -6704,14 +6705,14 @@
                         </a:rPr>
                         <a:t>선택</a:t>
                       </a:r>
-                      <a:endParaRPr lang="en-US" sz="1400" dirty="0">
+                      <a:endParaRPr lang="en-US" sz="1350" dirty="0">
                         <a:latin typeface="Calibri" charset="0"/>
                         <a:ea typeface="Calibri" charset="0"/>
                         <a:cs typeface="Calibri" charset="0"/>
                       </a:endParaRPr>
                     </a:p>
                   </a:txBody>
-                  <a:tcPr marL="91440" marR="91440" marT="91440" marB="91440" anchor="ctr">
+                  <a:tcPr marL="82296" marR="82296" marT="82296" marB="82296" anchor="ctr">
                     <a:lnL w="12700" cap="flat" cmpd="sng" algn="ctr">
                       <a:solidFill>
                         <a:srgbClr val="E1E6F5"/>
@@ -6762,7 +6763,7 @@
                         <a:buNone/>
                       </a:pPr>
                       <a:r>
-                        <a:rPr lang="en-US" sz="1400" b="1" dirty="0">
+                        <a:rPr lang="en-US" sz="1350" b="1" dirty="0">
                           <a:solidFill>
                             <a:srgbClr val="FFFFFF"/>
                           </a:solidFill>
@@ -6772,14 +6773,14 @@
                         </a:rPr>
                         <a:t>근거</a:t>
                       </a:r>
-                      <a:endParaRPr lang="en-US" sz="1400" dirty="0">
+                      <a:endParaRPr lang="en-US" sz="1350" dirty="0">
                         <a:latin typeface="Calibri" charset="0"/>
                         <a:ea typeface="Calibri" charset="0"/>
                         <a:cs typeface="Calibri" charset="0"/>
                       </a:endParaRPr>
                     </a:p>
                   </a:txBody>
-                  <a:tcPr marL="91440" marR="91440" marT="91440" marB="91440" anchor="ctr">
+                  <a:tcPr marL="82296" marR="82296" marT="82296" marB="82296" anchor="ctr">
                     <a:lnL w="12700" cap="flat" cmpd="sng" algn="ctr">
                       <a:solidFill>
                         <a:srgbClr val="E1E6F5"/>
@@ -6822,7 +6823,7 @@
                   </a:tcPr>
                 </a:tc>
               </a:tr>
-              <a:tr h="841248">
+              <a:tr h="749808">
                 <a:tc>
                   <a:txBody>
                     <a:bodyPr/>
@@ -6832,7 +6833,7 @@
                         <a:buNone/>
                       </a:pPr>
                       <a:r>
-                        <a:rPr lang="en-US" sz="1300" b="1" dirty="0">
+                        <a:rPr lang="en-US" sz="1250" b="1" dirty="0">
                           <a:solidFill>
                             <a:srgbClr val="1E2761"/>
                           </a:solidFill>
@@ -6842,14 +6843,14 @@
                         </a:rPr>
                         <a:t>배포 방식</a:t>
                       </a:r>
-                      <a:endParaRPr lang="en-US" sz="1300" dirty="0">
+                      <a:endParaRPr lang="en-US" sz="1250" dirty="0">
                         <a:latin typeface="Calibri" charset="0"/>
                         <a:ea typeface="Calibri" charset="0"/>
                         <a:cs typeface="Calibri" charset="0"/>
                       </a:endParaRPr>
                     </a:p>
                   </a:txBody>
-                  <a:tcPr marL="91440" marR="91440" marT="91440" marB="91440" anchor="ctr">
+                  <a:tcPr marL="82296" marR="82296" marT="82296" marB="82296" anchor="ctr">
                     <a:lnL w="12700" cap="flat" cmpd="sng" algn="ctr">
                       <a:solidFill>
                         <a:srgbClr val="E1E6F5"/>
@@ -6900,7 +6901,7 @@
                         <a:buNone/>
                       </a:pPr>
                       <a:r>
-                        <a:rPr lang="en-US" sz="1250" b="1" dirty="0">
+                        <a:rPr lang="en-US" sz="1200" b="1" dirty="0">
                           <a:solidFill>
                             <a:srgbClr val="3556B8"/>
                           </a:solidFill>
@@ -6910,14 +6911,14 @@
                         </a:rPr>
                         <a:t>ArgoCD (pull)</a:t>
                       </a:r>
-                      <a:endParaRPr lang="en-US" sz="1250" dirty="0">
+                      <a:endParaRPr lang="en-US" sz="1200" dirty="0">
                         <a:latin typeface="Calibri" charset="0"/>
                         <a:ea typeface="Calibri" charset="0"/>
                         <a:cs typeface="Calibri" charset="0"/>
                       </a:endParaRPr>
                     </a:p>
                   </a:txBody>
-                  <a:tcPr marL="91440" marR="91440" marT="91440" marB="91440" anchor="ctr">
+                  <a:tcPr marL="82296" marR="82296" marT="82296" marB="82296" anchor="ctr">
                     <a:lnL w="12700" cap="flat" cmpd="sng" algn="ctr">
                       <a:solidFill>
                         <a:srgbClr val="E1E6F5"/>
@@ -6968,7 +6969,7 @@
                         <a:buNone/>
                       </a:pPr>
                       <a:r>
-                        <a:rPr lang="en-US" sz="1200" dirty="0">
+                        <a:rPr lang="en-US" sz="1150" dirty="0">
                           <a:solidFill>
                             <a:srgbClr val="3A3F52"/>
                           </a:solidFill>
@@ -6976,16 +6977,16 @@
                           <a:ea typeface="Calibri" pitchFamily="34" charset="-122"/>
                           <a:cs typeface="Calibri" pitchFamily="34" charset="-120"/>
                         </a:rPr>
-                        <a:t>CI 직접 배포 대비 자격증명이 클러스터 밖으로 안 나감 · drift 감지와 자동 복구 — Git이 단일 진실 공급원</a:t>
+                        <a:t>CI 직접 배포 대비 자격증명이 클러스터 밖으로 안 나감 · drift 감지·자동 복구 — Git이 단일 진실 공급원</a:t>
                       </a:r>
-                      <a:endParaRPr lang="en-US" sz="1200" dirty="0">
+                      <a:endParaRPr lang="en-US" sz="1150" dirty="0">
                         <a:latin typeface="Calibri" charset="0"/>
                         <a:ea typeface="Calibri" charset="0"/>
                         <a:cs typeface="Calibri" charset="0"/>
                       </a:endParaRPr>
                     </a:p>
                   </a:txBody>
-                  <a:tcPr marL="91440" marR="91440" marT="91440" marB="91440" anchor="ctr">
+                  <a:tcPr marL="82296" marR="82296" marT="82296" marB="82296" anchor="ctr">
                     <a:lnL w="12700" cap="flat" cmpd="sng" algn="ctr">
                       <a:solidFill>
                         <a:srgbClr val="E1E6F5"/>
@@ -7028,7 +7029,7 @@
                   </a:tcPr>
                 </a:tc>
               </a:tr>
-              <a:tr h="841248">
+              <a:tr h="749808">
                 <a:tc>
                   <a:txBody>
                     <a:bodyPr/>
@@ -7038,7 +7039,7 @@
                         <a:buNone/>
                       </a:pPr>
                       <a:r>
-                        <a:rPr lang="en-US" sz="1300" b="1" dirty="0">
+                        <a:rPr lang="en-US" sz="1250" b="1" dirty="0">
                           <a:solidFill>
                             <a:srgbClr val="1E2761"/>
                           </a:solidFill>
@@ -7046,16 +7047,16 @@
                           <a:ea typeface="Calibri" pitchFamily="34" charset="-122"/>
                           <a:cs typeface="Calibri" pitchFamily="34" charset="-120"/>
                         </a:rPr>
-                        <a:t>데이터 계층</a:t>
+                        <a:t>HPA 기준</a:t>
                       </a:r>
-                      <a:endParaRPr lang="en-US" sz="1300" dirty="0">
+                      <a:endParaRPr lang="en-US" sz="1250" dirty="0">
                         <a:latin typeface="Calibri" charset="0"/>
                         <a:ea typeface="Calibri" charset="0"/>
                         <a:cs typeface="Calibri" charset="0"/>
                       </a:endParaRPr>
                     </a:p>
                   </a:txBody>
-                  <a:tcPr marL="91440" marR="91440" marT="91440" marB="91440" anchor="ctr">
+                  <a:tcPr marL="82296" marR="82296" marT="82296" marB="82296" anchor="ctr">
                     <a:lnL w="12700" cap="flat" cmpd="sng" algn="ctr">
                       <a:solidFill>
                         <a:srgbClr val="E1E6F5"/>
@@ -7106,7 +7107,7 @@
                         <a:buNone/>
                       </a:pPr>
                       <a:r>
-                        <a:rPr lang="en-US" sz="1250" b="1" dirty="0">
+                        <a:rPr lang="en-US" sz="1200" b="1" dirty="0">
                           <a:solidFill>
                             <a:srgbClr val="3556B8"/>
                           </a:solidFill>
@@ -7114,16 +7115,16 @@
                           <a:ea typeface="Calibri" pitchFamily="34" charset="-122"/>
                           <a:cs typeface="Calibri" pitchFamily="34" charset="-120"/>
                         </a:rPr>
-                        <a:t>RDS 관리형 (단일 AZ)</a:t>
+                        <a:t>CPU 50% · 파드 2~6</a:t>
                       </a:r>
-                      <a:endParaRPr lang="en-US" sz="1250" dirty="0">
+                      <a:endParaRPr lang="en-US" sz="1200" dirty="0">
                         <a:latin typeface="Calibri" charset="0"/>
                         <a:ea typeface="Calibri" charset="0"/>
                         <a:cs typeface="Calibri" charset="0"/>
                       </a:endParaRPr>
                     </a:p>
                   </a:txBody>
-                  <a:tcPr marL="91440" marR="91440" marT="91440" marB="91440" anchor="ctr">
+                  <a:tcPr marL="82296" marR="82296" marT="82296" marB="82296" anchor="ctr">
                     <a:lnL w="12700" cap="flat" cmpd="sng" algn="ctr">
                       <a:solidFill>
                         <a:srgbClr val="E1E6F5"/>
@@ -7174,7 +7175,7 @@
                         <a:buNone/>
                       </a:pPr>
                       <a:r>
-                        <a:rPr lang="en-US" sz="1200" dirty="0">
+                        <a:rPr lang="en-US" sz="1150" dirty="0">
                           <a:solidFill>
                             <a:srgbClr val="3A3F52"/>
                           </a:solidFill>
@@ -7182,16 +7183,16 @@
                           <a:ea typeface="Calibri" pitchFamily="34" charset="-122"/>
                           <a:cs typeface="Calibri" pitchFamily="34" charset="-120"/>
                         </a:rPr>
-                        <a:t>백업·패치를 관리형에 위임, 앱과 수명주기 분리 / Multi-AZ는 비용 약 2배로 인지한 상태에서 제외</a:t>
+                        <a:t>낮으면 과잉 증설, 높으면 대응 지연 / 최소 2 = AZ 분산 유지, 최대 6 = 비용 상한. 대기형 부하는 CPU가 안 오르는 함정을 검증에서 실확인</a:t>
                       </a:r>
-                      <a:endParaRPr lang="en-US" sz="1200" dirty="0">
+                      <a:endParaRPr lang="en-US" sz="1150" dirty="0">
                         <a:latin typeface="Calibri" charset="0"/>
                         <a:ea typeface="Calibri" charset="0"/>
                         <a:cs typeface="Calibri" charset="0"/>
                       </a:endParaRPr>
                     </a:p>
                   </a:txBody>
-                  <a:tcPr marL="91440" marR="91440" marT="91440" marB="91440" anchor="ctr">
+                  <a:tcPr marL="82296" marR="82296" marT="82296" marB="82296" anchor="ctr">
                     <a:lnL w="12700" cap="flat" cmpd="sng" algn="ctr">
                       <a:solidFill>
                         <a:srgbClr val="E1E6F5"/>
@@ -7234,7 +7235,7 @@
                   </a:tcPr>
                 </a:tc>
               </a:tr>
-              <a:tr h="841248">
+              <a:tr h="749808">
                 <a:tc>
                   <a:txBody>
                     <a:bodyPr/>
@@ -7244,7 +7245,7 @@
                         <a:buNone/>
                       </a:pPr>
                       <a:r>
-                        <a:rPr lang="en-US" sz="1300" b="1" dirty="0">
+                        <a:rPr lang="en-US" sz="1250" b="1" dirty="0">
                           <a:solidFill>
                             <a:srgbClr val="1E2761"/>
                           </a:solidFill>
@@ -7252,16 +7253,16 @@
                           <a:ea typeface="Calibri" pitchFamily="34" charset="-122"/>
                           <a:cs typeface="Calibri" pitchFamily="34" charset="-120"/>
                         </a:rPr>
-                        <a:t>DB 버전</a:t>
+                        <a:t>데이터 계층</a:t>
                       </a:r>
-                      <a:endParaRPr lang="en-US" sz="1300" dirty="0">
+                      <a:endParaRPr lang="en-US" sz="1250" dirty="0">
                         <a:latin typeface="Calibri" charset="0"/>
                         <a:ea typeface="Calibri" charset="0"/>
                         <a:cs typeface="Calibri" charset="0"/>
                       </a:endParaRPr>
                     </a:p>
                   </a:txBody>
-                  <a:tcPr marL="91440" marR="91440" marT="91440" marB="91440" anchor="ctr">
+                  <a:tcPr marL="82296" marR="82296" marT="82296" marB="82296" anchor="ctr">
                     <a:lnL w="12700" cap="flat" cmpd="sng" algn="ctr">
                       <a:solidFill>
                         <a:srgbClr val="E1E6F5"/>
@@ -7312,7 +7313,7 @@
                         <a:buNone/>
                       </a:pPr>
                       <a:r>
-                        <a:rPr lang="en-US" sz="1250" b="1" dirty="0">
+                        <a:rPr lang="en-US" sz="1200" b="1" dirty="0">
                           <a:solidFill>
                             <a:srgbClr val="3556B8"/>
                           </a:solidFill>
@@ -7320,16 +7321,16 @@
                           <a:ea typeface="Calibri" pitchFamily="34" charset="-122"/>
                           <a:cs typeface="Calibri" pitchFamily="34" charset="-120"/>
                         </a:rPr>
-                        <a:t>PostgreSQL 17</a:t>
+                        <a:t>RDS 관리형 (단일 AZ)</a:t>
                       </a:r>
-                      <a:endParaRPr lang="en-US" sz="1250" dirty="0">
+                      <a:endParaRPr lang="en-US" sz="1200" dirty="0">
                         <a:latin typeface="Calibri" charset="0"/>
                         <a:ea typeface="Calibri" charset="0"/>
                         <a:cs typeface="Calibri" charset="0"/>
                       </a:endParaRPr>
                     </a:p>
                   </a:txBody>
-                  <a:tcPr marL="91440" marR="91440" marT="91440" marB="91440" anchor="ctr">
+                  <a:tcPr marL="82296" marR="82296" marT="82296" marB="82296" anchor="ctr">
                     <a:lnL w="12700" cap="flat" cmpd="sng" algn="ctr">
                       <a:solidFill>
                         <a:srgbClr val="E1E6F5"/>
@@ -7380,7 +7381,7 @@
                         <a:buNone/>
                       </a:pPr>
                       <a:r>
-                        <a:rPr lang="en-US" sz="1200" dirty="0">
+                        <a:rPr lang="en-US" sz="1150" dirty="0">
                           <a:solidFill>
                             <a:srgbClr val="3A3F52"/>
                           </a:solidFill>
@@ -7388,16 +7389,16 @@
                           <a:ea typeface="Calibri" pitchFamily="34" charset="-122"/>
                           <a:cs typeface="Calibri" pitchFamily="34" charset="-120"/>
                         </a:rPr>
-                        <a:t>현업에서 운영 중인 솔루션 DB와 동일 버전 — 경력 연속성. 재생성 구조라 코드 한 줄 변경</a:t>
+                        <a:t>백업·패치를 관리형에 위임, 앱과 수명주기 분리 / Multi-AZ는 비용 약 2배로 인지한 상태에서 제외</a:t>
                       </a:r>
-                      <a:endParaRPr lang="en-US" sz="1200" dirty="0">
+                      <a:endParaRPr lang="en-US" sz="1150" dirty="0">
                         <a:latin typeface="Calibri" charset="0"/>
                         <a:ea typeface="Calibri" charset="0"/>
                         <a:cs typeface="Calibri" charset="0"/>
                       </a:endParaRPr>
                     </a:p>
                   </a:txBody>
-                  <a:tcPr marL="91440" marR="91440" marT="91440" marB="91440" anchor="ctr">
+                  <a:tcPr marL="82296" marR="82296" marT="82296" marB="82296" anchor="ctr">
                     <a:lnL w="12700" cap="flat" cmpd="sng" algn="ctr">
                       <a:solidFill>
                         <a:srgbClr val="E1E6F5"/>
@@ -7440,7 +7441,7 @@
                   </a:tcPr>
                 </a:tc>
               </a:tr>
-              <a:tr h="841248">
+              <a:tr h="749808">
                 <a:tc>
                   <a:txBody>
                     <a:bodyPr/>
@@ -7450,7 +7451,7 @@
                         <a:buNone/>
                       </a:pPr>
                       <a:r>
-                        <a:rPr lang="en-US" sz="1300" b="1" dirty="0">
+                        <a:rPr lang="en-US" sz="1250" b="1" dirty="0">
                           <a:solidFill>
                             <a:srgbClr val="1E2761"/>
                           </a:solidFill>
@@ -7458,16 +7459,16 @@
                           <a:ea typeface="Calibri" pitchFamily="34" charset="-122"/>
                           <a:cs typeface="Calibri" pitchFamily="34" charset="-120"/>
                         </a:rPr>
-                        <a:t>네트워크 비용</a:t>
+                        <a:t>DB 버전</a:t>
                       </a:r>
-                      <a:endParaRPr lang="en-US" sz="1300" dirty="0">
+                      <a:endParaRPr lang="en-US" sz="1250" dirty="0">
                         <a:latin typeface="Calibri" charset="0"/>
                         <a:ea typeface="Calibri" charset="0"/>
                         <a:cs typeface="Calibri" charset="0"/>
                       </a:endParaRPr>
                     </a:p>
                   </a:txBody>
-                  <a:tcPr marL="91440" marR="91440" marT="91440" marB="91440" anchor="ctr">
+                  <a:tcPr marL="82296" marR="82296" marT="82296" marB="82296" anchor="ctr">
                     <a:lnL w="12700" cap="flat" cmpd="sng" algn="ctr">
                       <a:solidFill>
                         <a:srgbClr val="E1E6F5"/>
@@ -7518,7 +7519,7 @@
                         <a:buNone/>
                       </a:pPr>
                       <a:r>
-                        <a:rPr lang="en-US" sz="1250" b="1" dirty="0">
+                        <a:rPr lang="en-US" sz="1200" b="1" dirty="0">
                           <a:solidFill>
                             <a:srgbClr val="3556B8"/>
                           </a:solidFill>
@@ -7526,16 +7527,16 @@
                           <a:ea typeface="Calibri" pitchFamily="34" charset="-122"/>
                           <a:cs typeface="Calibri" pitchFamily="34" charset="-120"/>
                         </a:rPr>
-                        <a:t>단일 NAT Gateway</a:t>
+                        <a:t>PostgreSQL 17</a:t>
                       </a:r>
-                      <a:endParaRPr lang="en-US" sz="1250" dirty="0">
+                      <a:endParaRPr lang="en-US" sz="1200" dirty="0">
                         <a:latin typeface="Calibri" charset="0"/>
                         <a:ea typeface="Calibri" charset="0"/>
                         <a:cs typeface="Calibri" charset="0"/>
                       </a:endParaRPr>
                     </a:p>
                   </a:txBody>
-                  <a:tcPr marL="91440" marR="91440" marT="91440" marB="91440" anchor="ctr">
+                  <a:tcPr marL="82296" marR="82296" marT="82296" marB="82296" anchor="ctr">
                     <a:lnL w="12700" cap="flat" cmpd="sng" algn="ctr">
                       <a:solidFill>
                         <a:srgbClr val="E1E6F5"/>
@@ -7586,7 +7587,7 @@
                         <a:buNone/>
                       </a:pPr>
                       <a:r>
-                        <a:rPr lang="en-US" sz="1200" dirty="0">
+                        <a:rPr lang="en-US" sz="1150" dirty="0">
                           <a:solidFill>
                             <a:srgbClr val="3A3F52"/>
                           </a:solidFill>
@@ -7594,16 +7595,16 @@
                           <a:ea typeface="Calibri" pitchFamily="34" charset="-122"/>
                           <a:cs typeface="Calibri" pitchFamily="34" charset="-120"/>
                         </a:rPr>
-                        <a:t>AZ별 NAT 대비 월 $40 절감 / 단일 장애점은 문서화하고 수용 (포트폴리오 환경)</a:t>
+                        <a:t>현업에서 운영 중인 솔루션 DB와 동일 버전 — 경력 연속성. 재생성 구조라 코드 한 줄 변경</a:t>
                       </a:r>
-                      <a:endParaRPr lang="en-US" sz="1200" dirty="0">
+                      <a:endParaRPr lang="en-US" sz="1150" dirty="0">
                         <a:latin typeface="Calibri" charset="0"/>
                         <a:ea typeface="Calibri" charset="0"/>
                         <a:cs typeface="Calibri" charset="0"/>
                       </a:endParaRPr>
                     </a:p>
                   </a:txBody>
-                  <a:tcPr marL="91440" marR="91440" marT="91440" marB="91440" anchor="ctr">
+                  <a:tcPr marL="82296" marR="82296" marT="82296" marB="82296" anchor="ctr">
                     <a:lnL w="12700" cap="flat" cmpd="sng" algn="ctr">
                       <a:solidFill>
                         <a:srgbClr val="E1E6F5"/>
@@ -7646,7 +7647,7 @@
                   </a:tcPr>
                 </a:tc>
               </a:tr>
-              <a:tr h="841248">
+              <a:tr h="749808">
                 <a:tc>
                   <a:txBody>
                     <a:bodyPr/>
@@ -7656,7 +7657,7 @@
                         <a:buNone/>
                       </a:pPr>
                       <a:r>
-                        <a:rPr lang="en-US" sz="1300" b="1" dirty="0">
+                        <a:rPr lang="en-US" sz="1250" b="1" dirty="0">
                           <a:solidFill>
                             <a:srgbClr val="1E2761"/>
                           </a:solidFill>
@@ -7664,16 +7665,16 @@
                           <a:ea typeface="Calibri" pitchFamily="34" charset="-122"/>
                           <a:cs typeface="Calibri" pitchFamily="34" charset="-120"/>
                         </a:rPr>
-                        <a:t>비밀값 관리</a:t>
+                        <a:t>네트워크 비용</a:t>
                       </a:r>
-                      <a:endParaRPr lang="en-US" sz="1300" dirty="0">
+                      <a:endParaRPr lang="en-US" sz="1250" dirty="0">
                         <a:latin typeface="Calibri" charset="0"/>
                         <a:ea typeface="Calibri" charset="0"/>
                         <a:cs typeface="Calibri" charset="0"/>
                       </a:endParaRPr>
                     </a:p>
                   </a:txBody>
-                  <a:tcPr marL="91440" marR="91440" marT="91440" marB="91440" anchor="ctr">
+                  <a:tcPr marL="82296" marR="82296" marT="82296" marB="82296" anchor="ctr">
                     <a:lnL w="12700" cap="flat" cmpd="sng" algn="ctr">
                       <a:solidFill>
                         <a:srgbClr val="E1E6F5"/>
@@ -7724,7 +7725,7 @@
                         <a:buNone/>
                       </a:pPr>
                       <a:r>
-                        <a:rPr lang="en-US" sz="1250" b="1" dirty="0">
+                        <a:rPr lang="en-US" sz="1200" b="1" dirty="0">
                           <a:solidFill>
                             <a:srgbClr val="3556B8"/>
                           </a:solidFill>
@@ -7732,16 +7733,16 @@
                           <a:ea typeface="Calibri" pitchFamily="34" charset="-122"/>
                           <a:cs typeface="Calibri" pitchFamily="34" charset="-120"/>
                         </a:rPr>
-                        <a:t>K8s Secret</a:t>
+                        <a:t>단일 NAT Gateway</a:t>
                       </a:r>
-                      <a:endParaRPr lang="en-US" sz="1250" dirty="0">
+                      <a:endParaRPr lang="en-US" sz="1200" dirty="0">
                         <a:latin typeface="Calibri" charset="0"/>
                         <a:ea typeface="Calibri" charset="0"/>
                         <a:cs typeface="Calibri" charset="0"/>
                       </a:endParaRPr>
                     </a:p>
                   </a:txBody>
-                  <a:tcPr marL="91440" marR="91440" marT="91440" marB="91440" anchor="ctr">
+                  <a:tcPr marL="82296" marR="82296" marT="82296" marB="82296" anchor="ctr">
                     <a:lnL w="12700" cap="flat" cmpd="sng" algn="ctr">
                       <a:solidFill>
                         <a:srgbClr val="E1E6F5"/>
@@ -7792,7 +7793,7 @@
                         <a:buNone/>
                       </a:pPr>
                       <a:r>
-                        <a:rPr lang="en-US" sz="1200" dirty="0">
+                        <a:rPr lang="en-US" sz="1150" dirty="0">
                           <a:solidFill>
                             <a:srgbClr val="3A3F52"/>
                           </a:solidFill>
@@ -7800,16 +7801,16 @@
                           <a:ea typeface="Calibri" pitchFamily="34" charset="-122"/>
                           <a:cs typeface="Calibri" pitchFamily="34" charset="-120"/>
                         </a:rPr>
-                        <a:t>Secrets Manager는 규모 대비 과잉 — 비밀값이 코드·이미지·상태파일에 남지 않는 조건 충족</a:t>
+                        <a:t>AZ별 NAT 대비 월 $40 절감 / 단일 장애점은 문서화하고 수용 (포트폴리오 환경)</a:t>
                       </a:r>
-                      <a:endParaRPr lang="en-US" sz="1200" dirty="0">
+                      <a:endParaRPr lang="en-US" sz="1150" dirty="0">
                         <a:latin typeface="Calibri" charset="0"/>
                         <a:ea typeface="Calibri" charset="0"/>
                         <a:cs typeface="Calibri" charset="0"/>
                       </a:endParaRPr>
                     </a:p>
                   </a:txBody>
-                  <a:tcPr marL="91440" marR="91440" marT="91440" marB="91440" anchor="ctr">
+                  <a:tcPr marL="82296" marR="82296" marT="82296" marB="82296" anchor="ctr">
                     <a:lnL w="12700" cap="flat" cmpd="sng" algn="ctr">
                       <a:solidFill>
                         <a:srgbClr val="E1E6F5"/>
@@ -7852,6 +7853,212 @@
                   </a:tcPr>
                 </a:tc>
               </a:tr>
+              <a:tr h="749808">
+                <a:tc>
+                  <a:txBody>
+                    <a:bodyPr/>
+                    <a:lstStyle/>
+                    <a:p>
+                      <a:pPr algn="ctr" indent="0" marL="0">
+                        <a:buNone/>
+                      </a:pPr>
+                      <a:r>
+                        <a:rPr lang="en-US" sz="1250" b="1" dirty="0">
+                          <a:solidFill>
+                            <a:srgbClr val="1E2761"/>
+                          </a:solidFill>
+                          <a:latin typeface="Calibri" pitchFamily="34" charset="0"/>
+                          <a:ea typeface="Calibri" pitchFamily="34" charset="-122"/>
+                          <a:cs typeface="Calibri" pitchFamily="34" charset="-120"/>
+                        </a:rPr>
+                        <a:t>비밀값 관리</a:t>
+                      </a:r>
+                      <a:endParaRPr lang="en-US" sz="1250" dirty="0">
+                        <a:latin typeface="Calibri" charset="0"/>
+                        <a:ea typeface="Calibri" charset="0"/>
+                        <a:cs typeface="Calibri" charset="0"/>
+                      </a:endParaRPr>
+                    </a:p>
+                  </a:txBody>
+                  <a:tcPr marL="82296" marR="82296" marT="82296" marB="82296" anchor="ctr">
+                    <a:lnL w="12700" cap="flat" cmpd="sng" algn="ctr">
+                      <a:solidFill>
+                        <a:srgbClr val="E1E6F5"/>
+                      </a:solidFill>
+                      <a:prstDash val="solid"/>
+                      <a:round/>
+                      <a:headEnd type="none" w="med" len="med"/>
+                      <a:tailEnd type="none" w="med" len="med"/>
+                    </a:lnL>
+                    <a:lnR w="12700" cap="flat" cmpd="sng" algn="ctr">
+                      <a:solidFill>
+                        <a:srgbClr val="E1E6F5"/>
+                      </a:solidFill>
+                      <a:prstDash val="solid"/>
+                      <a:round/>
+                      <a:headEnd type="none" w="med" len="med"/>
+                      <a:tailEnd type="none" w="med" len="med"/>
+                    </a:lnR>
+                    <a:lnT w="12700" cap="flat" cmpd="sng" algn="ctr">
+                      <a:solidFill>
+                        <a:srgbClr val="E1E6F5"/>
+                      </a:solidFill>
+                      <a:prstDash val="solid"/>
+                      <a:round/>
+                      <a:headEnd type="none" w="med" len="med"/>
+                      <a:tailEnd type="none" w="med" len="med"/>
+                    </a:lnT>
+                    <a:lnB w="12700" cap="flat" cmpd="sng" algn="ctr">
+                      <a:solidFill>
+                        <a:srgbClr val="E1E6F5"/>
+                      </a:solidFill>
+                      <a:prstDash val="solid"/>
+                      <a:round/>
+                      <a:headEnd type="none" w="med" len="med"/>
+                      <a:tailEnd type="none" w="med" len="med"/>
+                    </a:lnB>
+                    <a:solidFill>
+                      <a:srgbClr val="F4F6FC"/>
+                    </a:solidFill>
+                  </a:tcPr>
+                </a:tc>
+                <a:tc>
+                  <a:txBody>
+                    <a:bodyPr/>
+                    <a:lstStyle/>
+                    <a:p>
+                      <a:pPr algn="ctr" indent="0" marL="0">
+                        <a:buNone/>
+                      </a:pPr>
+                      <a:r>
+                        <a:rPr lang="en-US" sz="1200" b="1" dirty="0">
+                          <a:solidFill>
+                            <a:srgbClr val="3556B8"/>
+                          </a:solidFill>
+                          <a:latin typeface="Calibri" pitchFamily="34" charset="0"/>
+                          <a:ea typeface="Calibri" pitchFamily="34" charset="-122"/>
+                          <a:cs typeface="Calibri" pitchFamily="34" charset="-120"/>
+                        </a:rPr>
+                        <a:t>K8s Secret</a:t>
+                      </a:r>
+                      <a:endParaRPr lang="en-US" sz="1200" dirty="0">
+                        <a:latin typeface="Calibri" charset="0"/>
+                        <a:ea typeface="Calibri" charset="0"/>
+                        <a:cs typeface="Calibri" charset="0"/>
+                      </a:endParaRPr>
+                    </a:p>
+                  </a:txBody>
+                  <a:tcPr marL="82296" marR="82296" marT="82296" marB="82296" anchor="ctr">
+                    <a:lnL w="12700" cap="flat" cmpd="sng" algn="ctr">
+                      <a:solidFill>
+                        <a:srgbClr val="E1E6F5"/>
+                      </a:solidFill>
+                      <a:prstDash val="solid"/>
+                      <a:round/>
+                      <a:headEnd type="none" w="med" len="med"/>
+                      <a:tailEnd type="none" w="med" len="med"/>
+                    </a:lnL>
+                    <a:lnR w="12700" cap="flat" cmpd="sng" algn="ctr">
+                      <a:solidFill>
+                        <a:srgbClr val="E1E6F5"/>
+                      </a:solidFill>
+                      <a:prstDash val="solid"/>
+                      <a:round/>
+                      <a:headEnd type="none" w="med" len="med"/>
+                      <a:tailEnd type="none" w="med" len="med"/>
+                    </a:lnR>
+                    <a:lnT w="12700" cap="flat" cmpd="sng" algn="ctr">
+                      <a:solidFill>
+                        <a:srgbClr val="E1E6F5"/>
+                      </a:solidFill>
+                      <a:prstDash val="solid"/>
+                      <a:round/>
+                      <a:headEnd type="none" w="med" len="med"/>
+                      <a:tailEnd type="none" w="med" len="med"/>
+                    </a:lnT>
+                    <a:lnB w="12700" cap="flat" cmpd="sng" algn="ctr">
+                      <a:solidFill>
+                        <a:srgbClr val="E1E6F5"/>
+                      </a:solidFill>
+                      <a:prstDash val="solid"/>
+                      <a:round/>
+                      <a:headEnd type="none" w="med" len="med"/>
+                      <a:tailEnd type="none" w="med" len="med"/>
+                    </a:lnB>
+                    <a:solidFill>
+                      <a:srgbClr val="F4F6FC"/>
+                    </a:solidFill>
+                  </a:tcPr>
+                </a:tc>
+                <a:tc>
+                  <a:txBody>
+                    <a:bodyPr/>
+                    <a:lstStyle/>
+                    <a:p>
+                      <a:pPr indent="0" marL="0">
+                        <a:buNone/>
+                      </a:pPr>
+                      <a:r>
+                        <a:rPr lang="en-US" sz="1150" dirty="0">
+                          <a:solidFill>
+                            <a:srgbClr val="3A3F52"/>
+                          </a:solidFill>
+                          <a:latin typeface="Calibri" pitchFamily="34" charset="0"/>
+                          <a:ea typeface="Calibri" pitchFamily="34" charset="-122"/>
+                          <a:cs typeface="Calibri" pitchFamily="34" charset="-120"/>
+                        </a:rPr>
+                        <a:t>Secrets Manager는 규모 대비 과잉 — 코드·이미지·repo에 비밀값 0 충족 / 단, tfvars·state 평문 한계는 인지 — 운영 전환 시 Secrets Manager 검토</a:t>
+                      </a:r>
+                      <a:endParaRPr lang="en-US" sz="1150" dirty="0">
+                        <a:latin typeface="Calibri" charset="0"/>
+                        <a:ea typeface="Calibri" charset="0"/>
+                        <a:cs typeface="Calibri" charset="0"/>
+                      </a:endParaRPr>
+                    </a:p>
+                  </a:txBody>
+                  <a:tcPr marL="82296" marR="82296" marT="82296" marB="82296" anchor="ctr">
+                    <a:lnL w="12700" cap="flat" cmpd="sng" algn="ctr">
+                      <a:solidFill>
+                        <a:srgbClr val="E1E6F5"/>
+                      </a:solidFill>
+                      <a:prstDash val="solid"/>
+                      <a:round/>
+                      <a:headEnd type="none" w="med" len="med"/>
+                      <a:tailEnd type="none" w="med" len="med"/>
+                    </a:lnL>
+                    <a:lnR w="12700" cap="flat" cmpd="sng" algn="ctr">
+                      <a:solidFill>
+                        <a:srgbClr val="E1E6F5"/>
+                      </a:solidFill>
+                      <a:prstDash val="solid"/>
+                      <a:round/>
+                      <a:headEnd type="none" w="med" len="med"/>
+                      <a:tailEnd type="none" w="med" len="med"/>
+                    </a:lnR>
+                    <a:lnT w="12700" cap="flat" cmpd="sng" algn="ctr">
+                      <a:solidFill>
+                        <a:srgbClr val="E1E6F5"/>
+                      </a:solidFill>
+                      <a:prstDash val="solid"/>
+                      <a:round/>
+                      <a:headEnd type="none" w="med" len="med"/>
+                      <a:tailEnd type="none" w="med" len="med"/>
+                    </a:lnT>
+                    <a:lnB w="12700" cap="flat" cmpd="sng" algn="ctr">
+                      <a:solidFill>
+                        <a:srgbClr val="E1E6F5"/>
+                      </a:solidFill>
+                      <a:prstDash val="solid"/>
+                      <a:round/>
+                      <a:headEnd type="none" w="med" len="med"/>
+                      <a:tailEnd type="none" w="med" len="med"/>
+                    </a:lnB>
+                    <a:solidFill>
+                      <a:srgbClr val="F4F6FC"/>
+                    </a:solidFill>
+                  </a:tcPr>
+                </a:tc>
+              </a:tr>
             </a:tbl>
           </a:graphicData>
         </a:graphic>
@@ -7881,7 +8088,7 @@
               <a:buNone/>
             </a:pPr>
             <a:r>
-              <a:rPr lang="en-US" sz="1200" i="1" dirty="0">
+              <a:rPr lang="en-US" sz="1150" i="1" dirty="0">
                 <a:solidFill>
                   <a:srgbClr val="6B7089"/>
                 </a:solidFill>
@@ -7891,7 +8098,7 @@
               </a:rPr>
               <a:t>“과하지 않게” — 서비스 메시 · 멀티클러스터 · Karpenter는 규모 대비 과잉으로 판단해 의도적으로 제외 (상세 근거는 repo의 ADR 참조)</a:t>
             </a:r>
-            <a:endParaRPr lang="en-US" sz="1200" dirty="0"/>
+            <a:endParaRPr lang="en-US" sz="1150" dirty="0"/>
           </a:p>
         </p:txBody>
       </p:sp>
@@ -7905,7 +8112,7 @@
 
 <file path=ppt/slides/slide17.xml><?xml version="1.0" encoding="utf-8"?>
 <p:sld xmlns:a="http://schemas.openxmlformats.org/drawingml/2006/main" xmlns:r="http://schemas.openxmlformats.org/officeDocument/2006/relationships" xmlns:p="http://schemas.openxmlformats.org/presentationml/2006/main">
-  <p:cSld name="Slide 17">
+  <p:cSld name="Slide 2">
     <p:bg>
       <p:bgPr>
         <a:solidFill>
@@ -7948,7 +8155,7 @@
           <a:bodyPr wrap="square" lIns="0" tIns="0" rIns="0" bIns="0" rtlCol="0" anchor="ctr"/>
           <a:lstStyle/>
           <a:p>
-            <a:pPr algn="l" indent="0" marL="0">
+            <a:pPr indent="0" marL="0">
               <a:buNone/>
             </a:pPr>
             <a:r>
@@ -7960,7 +8167,7 @@
                 <a:ea typeface="Cambria" pitchFamily="34" charset="-122"/>
                 <a:cs typeface="Cambria" pitchFamily="34" charset="-120"/>
               </a:rPr>
-              <a:t>09. IaC 기반 비용 통제 — 재현 → 검증 → 회수</a:t>
+              <a:t>09. IaC 기반 비용 통제</a:t>
             </a:r>
             <a:endParaRPr lang="en-US" sz="2800" dirty="0"/>
           </a:p>
@@ -8013,12 +8220,12 @@
         </p:nvSpPr>
         <p:spPr>
           <a:xfrm>
-            <a:off x="548640" y="1417320"/>
-            <a:ext cx="3520440" cy="1783080"/>
+            <a:off x="548640" y="1234440"/>
+            <a:ext cx="3520440" cy="1874520"/>
           </a:xfrm>
           <a:prstGeom prst="roundRect">
             <a:avLst>
-              <a:gd name="adj" fmla="val 4615"/>
+              <a:gd name="adj" fmla="val 4390"/>
             </a:avLst>
           </a:prstGeom>
           <a:solidFill>
@@ -8042,24 +8249,63 @@
         </p:nvSpPr>
         <p:spPr>
           <a:xfrm>
-            <a:off x="868680" y="1645920"/>
-            <a:ext cx="2926080" cy="411480"/>
-          </a:xfrm>
-          <a:prstGeom prst="rect">
-            <a:avLst/>
-          </a:prstGeom>
-          <a:noFill/>
-          <a:ln/>
-        </p:spPr>
-        <p:txBody>
-          <a:bodyPr wrap="square" lIns="0" tIns="0" rIns="0" bIns="0" rtlCol="0" anchor="ctr"/>
-          <a:lstStyle/>
-          <a:p>
-            <a:pPr indent="0" marL="0">
-              <a:buNone/>
-            </a:pPr>
-            <a:r>
-              <a:rPr lang="en-US" sz="2000" b="1" dirty="0">
+            <a:off x="731520" y="1417320"/>
+            <a:ext cx="3154680" cy="320040"/>
+          </a:xfrm>
+          <a:prstGeom prst="rect">
+            <a:avLst/>
+          </a:prstGeom>
+          <a:noFill/>
+          <a:ln/>
+        </p:spPr>
+        <p:txBody>
+          <a:bodyPr wrap="square" lIns="0" tIns="0" rIns="0" bIns="0" rtlCol="0" anchor="ctr"/>
+          <a:lstStyle/>
+          <a:p>
+            <a:pPr algn="ctr" indent="0" marL="0">
+              <a:buNone/>
+            </a:pPr>
+            <a:r>
+              <a:rPr lang="en-US" sz="1250" b="1" dirty="0">
+                <a:solidFill>
+                  <a:srgbClr val="6B7089"/>
+                </a:solidFill>
+                <a:latin typeface="Calibri" pitchFamily="34" charset="0"/>
+                <a:ea typeface="Calibri" pitchFamily="34" charset="-122"/>
+                <a:cs typeface="Calibri" pitchFamily="34" charset="-120"/>
+              </a:rPr>
+              <a:t>상시 가동 시 예상</a:t>
+            </a:r>
+            <a:endParaRPr lang="en-US" sz="1250" dirty="0"/>
+          </a:p>
+        </p:txBody>
+      </p:sp>
+      <p:sp>
+        <p:nvSpPr>
+          <p:cNvPr id="6" name="Text 4"/>
+          <p:cNvSpPr/>
+          <p:nvPr/>
+        </p:nvSpPr>
+        <p:spPr>
+          <a:xfrm>
+            <a:off x="731520" y="1783080"/>
+            <a:ext cx="3154680" cy="777240"/>
+          </a:xfrm>
+          <a:prstGeom prst="rect">
+            <a:avLst/>
+          </a:prstGeom>
+          <a:noFill/>
+          <a:ln/>
+        </p:spPr>
+        <p:txBody>
+          <a:bodyPr wrap="square" lIns="0" tIns="0" rIns="0" bIns="0" rtlCol="0" anchor="ctr"/>
+          <a:lstStyle/>
+          <a:p>
+            <a:pPr algn="ctr" indent="0" marL="0">
+              <a:buNone/>
+            </a:pPr>
+            <a:r>
+              <a:rPr lang="en-US" sz="4400" b="1" dirty="0">
                 <a:solidFill>
                   <a:srgbClr val="1E2761"/>
                 </a:solidFill>
@@ -8067,87 +8313,50 @@
                 <a:ea typeface="Cambria" pitchFamily="34" charset="-122"/>
                 <a:cs typeface="Cambria" pitchFamily="34" charset="-120"/>
               </a:rPr>
-              <a:t>재현</a:t>
-            </a:r>
-            <a:endParaRPr lang="en-US" sz="2000" dirty="0"/>
-          </a:p>
-        </p:txBody>
-      </p:sp>
-      <p:sp>
-        <p:nvSpPr>
-          <p:cNvPr id="6" name="Text 4"/>
-          <p:cNvSpPr/>
-          <p:nvPr/>
-        </p:nvSpPr>
-        <p:spPr>
-          <a:xfrm>
-            <a:off x="868680" y="2148840"/>
-            <a:ext cx="2971800" cy="914400"/>
-          </a:xfrm>
-          <a:prstGeom prst="rect">
-            <a:avLst/>
-          </a:prstGeom>
-          <a:noFill/>
-          <a:ln/>
-        </p:spPr>
-        <p:txBody>
-          <a:bodyPr wrap="square" lIns="0" tIns="0" rIns="0" bIns="0" rtlCol="0" anchor="ctr"/>
-          <a:lstStyle/>
-          <a:p>
-            <a:pPr indent="0" marL="0">
-              <a:buNone/>
-            </a:pPr>
-            <a:r>
-              <a:rPr lang="en-US" sz="1250" dirty="0">
-                <a:solidFill>
-                  <a:srgbClr val="3A3F52"/>
-                </a:solidFill>
-                <a:latin typeface="Calibri" pitchFamily="34" charset="0"/>
-                <a:ea typeface="Calibri" pitchFamily="34" charset="-122"/>
-                <a:cs typeface="Calibri" pitchFamily="34" charset="-120"/>
-              </a:rPr>
-              <a:t>terraform apply + 9단계 루틴</a:t>
-            </a:r>
-            <a:endParaRPr lang="en-US" sz="1250" dirty="0"/>
-          </a:p>
-          <a:p>
-            <a:pPr indent="0" marL="0">
-              <a:buNone/>
-            </a:pPr>
-            <a:r>
-              <a:rPr lang="en-US" sz="1250" dirty="0">
-                <a:solidFill>
-                  <a:srgbClr val="3A3F52"/>
-                </a:solidFill>
-                <a:latin typeface="Calibri" pitchFamily="34" charset="0"/>
-                <a:ea typeface="Calibri" pitchFamily="34" charset="-122"/>
-                <a:cs typeface="Calibri" pitchFamily="34" charset="-120"/>
-              </a:rPr>
-              <a:t>20분 내 전체 스택 복원 (5회 실증)</a:t>
-            </a:r>
-            <a:endParaRPr lang="en-US" sz="1250" dirty="0"/>
-          </a:p>
-        </p:txBody>
-      </p:sp>
-      <p:sp>
-        <p:nvSpPr>
-          <p:cNvPr id="7" name="Shape 5"/>
-          <p:cNvSpPr/>
-          <p:nvPr/>
-        </p:nvSpPr>
-        <p:spPr>
-          <a:xfrm>
-            <a:off x="4096512" y="2194560"/>
-            <a:ext cx="292608" cy="201168"/>
-          </a:xfrm>
-          <a:prstGeom prst="rightArrow">
-            <a:avLst/>
-          </a:prstGeom>
-          <a:solidFill>
-            <a:srgbClr val="CADCFC"/>
-          </a:solidFill>
-          <a:ln/>
-        </p:spPr>
+              <a:t>$164</a:t>
+            </a:r>
+            <a:endParaRPr lang="en-US" sz="4400" dirty="0"/>
+          </a:p>
+        </p:txBody>
+      </p:sp>
+      <p:sp>
+        <p:nvSpPr>
+          <p:cNvPr id="7" name="Text 5"/>
+          <p:cNvSpPr/>
+          <p:nvPr/>
+        </p:nvSpPr>
+        <p:spPr>
+          <a:xfrm>
+            <a:off x="731520" y="2651760"/>
+            <a:ext cx="3154680" cy="320040"/>
+          </a:xfrm>
+          <a:prstGeom prst="rect">
+            <a:avLst/>
+          </a:prstGeom>
+          <a:noFill/>
+          <a:ln/>
+        </p:spPr>
+        <p:txBody>
+          <a:bodyPr wrap="square" lIns="0" tIns="0" rIns="0" bIns="0" rtlCol="0" anchor="ctr"/>
+          <a:lstStyle/>
+          <a:p>
+            <a:pPr algn="ctr" indent="0" marL="0">
+              <a:buNone/>
+            </a:pPr>
+            <a:r>
+              <a:rPr lang="en-US" sz="1200" dirty="0">
+                <a:solidFill>
+                  <a:srgbClr val="6B7089"/>
+                </a:solidFill>
+                <a:latin typeface="Calibri" pitchFamily="34" charset="0"/>
+                <a:ea typeface="Calibri" pitchFamily="34" charset="-122"/>
+                <a:cs typeface="Calibri" pitchFamily="34" charset="-120"/>
+              </a:rPr>
+              <a:t>/ 월 (≈ 23만원)</a:t>
+            </a:r>
+            <a:endParaRPr lang="en-US" sz="1200" dirty="0"/>
+          </a:p>
+        </p:txBody>
       </p:sp>
       <p:sp>
         <p:nvSpPr>
@@ -8157,16 +8366,16 @@
         </p:nvSpPr>
         <p:spPr>
           <a:xfrm>
-            <a:off x="4434840" y="1417320"/>
-            <a:ext cx="3520440" cy="1783080"/>
+            <a:off x="4343400" y="1234440"/>
+            <a:ext cx="3520440" cy="1874520"/>
           </a:xfrm>
           <a:prstGeom prst="roundRect">
             <a:avLst>
-              <a:gd name="adj" fmla="val 4615"/>
+              <a:gd name="adj" fmla="val 4390"/>
             </a:avLst>
           </a:prstGeom>
           <a:solidFill>
-            <a:srgbClr val="F4F6FC"/>
+            <a:srgbClr val="0B3B33"/>
           </a:solidFill>
           <a:ln/>
           <a:effectLst>
@@ -8186,112 +8395,114 @@
         </p:nvSpPr>
         <p:spPr>
           <a:xfrm>
-            <a:off x="4754880" y="1645920"/>
-            <a:ext cx="2926080" cy="411480"/>
-          </a:xfrm>
-          <a:prstGeom prst="rect">
-            <a:avLst/>
-          </a:prstGeom>
-          <a:noFill/>
-          <a:ln/>
-        </p:spPr>
-        <p:txBody>
-          <a:bodyPr wrap="square" lIns="0" tIns="0" rIns="0" bIns="0" rtlCol="0" anchor="ctr"/>
-          <a:lstStyle/>
-          <a:p>
-            <a:pPr indent="0" marL="0">
-              <a:buNone/>
-            </a:pPr>
-            <a:r>
-              <a:rPr lang="en-US" sz="2000" b="1" dirty="0">
-                <a:solidFill>
-                  <a:srgbClr val="1E2761"/>
+            <a:off x="4526280" y="1417320"/>
+            <a:ext cx="3154680" cy="320040"/>
+          </a:xfrm>
+          <a:prstGeom prst="rect">
+            <a:avLst/>
+          </a:prstGeom>
+          <a:noFill/>
+          <a:ln/>
+        </p:spPr>
+        <p:txBody>
+          <a:bodyPr wrap="square" lIns="0" tIns="0" rIns="0" bIns="0" rtlCol="0" anchor="ctr"/>
+          <a:lstStyle/>
+          <a:p>
+            <a:pPr algn="ctr" indent="0" marL="0">
+              <a:buNone/>
+            </a:pPr>
+            <a:r>
+              <a:rPr lang="en-US" sz="1250" b="1" dirty="0">
+                <a:solidFill>
+                  <a:srgbClr val="9FE1CB"/>
+                </a:solidFill>
+                <a:latin typeface="Calibri" pitchFamily="34" charset="0"/>
+                <a:ea typeface="Calibri" pitchFamily="34" charset="-122"/>
+                <a:cs typeface="Calibri" pitchFamily="34" charset="-120"/>
+              </a:rPr>
+              <a:t>7월 실사용 (청구서 확정)</a:t>
+            </a:r>
+            <a:endParaRPr lang="en-US" sz="1250" dirty="0"/>
+          </a:p>
+        </p:txBody>
+      </p:sp>
+      <p:sp>
+        <p:nvSpPr>
+          <p:cNvPr id="10" name="Text 8"/>
+          <p:cNvSpPr/>
+          <p:nvPr/>
+        </p:nvSpPr>
+        <p:spPr>
+          <a:xfrm>
+            <a:off x="4526280" y="1783080"/>
+            <a:ext cx="3154680" cy="777240"/>
+          </a:xfrm>
+          <a:prstGeom prst="rect">
+            <a:avLst/>
+          </a:prstGeom>
+          <a:noFill/>
+          <a:ln/>
+        </p:spPr>
+        <p:txBody>
+          <a:bodyPr wrap="square" lIns="0" tIns="0" rIns="0" bIns="0" rtlCol="0" anchor="ctr"/>
+          <a:lstStyle/>
+          <a:p>
+            <a:pPr algn="ctr" indent="0" marL="0">
+              <a:buNone/>
+            </a:pPr>
+            <a:r>
+              <a:rPr lang="en-US" sz="4400" b="1" dirty="0">
+                <a:solidFill>
+                  <a:srgbClr val="FFFFFF"/>
                 </a:solidFill>
                 <a:latin typeface="Cambria" pitchFamily="34" charset="0"/>
                 <a:ea typeface="Cambria" pitchFamily="34" charset="-122"/>
                 <a:cs typeface="Cambria" pitchFamily="34" charset="-120"/>
               </a:rPr>
-              <a:t>검증</a:t>
-            </a:r>
-            <a:endParaRPr lang="en-US" sz="2000" dirty="0"/>
-          </a:p>
-        </p:txBody>
-      </p:sp>
-      <p:sp>
-        <p:nvSpPr>
-          <p:cNvPr id="10" name="Text 8"/>
-          <p:cNvSpPr/>
-          <p:nvPr/>
-        </p:nvSpPr>
-        <p:spPr>
-          <a:xfrm>
-            <a:off x="4754880" y="2148840"/>
-            <a:ext cx="2971800" cy="914400"/>
-          </a:xfrm>
-          <a:prstGeom prst="rect">
-            <a:avLst/>
-          </a:prstGeom>
-          <a:noFill/>
-          <a:ln/>
-        </p:spPr>
-        <p:txBody>
-          <a:bodyPr wrap="square" lIns="0" tIns="0" rIns="0" bIns="0" rtlCol="0" anchor="ctr"/>
-          <a:lstStyle/>
-          <a:p>
-            <a:pPr indent="0" marL="0">
-              <a:buNone/>
-            </a:pPr>
-            <a:r>
-              <a:rPr lang="en-US" sz="1250" dirty="0">
-                <a:solidFill>
-                  <a:srgbClr val="3A3F52"/>
-                </a:solidFill>
-                <a:latin typeface="Calibri" pitchFamily="34" charset="0"/>
-                <a:ea typeface="Calibri" pitchFamily="34" charset="-122"/>
-                <a:cs typeface="Calibri" pitchFamily="34" charset="-120"/>
-              </a:rPr>
-              <a:t>서비스 E2E · GitOps · 알람 · HPA</a:t>
-            </a:r>
-            <a:endParaRPr lang="en-US" sz="1250" dirty="0"/>
-          </a:p>
-          <a:p>
-            <a:pPr indent="0" marL="0">
-              <a:buNone/>
-            </a:pPr>
-            <a:r>
-              <a:rPr lang="en-US" sz="1250" dirty="0">
-                <a:solidFill>
-                  <a:srgbClr val="3A3F52"/>
-                </a:solidFill>
-                <a:latin typeface="Calibri" pitchFamily="34" charset="0"/>
-                <a:ea typeface="Calibri" pitchFamily="34" charset="-122"/>
-                <a:cs typeface="Calibri" pitchFamily="34" charset="-120"/>
-              </a:rPr>
-              <a:t>전 항목 재통과</a:t>
-            </a:r>
-            <a:endParaRPr lang="en-US" sz="1250" dirty="0"/>
-          </a:p>
-        </p:txBody>
-      </p:sp>
-      <p:sp>
-        <p:nvSpPr>
-          <p:cNvPr id="11" name="Shape 9"/>
-          <p:cNvSpPr/>
-          <p:nvPr/>
-        </p:nvSpPr>
-        <p:spPr>
-          <a:xfrm>
-            <a:off x="7982712" y="2194560"/>
-            <a:ext cx="292608" cy="201168"/>
-          </a:xfrm>
-          <a:prstGeom prst="rightArrow">
-            <a:avLst/>
-          </a:prstGeom>
-          <a:solidFill>
-            <a:srgbClr val="CADCFC"/>
-          </a:solidFill>
-          <a:ln/>
-        </p:spPr>
+              <a:t>$1.27</a:t>
+            </a:r>
+            <a:endParaRPr lang="en-US" sz="4400" dirty="0"/>
+          </a:p>
+        </p:txBody>
+      </p:sp>
+      <p:sp>
+        <p:nvSpPr>
+          <p:cNvPr id="11" name="Text 9"/>
+          <p:cNvSpPr/>
+          <p:nvPr/>
+        </p:nvSpPr>
+        <p:spPr>
+          <a:xfrm>
+            <a:off x="4526280" y="2651760"/>
+            <a:ext cx="3154680" cy="320040"/>
+          </a:xfrm>
+          <a:prstGeom prst="rect">
+            <a:avLst/>
+          </a:prstGeom>
+          <a:noFill/>
+          <a:ln/>
+        </p:spPr>
+        <p:txBody>
+          <a:bodyPr wrap="square" lIns="0" tIns="0" rIns="0" bIns="0" rtlCol="0" anchor="ctr"/>
+          <a:lstStyle/>
+          <a:p>
+            <a:pPr algn="ctr" indent="0" marL="0">
+              <a:buNone/>
+            </a:pPr>
+            <a:r>
+              <a:rPr lang="en-US" sz="1200" dirty="0">
+                <a:solidFill>
+                  <a:srgbClr val="9FE1CB"/>
+                </a:solidFill>
+                <a:latin typeface="Calibri" pitchFamily="34" charset="0"/>
+                <a:ea typeface="Calibri" pitchFamily="34" charset="-122"/>
+                <a:cs typeface="Calibri" pitchFamily="34" charset="-120"/>
+              </a:rPr>
+              <a:t>약 99.2% 감소</a:t>
+            </a:r>
+            <a:endParaRPr lang="en-US" sz="1200" dirty="0"/>
+          </a:p>
+        </p:txBody>
       </p:sp>
       <p:sp>
         <p:nvSpPr>
@@ -8301,16 +8512,16 @@
         </p:nvSpPr>
         <p:spPr>
           <a:xfrm>
-            <a:off x="8321040" y="1417320"/>
-            <a:ext cx="3520440" cy="1783080"/>
+            <a:off x="8138160" y="1234440"/>
+            <a:ext cx="3520440" cy="1874520"/>
           </a:xfrm>
           <a:prstGeom prst="roundRect">
             <a:avLst>
-              <a:gd name="adj" fmla="val 4615"/>
+              <a:gd name="adj" fmla="val 4390"/>
             </a:avLst>
           </a:prstGeom>
           <a:solidFill>
-            <a:srgbClr val="F4F6FC"/>
+            <a:srgbClr val="1E2761"/>
           </a:solidFill>
           <a:ln/>
           <a:effectLst>
@@ -8330,47 +8541,125 @@
         </p:nvSpPr>
         <p:spPr>
           <a:xfrm>
-            <a:off x="8641080" y="1645920"/>
-            <a:ext cx="2926080" cy="411480"/>
-          </a:xfrm>
-          <a:prstGeom prst="rect">
-            <a:avLst/>
-          </a:prstGeom>
-          <a:noFill/>
-          <a:ln/>
-        </p:spPr>
-        <p:txBody>
-          <a:bodyPr wrap="square" lIns="0" tIns="0" rIns="0" bIns="0" rtlCol="0" anchor="ctr"/>
-          <a:lstStyle/>
-          <a:p>
-            <a:pPr indent="0" marL="0">
-              <a:buNone/>
-            </a:pPr>
-            <a:r>
-              <a:rPr lang="en-US" sz="2000" b="1" dirty="0">
-                <a:solidFill>
-                  <a:srgbClr val="1E2761"/>
+            <a:off x="8321040" y="1417320"/>
+            <a:ext cx="3154680" cy="320040"/>
+          </a:xfrm>
+          <a:prstGeom prst="rect">
+            <a:avLst/>
+          </a:prstGeom>
+          <a:noFill/>
+          <a:ln/>
+        </p:spPr>
+        <p:txBody>
+          <a:bodyPr wrap="square" lIns="0" tIns="0" rIns="0" bIns="0" rtlCol="0" anchor="ctr"/>
+          <a:lstStyle/>
+          <a:p>
+            <a:pPr algn="ctr" indent="0" marL="0">
+              <a:buNone/>
+            </a:pPr>
+            <a:r>
+              <a:rPr lang="en-US" sz="1250" b="1" dirty="0">
+                <a:solidFill>
+                  <a:srgbClr val="CADCFC"/>
+                </a:solidFill>
+                <a:latin typeface="Calibri" pitchFamily="34" charset="0"/>
+                <a:ea typeface="Calibri" pitchFamily="34" charset="-122"/>
+                <a:cs typeface="Calibri" pitchFamily="34" charset="-120"/>
+              </a:rPr>
+              <a:t>실제 카드 청구액</a:t>
+            </a:r>
+            <a:endParaRPr lang="en-US" sz="1250" dirty="0"/>
+          </a:p>
+        </p:txBody>
+      </p:sp>
+      <p:sp>
+        <p:nvSpPr>
+          <p:cNvPr id="14" name="Text 12"/>
+          <p:cNvSpPr/>
+          <p:nvPr/>
+        </p:nvSpPr>
+        <p:spPr>
+          <a:xfrm>
+            <a:off x="8321040" y="1783080"/>
+            <a:ext cx="3154680" cy="777240"/>
+          </a:xfrm>
+          <a:prstGeom prst="rect">
+            <a:avLst/>
+          </a:prstGeom>
+          <a:noFill/>
+          <a:ln/>
+        </p:spPr>
+        <p:txBody>
+          <a:bodyPr wrap="square" lIns="0" tIns="0" rIns="0" bIns="0" rtlCol="0" anchor="ctr"/>
+          <a:lstStyle/>
+          <a:p>
+            <a:pPr algn="ctr" indent="0" marL="0">
+              <a:buNone/>
+            </a:pPr>
+            <a:r>
+              <a:rPr lang="en-US" sz="4400" b="1" dirty="0">
+                <a:solidFill>
+                  <a:srgbClr val="FFFFFF"/>
                 </a:solidFill>
                 <a:latin typeface="Cambria" pitchFamily="34" charset="0"/>
                 <a:ea typeface="Cambria" pitchFamily="34" charset="-122"/>
                 <a:cs typeface="Cambria" pitchFamily="34" charset="-120"/>
               </a:rPr>
-              <a:t>회수</a:t>
-            </a:r>
-            <a:endParaRPr lang="en-US" sz="2000" dirty="0"/>
-          </a:p>
-        </p:txBody>
-      </p:sp>
-      <p:sp>
-        <p:nvSpPr>
-          <p:cNvPr id="14" name="Text 12"/>
-          <p:cNvSpPr/>
-          <p:nvPr/>
-        </p:nvSpPr>
-        <p:spPr>
-          <a:xfrm>
-            <a:off x="8641080" y="2148840"/>
-            <a:ext cx="2971800" cy="914400"/>
+              <a:t>$0</a:t>
+            </a:r>
+            <a:endParaRPr lang="en-US" sz="4400" dirty="0"/>
+          </a:p>
+        </p:txBody>
+      </p:sp>
+      <p:sp>
+        <p:nvSpPr>
+          <p:cNvPr id="15" name="Text 13"/>
+          <p:cNvSpPr/>
+          <p:nvPr/>
+        </p:nvSpPr>
+        <p:spPr>
+          <a:xfrm>
+            <a:off x="8321040" y="2651760"/>
+            <a:ext cx="3154680" cy="320040"/>
+          </a:xfrm>
+          <a:prstGeom prst="rect">
+            <a:avLst/>
+          </a:prstGeom>
+          <a:noFill/>
+          <a:ln/>
+        </p:spPr>
+        <p:txBody>
+          <a:bodyPr wrap="square" lIns="0" tIns="0" rIns="0" bIns="0" rtlCol="0" anchor="ctr"/>
+          <a:lstStyle/>
+          <a:p>
+            <a:pPr algn="ctr" indent="0" marL="0">
+              <a:buNone/>
+            </a:pPr>
+            <a:r>
+              <a:rPr lang="en-US" sz="1200" dirty="0">
+                <a:solidFill>
+                  <a:srgbClr val="CADCFC"/>
+                </a:solidFill>
+                <a:latin typeface="Calibri" pitchFamily="34" charset="0"/>
+                <a:ea typeface="Calibri" pitchFamily="34" charset="-122"/>
+                <a:cs typeface="Calibri" pitchFamily="34" charset="-120"/>
+              </a:rPr>
+              <a:t>전액 크레딧 차감</a:t>
+            </a:r>
+            <a:endParaRPr lang="en-US" sz="1200" dirty="0"/>
+          </a:p>
+        </p:txBody>
+      </p:sp>
+      <p:sp>
+        <p:nvSpPr>
+          <p:cNvPr id="16" name="Text 14"/>
+          <p:cNvSpPr/>
+          <p:nvPr/>
+        </p:nvSpPr>
+        <p:spPr>
+          <a:xfrm>
+            <a:off x="548640" y="3291840"/>
+            <a:ext cx="11064240" cy="457200"/>
           </a:xfrm>
           <a:prstGeom prst="rect">
             <a:avLst/>
@@ -8386,7 +8675,21 @@
               <a:buNone/>
             </a:pPr>
             <a:r>
-              <a:rPr lang="en-US" sz="1250" dirty="0">
+              <a:rPr lang="en-US" sz="1450" b="1" dirty="0">
+                <a:solidFill>
+                  <a:srgbClr val="1E2761"/>
+                </a:solidFill>
+                <a:latin typeface="Calibri" pitchFamily="34" charset="0"/>
+                <a:ea typeface="Calibri" pitchFamily="34" charset="-122"/>
+                <a:cs typeface="Calibri" pitchFamily="34" charset="-120"/>
+              </a:rPr>
+              <a:t>Why?   </a:t>
+            </a:r>
+            <a:pPr indent="0" marL="0">
+              <a:buNone/>
+            </a:pPr>
+            <a:r>
+              <a:rPr lang="en-US" sz="1300" dirty="0">
                 <a:solidFill>
                   <a:srgbClr val="3A3F52"/>
                 </a:solidFill>
@@ -8394,96 +8697,251 @@
                 <a:ea typeface="Calibri" pitchFamily="34" charset="-122"/>
                 <a:cs typeface="Calibri" pitchFamily="34" charset="-120"/>
               </a:rPr>
-              <a:t>종료 4단계 → destroy 78개</a:t>
-            </a:r>
-            <a:endParaRPr lang="en-US" sz="1250" dirty="0"/>
-          </a:p>
-          <a:p>
-            <a:pPr indent="0" marL="0">
-              <a:buNone/>
-            </a:pPr>
-            <a:r>
-              <a:rPr lang="en-US" sz="1250" dirty="0">
-                <a:solidFill>
-                  <a:srgbClr val="3A3F52"/>
-                </a:solidFill>
-                <a:latin typeface="Calibri" pitchFamily="34" charset="0"/>
-                <a:ea typeface="Calibri" pitchFamily="34" charset="-122"/>
-                <a:cs typeface="Calibri" pitchFamily="34" charset="-120"/>
-              </a:rPr>
-              <a:t>13개 항목 전수검증 → 잔여물 0</a:t>
-            </a:r>
-            <a:endParaRPr lang="en-US" sz="1250" dirty="0"/>
-          </a:p>
-        </p:txBody>
-      </p:sp>
-      <p:sp>
-        <p:nvSpPr>
-          <p:cNvPr id="15" name="Text 13"/>
-          <p:cNvSpPr/>
-          <p:nvPr/>
-        </p:nvSpPr>
-        <p:spPr>
-          <a:xfrm>
-            <a:off x="548640" y="3520440"/>
-            <a:ext cx="11064240" cy="640080"/>
-          </a:xfrm>
-          <a:prstGeom prst="rect">
-            <a:avLst/>
-          </a:prstGeom>
-          <a:noFill/>
-          <a:ln/>
-        </p:spPr>
-        <p:txBody>
-          <a:bodyPr wrap="square" lIns="0" tIns="0" rIns="0" bIns="0" rtlCol="0" anchor="ctr"/>
-          <a:lstStyle/>
-          <a:p>
-            <a:pPr indent="0" marL="0">
-              <a:buNone/>
-            </a:pPr>
-            <a:r>
-              <a:rPr lang="en-US" sz="1350" b="1" dirty="0">
-                <a:solidFill>
-                  <a:srgbClr val="1E2761"/>
-                </a:solidFill>
-                <a:latin typeface="Calibri" pitchFamily="34" charset="0"/>
-                <a:ea typeface="Calibri" pitchFamily="34" charset="-122"/>
-                <a:cs typeface="Calibri" pitchFamily="34" charset="-120"/>
-              </a:rPr>
-              <a:t>비용 운영   </a:t>
-            </a:r>
-            <a:pPr indent="0" marL="0">
-              <a:buNone/>
-            </a:pPr>
-            <a:r>
-              <a:rPr lang="en-US" sz="1350" dirty="0">
-                <a:solidFill>
-                  <a:srgbClr val="3A3F52"/>
-                </a:solidFill>
-                <a:latin typeface="Calibri" pitchFamily="34" charset="0"/>
-                <a:ea typeface="Calibri" pitchFamily="34" charset="-122"/>
-                <a:cs typeface="Calibri" pitchFamily="34" charset="-120"/>
-              </a:rPr>
-              <a:t>상시 가동 월 $164 → destroy 병행으로 검증 하루 2,000원 미만  ·  state 밖 리소스(ALB·EBS)까지 검증해 “조용한 과금” 차단</a:t>
-            </a:r>
-            <a:endParaRPr lang="en-US" sz="1350" dirty="0"/>
-          </a:p>
-        </p:txBody>
-      </p:sp>
-      <p:sp>
-        <p:nvSpPr>
-          <p:cNvPr id="16" name="Shape 14"/>
-          <p:cNvSpPr/>
-          <p:nvPr/>
-        </p:nvSpPr>
-        <p:spPr>
-          <a:xfrm>
-            <a:off x="548640" y="4434840"/>
-            <a:ext cx="11064240" cy="1691640"/>
+              <a:t>작업 단위로 apply / destroy 반복 — 필요한 시점에만 가동하고, state 밖 리소스(ALB·EBS)까지 전수검증해 “조용한 과금”을 차단</a:t>
+            </a:r>
+            <a:endParaRPr lang="en-US" sz="1450" dirty="0"/>
+          </a:p>
+        </p:txBody>
+      </p:sp>
+      <p:sp>
+        <p:nvSpPr>
+          <p:cNvPr id="17" name="Shape 15"/>
+          <p:cNvSpPr/>
+          <p:nvPr/>
+        </p:nvSpPr>
+        <p:spPr>
+          <a:xfrm>
+            <a:off x="548640" y="3886200"/>
+            <a:ext cx="3520440" cy="658368"/>
           </a:xfrm>
           <a:prstGeom prst="roundRect">
             <a:avLst>
-              <a:gd name="adj" fmla="val 4865"/>
+              <a:gd name="adj" fmla="val 11111"/>
+            </a:avLst>
+          </a:prstGeom>
+          <a:solidFill>
+            <a:srgbClr val="F4F6FC"/>
+          </a:solidFill>
+          <a:ln/>
+        </p:spPr>
+      </p:sp>
+      <p:sp>
+        <p:nvSpPr>
+          <p:cNvPr id="18" name="Text 16"/>
+          <p:cNvSpPr/>
+          <p:nvPr/>
+        </p:nvSpPr>
+        <p:spPr>
+          <a:xfrm>
+            <a:off x="731520" y="3886200"/>
+            <a:ext cx="3200400" cy="658368"/>
+          </a:xfrm>
+          <a:prstGeom prst="rect">
+            <a:avLst/>
+          </a:prstGeom>
+          <a:noFill/>
+          <a:ln/>
+        </p:spPr>
+        <p:txBody>
+          <a:bodyPr wrap="square" lIns="0" tIns="0" rIns="0" bIns="0" rtlCol="0" anchor="ctr"/>
+          <a:lstStyle/>
+          <a:p>
+            <a:pPr indent="0" marL="0">
+              <a:buNone/>
+            </a:pPr>
+            <a:r>
+              <a:rPr lang="en-US" sz="1350" b="1" dirty="0">
+                <a:solidFill>
+                  <a:srgbClr val="1E2761"/>
+                </a:solidFill>
+                <a:latin typeface="Calibri" pitchFamily="34" charset="0"/>
+                <a:ea typeface="Calibri" pitchFamily="34" charset="-122"/>
+                <a:cs typeface="Calibri" pitchFamily="34" charset="-120"/>
+              </a:rPr>
+              <a:t>재현   </a:t>
+            </a:r>
+            <a:pPr indent="0" marL="0">
+              <a:buNone/>
+            </a:pPr>
+            <a:r>
+              <a:rPr lang="en-US" sz="1100" dirty="0">
+                <a:solidFill>
+                  <a:srgbClr val="3A3F52"/>
+                </a:solidFill>
+                <a:latin typeface="Calibri" pitchFamily="34" charset="0"/>
+                <a:ea typeface="Calibri" pitchFamily="34" charset="-122"/>
+                <a:cs typeface="Calibri" pitchFamily="34" charset="-120"/>
+              </a:rPr>
+              <a:t>apply + 9단계 루틴 · 20분 복원 · 5회 실증</a:t>
+            </a:r>
+            <a:endParaRPr lang="en-US" sz="1350" dirty="0"/>
+          </a:p>
+        </p:txBody>
+      </p:sp>
+      <p:sp>
+        <p:nvSpPr>
+          <p:cNvPr id="19" name="Shape 17"/>
+          <p:cNvSpPr/>
+          <p:nvPr/>
+        </p:nvSpPr>
+        <p:spPr>
+          <a:xfrm>
+            <a:off x="4343400" y="3886200"/>
+            <a:ext cx="3520440" cy="658368"/>
+          </a:xfrm>
+          <a:prstGeom prst="roundRect">
+            <a:avLst>
+              <a:gd name="adj" fmla="val 11111"/>
+            </a:avLst>
+          </a:prstGeom>
+          <a:solidFill>
+            <a:srgbClr val="F4F6FC"/>
+          </a:solidFill>
+          <a:ln/>
+        </p:spPr>
+      </p:sp>
+      <p:sp>
+        <p:nvSpPr>
+          <p:cNvPr id="20" name="Text 18"/>
+          <p:cNvSpPr/>
+          <p:nvPr/>
+        </p:nvSpPr>
+        <p:spPr>
+          <a:xfrm>
+            <a:off x="4526280" y="3886200"/>
+            <a:ext cx="3200400" cy="658368"/>
+          </a:xfrm>
+          <a:prstGeom prst="rect">
+            <a:avLst/>
+          </a:prstGeom>
+          <a:noFill/>
+          <a:ln/>
+        </p:spPr>
+        <p:txBody>
+          <a:bodyPr wrap="square" lIns="0" tIns="0" rIns="0" bIns="0" rtlCol="0" anchor="ctr"/>
+          <a:lstStyle/>
+          <a:p>
+            <a:pPr indent="0" marL="0">
+              <a:buNone/>
+            </a:pPr>
+            <a:r>
+              <a:rPr lang="en-US" sz="1350" b="1" dirty="0">
+                <a:solidFill>
+                  <a:srgbClr val="1E2761"/>
+                </a:solidFill>
+                <a:latin typeface="Calibri" pitchFamily="34" charset="0"/>
+                <a:ea typeface="Calibri" pitchFamily="34" charset="-122"/>
+                <a:cs typeface="Calibri" pitchFamily="34" charset="-120"/>
+              </a:rPr>
+              <a:t>검증   </a:t>
+            </a:r>
+            <a:pPr indent="0" marL="0">
+              <a:buNone/>
+            </a:pPr>
+            <a:r>
+              <a:rPr lang="en-US" sz="1100" dirty="0">
+                <a:solidFill>
+                  <a:srgbClr val="3A3F52"/>
+                </a:solidFill>
+                <a:latin typeface="Calibri" pitchFamily="34" charset="0"/>
+                <a:ea typeface="Calibri" pitchFamily="34" charset="-122"/>
+                <a:cs typeface="Calibri" pitchFamily="34" charset="-120"/>
+              </a:rPr>
+              <a:t>E2E · GitOps · 알람 · HPA 전 항목 재통과</a:t>
+            </a:r>
+            <a:endParaRPr lang="en-US" sz="1350" dirty="0"/>
+          </a:p>
+        </p:txBody>
+      </p:sp>
+      <p:sp>
+        <p:nvSpPr>
+          <p:cNvPr id="21" name="Shape 19"/>
+          <p:cNvSpPr/>
+          <p:nvPr/>
+        </p:nvSpPr>
+        <p:spPr>
+          <a:xfrm>
+            <a:off x="8138160" y="3886200"/>
+            <a:ext cx="3520440" cy="658368"/>
+          </a:xfrm>
+          <a:prstGeom prst="roundRect">
+            <a:avLst>
+              <a:gd name="adj" fmla="val 11111"/>
+            </a:avLst>
+          </a:prstGeom>
+          <a:solidFill>
+            <a:srgbClr val="F4F6FC"/>
+          </a:solidFill>
+          <a:ln/>
+        </p:spPr>
+      </p:sp>
+      <p:sp>
+        <p:nvSpPr>
+          <p:cNvPr id="22" name="Text 20"/>
+          <p:cNvSpPr/>
+          <p:nvPr/>
+        </p:nvSpPr>
+        <p:spPr>
+          <a:xfrm>
+            <a:off x="8321040" y="3886200"/>
+            <a:ext cx="3200400" cy="658368"/>
+          </a:xfrm>
+          <a:prstGeom prst="rect">
+            <a:avLst/>
+          </a:prstGeom>
+          <a:noFill/>
+          <a:ln/>
+        </p:spPr>
+        <p:txBody>
+          <a:bodyPr wrap="square" lIns="0" tIns="0" rIns="0" bIns="0" rtlCol="0" anchor="ctr"/>
+          <a:lstStyle/>
+          <a:p>
+            <a:pPr indent="0" marL="0">
+              <a:buNone/>
+            </a:pPr>
+            <a:r>
+              <a:rPr lang="en-US" sz="1350" b="1" dirty="0">
+                <a:solidFill>
+                  <a:srgbClr val="1E2761"/>
+                </a:solidFill>
+                <a:latin typeface="Calibri" pitchFamily="34" charset="0"/>
+                <a:ea typeface="Calibri" pitchFamily="34" charset="-122"/>
+                <a:cs typeface="Calibri" pitchFamily="34" charset="-120"/>
+              </a:rPr>
+              <a:t>회수   </a:t>
+            </a:r>
+            <a:pPr indent="0" marL="0">
+              <a:buNone/>
+            </a:pPr>
+            <a:r>
+              <a:rPr lang="en-US" sz="1100" dirty="0">
+                <a:solidFill>
+                  <a:srgbClr val="3A3F52"/>
+                </a:solidFill>
+                <a:latin typeface="Calibri" pitchFamily="34" charset="0"/>
+                <a:ea typeface="Calibri" pitchFamily="34" charset="-122"/>
+                <a:cs typeface="Calibri" pitchFamily="34" charset="-120"/>
+              </a:rPr>
+              <a:t>destroy 78개 · 13개 항목 전수검증 · 잔여물 0</a:t>
+            </a:r>
+            <a:endParaRPr lang="en-US" sz="1350" dirty="0"/>
+          </a:p>
+        </p:txBody>
+      </p:sp>
+      <p:sp>
+        <p:nvSpPr>
+          <p:cNvPr id="23" name="Shape 21"/>
+          <p:cNvSpPr/>
+          <p:nvPr/>
+        </p:nvSpPr>
+        <p:spPr>
+          <a:xfrm>
+            <a:off x="548640" y="4800600"/>
+            <a:ext cx="11064240" cy="1371600"/>
+          </a:xfrm>
+          <a:prstGeom prst="roundRect">
+            <a:avLst>
+              <a:gd name="adj" fmla="val 6000"/>
             </a:avLst>
           </a:prstGeom>
           <a:solidFill>
@@ -8494,14 +8952,14 @@
       </p:sp>
       <p:sp>
         <p:nvSpPr>
-          <p:cNvPr id="17" name="Text 15"/>
-          <p:cNvSpPr/>
-          <p:nvPr/>
-        </p:nvSpPr>
-        <p:spPr>
-          <a:xfrm>
-            <a:off x="822960" y="4434840"/>
-            <a:ext cx="10515600" cy="1691640"/>
+          <p:cNvPr id="24" name="Text 22"/>
+          <p:cNvSpPr/>
+          <p:nvPr/>
+        </p:nvSpPr>
+        <p:spPr>
+          <a:xfrm>
+            <a:off x="822960" y="4800600"/>
+            <a:ext cx="10515600" cy="1371600"/>
           </a:xfrm>
           <a:prstGeom prst="rect">
             <a:avLst/>
@@ -8517,7 +8975,7 @@
               <a:buNone/>
             </a:pPr>
             <a:r>
-              <a:rPr lang="en-US" sz="2200" b="1" i="1" dirty="0">
+              <a:rPr lang="en-US" sz="2100" b="1" i="1" dirty="0">
                 <a:solidFill>
                   <a:srgbClr val="FFFFFF"/>
                 </a:solidFill>
@@ -8525,26 +8983,48 @@
                 <a:ea typeface="Cambria" pitchFamily="34" charset="-122"/>
                 <a:cs typeface="Cambria" pitchFamily="34" charset="-120"/>
               </a:rPr>
-              <a:t>“지금 이 순간 AWS 과금: $0</a:t>
-            </a:r>
-            <a:endParaRPr lang="en-US" sz="2200" dirty="0"/>
-          </a:p>
+              <a:t>“지금 이 순간 AWS 과금: $0 — 그리고 언제든 20분이면 되살릴 수 있습니다”</a:t>
+            </a:r>
+            <a:endParaRPr lang="en-US" sz="2100" dirty="0"/>
+          </a:p>
+        </p:txBody>
+      </p:sp>
+      <p:sp>
+        <p:nvSpPr>
+          <p:cNvPr id="25" name="Text 23"/>
+          <p:cNvSpPr/>
+          <p:nvPr/>
+        </p:nvSpPr>
+        <p:spPr>
+          <a:xfrm>
+            <a:off x="548640" y="6355080"/>
+            <a:ext cx="9875520" cy="365760"/>
+          </a:xfrm>
+          <a:prstGeom prst="rect">
+            <a:avLst/>
+          </a:prstGeom>
+          <a:noFill/>
+          <a:ln/>
+        </p:spPr>
+        <p:txBody>
+          <a:bodyPr wrap="square" lIns="0" tIns="0" rIns="0" bIns="0" rtlCol="0" anchor="ctr"/>
+          <a:lstStyle/>
           <a:p>
             <a:pPr algn="ctr" indent="0" marL="0">
               <a:buNone/>
             </a:pPr>
             <a:r>
-              <a:rPr lang="en-US" sz="2200" b="1" i="1" dirty="0">
-                <a:solidFill>
-                  <a:srgbClr val="FFFFFF"/>
-                </a:solidFill>
-                <a:latin typeface="Cambria" pitchFamily="34" charset="0"/>
-                <a:ea typeface="Cambria" pitchFamily="34" charset="-122"/>
-                <a:cs typeface="Cambria" pitchFamily="34" charset="-120"/>
-              </a:rPr>
-              <a:t>— 그리고 언제든 20분이면 되살릴 수 있습니다”</a:t>
-            </a:r>
-            <a:endParaRPr lang="en-US" sz="2200" dirty="0"/>
+              <a:rPr lang="en-US" sz="1150" i="1" dirty="0">
+                <a:solidFill>
+                  <a:srgbClr val="6B7089"/>
+                </a:solidFill>
+                <a:latin typeface="Calibri" pitchFamily="34" charset="0"/>
+                <a:ea typeface="Calibri" pitchFamily="34" charset="-122"/>
+                <a:cs typeface="Calibri" pitchFamily="34" charset="-120"/>
+              </a:rPr>
+              <a:t>실사용액은 7월 확정 청구서 기준 — 8월분도 전액 크레딧 차감 예정 (청구서 확정 시 갱신)</a:t>
+            </a:r>
+            <a:endParaRPr lang="en-US" sz="1150" dirty="0"/>
           </a:p>
         </p:txBody>
       </p:sp>
@@ -8652,7 +9132,7 @@
                 <a:ea typeface="Calibri" pitchFamily="34" charset="-122"/>
                 <a:cs typeface="Calibri" pitchFamily="34" charset="-120"/>
               </a:rPr>
-              <a:t>PAGE 16</a:t>
+              <a:t>PAGE 17</a:t>
             </a:r>
             <a:endParaRPr lang="en-US" sz="1000" dirty="0"/>
           </a:p>
@@ -8954,7 +9434,7 @@
 
 <file path=ppt/slides/slide19.xml><?xml version="1.0" encoding="utf-8"?>
 <p:sld xmlns:a="http://schemas.openxmlformats.org/drawingml/2006/main" xmlns:r="http://schemas.openxmlformats.org/officeDocument/2006/relationships" xmlns:p="http://schemas.openxmlformats.org/presentationml/2006/main">
-  <p:cSld name="Slide 1">
+  <p:cSld name="Slide 4">
     <p:bg>
       <p:bgPr>
         <a:solidFill>
@@ -9024,8 +9504,8 @@
         </p:nvSpPr>
         <p:spPr>
           <a:xfrm>
-            <a:off x="822960" y="1234440"/>
-            <a:ext cx="10515600" cy="914400"/>
+            <a:off x="822960" y="914400"/>
+            <a:ext cx="10515600" cy="502920"/>
           </a:xfrm>
           <a:prstGeom prst="rect">
             <a:avLst/>
@@ -9041,7 +9521,46 @@
               <a:buNone/>
             </a:pPr>
             <a:r>
-              <a:rPr lang="en-US" sz="4400" b="1" dirty="0">
+              <a:rPr lang="en-US" sz="1800" dirty="0">
+                <a:solidFill>
+                  <a:srgbClr val="CADCFC"/>
+                </a:solidFill>
+                <a:latin typeface="Calibri" pitchFamily="34" charset="0"/>
+                <a:ea typeface="Calibri" pitchFamily="34" charset="-122"/>
+                <a:cs typeface="Calibri" pitchFamily="34" charset="-120"/>
+              </a:rPr>
+              <a:t>감사합니다</a:t>
+            </a:r>
+            <a:endParaRPr lang="en-US" sz="1800" dirty="0"/>
+          </a:p>
+        </p:txBody>
+      </p:sp>
+      <p:sp>
+        <p:nvSpPr>
+          <p:cNvPr id="5" name="Text 3"/>
+          <p:cNvSpPr/>
+          <p:nvPr/>
+        </p:nvSpPr>
+        <p:spPr>
+          <a:xfrm>
+            <a:off x="822960" y="1554480"/>
+            <a:ext cx="10515600" cy="868680"/>
+          </a:xfrm>
+          <a:prstGeom prst="rect">
+            <a:avLst/>
+          </a:prstGeom>
+          <a:noFill/>
+          <a:ln/>
+        </p:spPr>
+        <p:txBody>
+          <a:bodyPr wrap="square" lIns="0" tIns="0" rIns="0" bIns="0" rtlCol="0" anchor="ctr"/>
+          <a:lstStyle/>
+          <a:p>
+            <a:pPr algn="ctr" indent="0" marL="0">
+              <a:buNone/>
+            </a:pPr>
+            <a:r>
+              <a:rPr lang="en-US" sz="3800" b="1" dirty="0">
                 <a:solidFill>
                   <a:srgbClr val="FFFFFF"/>
                 </a:solidFill>
@@ -9049,22 +9568,22 @@
                 <a:ea typeface="Cambria" pitchFamily="34" charset="-122"/>
                 <a:cs typeface="Cambria" pitchFamily="34" charset="-120"/>
               </a:rPr>
-              <a:t>감사합니다</a:t>
-            </a:r>
-            <a:endParaRPr lang="en-US" sz="4400" dirty="0"/>
-          </a:p>
-        </p:txBody>
-      </p:sp>
-      <p:sp>
-        <p:nvSpPr>
-          <p:cNvPr id="5" name="Text 3"/>
-          <p:cNvSpPr/>
-          <p:nvPr/>
-        </p:nvSpPr>
-        <p:spPr>
-          <a:xfrm>
-            <a:off x="822960" y="2331720"/>
-            <a:ext cx="10515600" cy="457200"/>
+              <a:t>관제하던 클라우드에서, 설계하는 클라우드로</a:t>
+            </a:r>
+            <a:endParaRPr lang="en-US" sz="3800" dirty="0"/>
+          </a:p>
+        </p:txBody>
+      </p:sp>
+      <p:sp>
+        <p:nvSpPr>
+          <p:cNvPr id="6" name="Text 4"/>
+          <p:cNvSpPr/>
+          <p:nvPr/>
+        </p:nvSpPr>
+        <p:spPr>
+          <a:xfrm>
+            <a:off x="822960" y="2560320"/>
+            <a:ext cx="10515600" cy="411480"/>
           </a:xfrm>
           <a:prstGeom prst="rect">
             <a:avLst/>
@@ -9080,7 +9599,7 @@
               <a:buNone/>
             </a:pPr>
             <a:r>
-              <a:rPr lang="en-US" sz="1800" b="1" dirty="0">
+              <a:rPr lang="en-US" sz="1500" dirty="0">
                 <a:solidFill>
                   <a:srgbClr val="CADCFC"/>
                 </a:solidFill>
@@ -9088,21 +9607,21 @@
                 <a:ea typeface="Calibri" pitchFamily="34" charset="-122"/>
                 <a:cs typeface="Calibri" pitchFamily="34" charset="-120"/>
               </a:rPr>
-              <a:t>github.com/soc05272/eks-gitops-portfolio</a:t>
-            </a:r>
-            <a:endParaRPr lang="en-US" sz="1800" dirty="0"/>
-          </a:p>
-        </p:txBody>
-      </p:sp>
-      <p:sp>
-        <p:nvSpPr>
-          <p:cNvPr id="6" name="Text 4"/>
-          <p:cNvSpPr/>
-          <p:nvPr/>
-        </p:nvSpPr>
-        <p:spPr>
-          <a:xfrm>
-            <a:off x="822960" y="3154680"/>
+              <a:t>한 줄의 코드부터 회수까지 — 전 과정을 직접 검증했습니다</a:t>
+            </a:r>
+            <a:endParaRPr lang="en-US" sz="1500" dirty="0"/>
+          </a:p>
+        </p:txBody>
+      </p:sp>
+      <p:sp>
+        <p:nvSpPr>
+          <p:cNvPr id="7" name="Text 5"/>
+          <p:cNvSpPr/>
+          <p:nvPr/>
+        </p:nvSpPr>
+        <p:spPr>
+          <a:xfrm>
+            <a:off x="822960" y="3200400"/>
             <a:ext cx="10515600" cy="365760"/>
           </a:xfrm>
           <a:prstGeom prst="rect">
@@ -9119,49 +9638,7 @@
               <a:buNone/>
             </a:pPr>
             <a:r>
-              <a:rPr lang="en-US" sz="1400" dirty="0">
-                <a:solidFill>
-                  <a:srgbClr val="CADCFC"/>
-                </a:solidFill>
-                <a:latin typeface="Calibri" pitchFamily="34" charset="0"/>
-                <a:ea typeface="Calibri" pitchFamily="34" charset="-122"/>
-                <a:cs typeface="Calibri" pitchFamily="34" charset="-120"/>
-              </a:rPr>
-              <a:t>repo에서 확인하실 수 있습니다</a:t>
-            </a:r>
-            <a:endParaRPr lang="en-US" sz="1400" dirty="0"/>
-          </a:p>
-        </p:txBody>
-      </p:sp>
-      <p:sp>
-        <p:nvSpPr>
-          <p:cNvPr id="7" name="Text 5"/>
-          <p:cNvSpPr/>
-          <p:nvPr/>
-        </p:nvSpPr>
-        <p:spPr>
-          <a:xfrm>
-            <a:off x="822960" y="3611880"/>
-            <a:ext cx="10515600" cy="1280160"/>
-          </a:xfrm>
-          <a:prstGeom prst="rect">
-            <a:avLst/>
-          </a:prstGeom>
-          <a:noFill/>
-          <a:ln/>
-        </p:spPr>
-        <p:txBody>
-          <a:bodyPr wrap="square" lIns="0" tIns="0" rIns="0" bIns="0" rtlCol="0" anchor="ctr"/>
-          <a:lstStyle/>
-          <a:p>
-            <a:pPr algn="ctr" indent="0" marL="0">
-              <a:spcAft>
-                <a:spcPts val="600"/>
-              </a:spcAft>
-              <a:buNone/>
-            </a:pPr>
-            <a:r>
-              <a:rPr lang="en-US" sz="1350" dirty="0">
+              <a:rPr lang="en-US" sz="1250" dirty="0">
                 <a:solidFill>
                   <a:srgbClr val="AFC4F2"/>
                 </a:solidFill>
@@ -9169,46 +9646,9 @@
                 <a:ea typeface="Calibri" pitchFamily="34" charset="-122"/>
                 <a:cs typeface="Calibri" pitchFamily="34" charset="-120"/>
               </a:rPr>
-              <a:t>트러블슈팅 7건 (문제 → 진단 → 해결 → 배운 점)</a:t>
-            </a:r>
-            <a:endParaRPr lang="en-US" sz="1350" dirty="0"/>
-          </a:p>
-          <a:p>
-            <a:pPr algn="ctr" indent="0" marL="0">
-              <a:spcAft>
-                <a:spcPts val="600"/>
-              </a:spcAft>
-              <a:buNone/>
-            </a:pPr>
-            <a:r>
-              <a:rPr lang="en-US" sz="1350" dirty="0">
-                <a:solidFill>
-                  <a:srgbClr val="AFC4F2"/>
-                </a:solidFill>
-                <a:latin typeface="Calibri" pitchFamily="34" charset="0"/>
-                <a:ea typeface="Calibri" pitchFamily="34" charset="-122"/>
-                <a:cs typeface="Calibri" pitchFamily="34" charset="-120"/>
-              </a:rPr>
-              <a:t>의사결정 기록 3건 (ADR)</a:t>
-            </a:r>
-            <a:endParaRPr lang="en-US" sz="1350" dirty="0"/>
-          </a:p>
-          <a:p>
-            <a:pPr algn="ctr" indent="0" marL="0">
-              <a:buNone/>
-            </a:pPr>
-            <a:r>
-              <a:rPr lang="en-US" sz="1350" dirty="0">
-                <a:solidFill>
-                  <a:srgbClr val="AFC4F2"/>
-                </a:solidFill>
-                <a:latin typeface="Calibri" pitchFamily="34" charset="0"/>
-                <a:ea typeface="Calibri" pitchFamily="34" charset="-122"/>
-                <a:cs typeface="Calibri" pitchFamily="34" charset="-120"/>
-              </a:rPr>
-              <a:t>날짜별 작업 로그와 재기동·종료 루틴</a:t>
-            </a:r>
-            <a:endParaRPr lang="en-US" sz="1350" dirty="0"/>
+              <a:t>트러블슈팅 7건 (문제 → 진단 → 해결 → 배운 점)   ·   ADR 3건   ·   작업 로그·재기동/종료 루틴</a:t>
+            </a:r>
+            <a:endParaRPr lang="en-US" sz="1250" dirty="0"/>
           </a:p>
         </p:txBody>
       </p:sp>
@@ -9228,7 +9668,7 @@
         </p:blipFill>
         <p:spPr>
           <a:xfrm>
-            <a:off x="5431536" y="5074920"/>
+            <a:off x="5431536" y="3749040"/>
             <a:ext cx="1325880" cy="1325880"/>
           </a:xfrm>
           <a:prstGeom prst="rect">
@@ -9236,6 +9676,153 @@
           </a:prstGeom>
         </p:spPr>
       </p:pic>
+      <p:sp>
+        <p:nvSpPr>
+          <p:cNvPr id="9" name="Text 6"/>
+          <p:cNvSpPr/>
+          <p:nvPr/>
+        </p:nvSpPr>
+        <p:spPr>
+          <a:xfrm>
+            <a:off x="4974336" y="5120640"/>
+            <a:ext cx="2240280" cy="274320"/>
+          </a:xfrm>
+          <a:prstGeom prst="rect">
+            <a:avLst/>
+          </a:prstGeom>
+          <a:noFill/>
+          <a:ln/>
+        </p:spPr>
+        <p:txBody>
+          <a:bodyPr wrap="square" lIns="0" tIns="0" rIns="0" bIns="0" rtlCol="0" anchor="ctr"/>
+          <a:lstStyle/>
+          <a:p>
+            <a:pPr algn="ctr" indent="0" marL="0">
+              <a:buNone/>
+            </a:pPr>
+            <a:r>
+              <a:rPr lang="en-US" sz="1050" dirty="0">
+                <a:solidFill>
+                  <a:srgbClr val="8FA6E0"/>
+                </a:solidFill>
+                <a:latin typeface="Calibri" pitchFamily="34" charset="0"/>
+                <a:ea typeface="Calibri" pitchFamily="34" charset="-122"/>
+                <a:cs typeface="Calibri" pitchFamily="34" charset="-120"/>
+              </a:rPr>
+              <a:t>QR — GitHub repo</a:t>
+            </a:r>
+            <a:endParaRPr lang="en-US" sz="1050" dirty="0"/>
+          </a:p>
+        </p:txBody>
+      </p:sp>
+      <p:sp>
+        <p:nvSpPr>
+          <p:cNvPr id="10" name="Shape 7"/>
+          <p:cNvSpPr/>
+          <p:nvPr/>
+        </p:nvSpPr>
+        <p:spPr>
+          <a:xfrm>
+            <a:off x="1463040" y="5760720"/>
+            <a:ext cx="9235440" cy="658368"/>
+          </a:xfrm>
+          <a:prstGeom prst="roundRect">
+            <a:avLst>
+              <a:gd name="adj" fmla="val 50000"/>
+            </a:avLst>
+          </a:prstGeom>
+          <a:solidFill>
+            <a:srgbClr val="27337A"/>
+          </a:solidFill>
+          <a:ln w="12700">
+            <a:solidFill>
+              <a:srgbClr val="4E5CA8"/>
+            </a:solidFill>
+            <a:prstDash val="solid"/>
+          </a:ln>
+        </p:spPr>
+      </p:sp>
+      <p:sp>
+        <p:nvSpPr>
+          <p:cNvPr id="11" name="Text 8"/>
+          <p:cNvSpPr/>
+          <p:nvPr/>
+        </p:nvSpPr>
+        <p:spPr>
+          <a:xfrm>
+            <a:off x="1463040" y="5760720"/>
+            <a:ext cx="9235440" cy="658368"/>
+          </a:xfrm>
+          <a:prstGeom prst="rect">
+            <a:avLst/>
+          </a:prstGeom>
+          <a:noFill/>
+          <a:ln/>
+        </p:spPr>
+        <p:txBody>
+          <a:bodyPr wrap="square" lIns="0" tIns="0" rIns="0" bIns="0" rtlCol="0" anchor="ctr"/>
+          <a:lstStyle/>
+          <a:p>
+            <a:pPr algn="ctr" indent="0" marL="0">
+              <a:buNone/>
+            </a:pPr>
+            <a:r>
+              <a:rPr lang="en-US" sz="1300" b="1" dirty="0">
+                <a:solidFill>
+                  <a:srgbClr val="CADCFC"/>
+                </a:solidFill>
+                <a:latin typeface="Calibri" pitchFamily="34" charset="0"/>
+                <a:ea typeface="Calibri" pitchFamily="34" charset="-122"/>
+                <a:cs typeface="Calibri" pitchFamily="34" charset="-120"/>
+              </a:rPr>
+              <a:t>이메일  </a:t>
+            </a:r>
+            <a:pPr algn="ctr" indent="0" marL="0">
+              <a:buNone/>
+            </a:pPr>
+            <a:r>
+              <a:rPr lang="en-US" sz="1300" dirty="0">
+                <a:solidFill>
+                  <a:srgbClr val="FFFFFF"/>
+                </a:solidFill>
+                <a:latin typeface="Calibri" pitchFamily="34" charset="0"/>
+                <a:ea typeface="Calibri" pitchFamily="34" charset="-122"/>
+                <a:cs typeface="Calibri" pitchFamily="34" charset="-120"/>
+              </a:rPr>
+              <a:t>soc05272@naver.com</a:t>
+            </a:r>
+            <a:pPr algn="ctr" indent="0" marL="0">
+              <a:buNone/>
+            </a:pPr>
+            <a:r>
+              <a:rPr lang="en-US" sz="1300" b="1" dirty="0">
+                <a:solidFill>
+                  <a:srgbClr val="CADCFC"/>
+                </a:solidFill>
+                <a:latin typeface="Calibri" pitchFamily="34" charset="0"/>
+                <a:ea typeface="Calibri" pitchFamily="34" charset="-122"/>
+                <a:cs typeface="Calibri" pitchFamily="34" charset="-120"/>
+              </a:rPr>
+              <a:t>        GitHub  </a:t>
+            </a:r>
+            <a:pPr algn="ctr" indent="0" marL="0">
+              <a:buNone/>
+            </a:pPr>
+            <a:r>
+              <a:rPr lang="en-US" sz="1300" dirty="0">
+                <a:solidFill>
+                  <a:srgbClr val="FFFFFF"/>
+                </a:solidFill>
+                <a:latin typeface="Calibri" pitchFamily="34" charset="0"/>
+                <a:ea typeface="Calibri" pitchFamily="34" charset="-122"/>
+                <a:cs typeface="Calibri" pitchFamily="34" charset="-120"/>
+              </a:rPr>
+              <a:t>github.com/soc05272/eks-gitops-portfolio</a:t>
+            </a:r>
+            <a:endParaRPr lang="en-US" sz="1300" dirty="0"/>
+          </a:p>
+        </p:txBody>
+      </p:sp>
     </p:spTree>
   </p:cSld>
   <p:clrMapOvr>
@@ -10389,6 +10976,617 @@
               <a:t>마무리</a:t>
             </a:r>
             <a:endParaRPr lang="en-US" sz="1550" dirty="0"/>
+          </a:p>
+        </p:txBody>
+      </p:sp>
+    </p:spTree>
+  </p:cSld>
+  <p:clrMapOvr>
+    <a:masterClrMapping/>
+  </p:clrMapOvr>
+</p:sld>
+</file>
+
+<file path=ppt/slides/slide20.xml><?xml version="1.0" encoding="utf-8"?>
+<p:sld xmlns:a="http://schemas.openxmlformats.org/drawingml/2006/main" xmlns:r="http://schemas.openxmlformats.org/officeDocument/2006/relationships" xmlns:p="http://schemas.openxmlformats.org/presentationml/2006/main">
+  <p:cSld name="Slide 3">
+    <p:bg>
+      <p:bgPr>
+        <a:solidFill>
+          <a:srgbClr val="FFFFFF"/>
+        </a:solidFill>
+      </p:bgPr>
+    </p:bg>
+    <p:spTree>
+      <p:nvGrpSpPr>
+        <p:cNvPr id="1" name=""/>
+        <p:cNvGrpSpPr/>
+        <p:nvPr/>
+      </p:nvGrpSpPr>
+      <p:grpSpPr>
+        <a:xfrm>
+          <a:off x="0" y="0"/>
+          <a:ext cx="0" cy="0"/>
+          <a:chOff x="0" y="0"/>
+          <a:chExt cx="0" cy="0"/>
+        </a:xfrm>
+      </p:grpSpPr>
+      <p:sp>
+        <p:nvSpPr>
+          <p:cNvPr id="2" name="Text 0"/>
+          <p:cNvSpPr/>
+          <p:nvPr/>
+        </p:nvSpPr>
+        <p:spPr>
+          <a:xfrm>
+            <a:off x="548640" y="365760"/>
+            <a:ext cx="11064240" cy="685800"/>
+          </a:xfrm>
+          <a:prstGeom prst="rect">
+            <a:avLst/>
+          </a:prstGeom>
+          <a:noFill/>
+          <a:ln/>
+        </p:spPr>
+        <p:txBody>
+          <a:bodyPr wrap="square" lIns="0" tIns="0" rIns="0" bIns="0" rtlCol="0" anchor="ctr"/>
+          <a:lstStyle/>
+          <a:p>
+            <a:pPr indent="0" marL="0">
+              <a:buNone/>
+            </a:pPr>
+            <a:r>
+              <a:rPr lang="en-US" sz="2800" b="1" dirty="0">
+                <a:solidFill>
+                  <a:srgbClr val="1E2761"/>
+                </a:solidFill>
+                <a:latin typeface="Cambria" pitchFamily="34" charset="0"/>
+                <a:ea typeface="Cambria" pitchFamily="34" charset="-122"/>
+                <a:cs typeface="Cambria" pitchFamily="34" charset="-120"/>
+              </a:rPr>
+              <a:t>10. 마무리 — 운영 경험은 설계로 어떻게 쓰였나?</a:t>
+            </a:r>
+            <a:endParaRPr lang="en-US" sz="2800" dirty="0"/>
+          </a:p>
+        </p:txBody>
+      </p:sp>
+      <p:sp>
+        <p:nvSpPr>
+          <p:cNvPr id="3" name="Text 1"/>
+          <p:cNvSpPr/>
+          <p:nvPr/>
+        </p:nvSpPr>
+        <p:spPr>
+          <a:xfrm>
+            <a:off x="10607040" y="6446520"/>
+            <a:ext cx="1371600" cy="274320"/>
+          </a:xfrm>
+          <a:prstGeom prst="rect">
+            <a:avLst/>
+          </a:prstGeom>
+          <a:noFill/>
+          <a:ln/>
+        </p:spPr>
+        <p:txBody>
+          <a:bodyPr wrap="square" lIns="0" tIns="0" rIns="0" bIns="0" rtlCol="0" anchor="ctr"/>
+          <a:lstStyle/>
+          <a:p>
+            <a:pPr algn="r" indent="0" marL="0">
+              <a:buNone/>
+            </a:pPr>
+            <a:r>
+              <a:rPr lang="en-US" sz="1000" b="1" dirty="0">
+                <a:solidFill>
+                  <a:srgbClr val="6B7089"/>
+                </a:solidFill>
+                <a:latin typeface="Calibri" pitchFamily="34" charset="0"/>
+                <a:ea typeface="Calibri" pitchFamily="34" charset="-122"/>
+                <a:cs typeface="Calibri" pitchFamily="34" charset="-120"/>
+              </a:rPr>
+              <a:t>PAGE 16</a:t>
+            </a:r>
+            <a:endParaRPr lang="en-US" sz="1000" dirty="0"/>
+          </a:p>
+        </p:txBody>
+      </p:sp>
+      <p:sp>
+        <p:nvSpPr>
+          <p:cNvPr id="4" name="Shape 2"/>
+          <p:cNvSpPr/>
+          <p:nvPr/>
+        </p:nvSpPr>
+        <p:spPr>
+          <a:xfrm>
+            <a:off x="548640" y="1143000"/>
+            <a:ext cx="11064240" cy="777240"/>
+          </a:xfrm>
+          <a:prstGeom prst="roundRect">
+            <a:avLst>
+              <a:gd name="adj" fmla="val 10588"/>
+            </a:avLst>
+          </a:prstGeom>
+          <a:solidFill>
+            <a:srgbClr val="F4F6FC"/>
+          </a:solidFill>
+          <a:ln/>
+        </p:spPr>
+      </p:sp>
+      <p:sp>
+        <p:nvSpPr>
+          <p:cNvPr id="5" name="Text 3"/>
+          <p:cNvSpPr/>
+          <p:nvPr/>
+        </p:nvSpPr>
+        <p:spPr>
+          <a:xfrm>
+            <a:off x="868680" y="1143000"/>
+            <a:ext cx="10424160" cy="777240"/>
+          </a:xfrm>
+          <a:prstGeom prst="rect">
+            <a:avLst/>
+          </a:prstGeom>
+          <a:noFill/>
+          <a:ln/>
+        </p:spPr>
+        <p:txBody>
+          <a:bodyPr wrap="square" lIns="0" tIns="0" rIns="0" bIns="0" rtlCol="0" anchor="ctr"/>
+          <a:lstStyle/>
+          <a:p>
+            <a:pPr indent="0" marL="0">
+              <a:buNone/>
+            </a:pPr>
+            <a:r>
+              <a:rPr lang="en-US" sz="1600" b="1" dirty="0">
+                <a:solidFill>
+                  <a:srgbClr val="3556B8"/>
+                </a:solidFill>
+                <a:latin typeface="Calibri" pitchFamily="34" charset="0"/>
+                <a:ea typeface="Calibri" pitchFamily="34" charset="-122"/>
+                <a:cs typeface="Calibri" pitchFamily="34" charset="-120"/>
+              </a:rPr>
+              <a:t>A.  </a:t>
+            </a:r>
+            <a:pPr indent="0" marL="0">
+              <a:buNone/>
+            </a:pPr>
+            <a:r>
+              <a:rPr lang="en-US" sz="1500" b="1" dirty="0">
+                <a:solidFill>
+                  <a:srgbClr val="1E2761"/>
+                </a:solidFill>
+                <a:latin typeface="Calibri" pitchFamily="34" charset="0"/>
+                <a:ea typeface="Calibri" pitchFamily="34" charset="-122"/>
+                <a:cs typeface="Calibri" pitchFamily="34" charset="-120"/>
+              </a:rPr>
+              <a:t>고객의 클라우드를 관제·운영하며 세워온 판단 기준이, 이 프로젝트의 AWS 설계 근거가 되었습니다</a:t>
+            </a:r>
+            <a:endParaRPr lang="en-US" sz="1600" dirty="0"/>
+          </a:p>
+        </p:txBody>
+      </p:sp>
+      <p:sp>
+        <p:nvSpPr>
+          <p:cNvPr id="6" name="Shape 4"/>
+          <p:cNvSpPr/>
+          <p:nvPr/>
+        </p:nvSpPr>
+        <p:spPr>
+          <a:xfrm>
+            <a:off x="548640" y="2194560"/>
+            <a:ext cx="5394960" cy="3977640"/>
+          </a:xfrm>
+          <a:prstGeom prst="roundRect">
+            <a:avLst>
+              <a:gd name="adj" fmla="val 2069"/>
+            </a:avLst>
+          </a:prstGeom>
+          <a:solidFill>
+            <a:srgbClr val="F4F6FC"/>
+          </a:solidFill>
+          <a:ln/>
+          <a:effectLst>
+            <a:outerShdw sx="100000" sy="100000" kx="0" ky="0" algn="bl" rotWithShape="0" blurRad="76200" dist="25400" dir="5400000">
+              <a:srgbClr val="9AA3C0">
+                <a:alpha val="30000"/>
+              </a:srgbClr>
+            </a:outerShdw>
+          </a:effectLst>
+        </p:spPr>
+      </p:sp>
+      <p:sp>
+        <p:nvSpPr>
+          <p:cNvPr id="7" name="Text 5"/>
+          <p:cNvSpPr/>
+          <p:nvPr/>
+        </p:nvSpPr>
+        <p:spPr>
+          <a:xfrm>
+            <a:off x="868680" y="2423160"/>
+            <a:ext cx="4754880" cy="411480"/>
+          </a:xfrm>
+          <a:prstGeom prst="rect">
+            <a:avLst/>
+          </a:prstGeom>
+          <a:noFill/>
+          <a:ln/>
+        </p:spPr>
+        <p:txBody>
+          <a:bodyPr wrap="square" lIns="0" tIns="0" rIns="0" bIns="0" rtlCol="0" anchor="ctr"/>
+          <a:lstStyle/>
+          <a:p>
+            <a:pPr indent="0" marL="0">
+              <a:buNone/>
+            </a:pPr>
+            <a:r>
+              <a:rPr lang="en-US" sz="1700" b="1" dirty="0">
+                <a:solidFill>
+                  <a:srgbClr val="1E2761"/>
+                </a:solidFill>
+                <a:latin typeface="Cambria" pitchFamily="34" charset="0"/>
+                <a:ea typeface="Cambria" pitchFamily="34" charset="-122"/>
+                <a:cs typeface="Cambria" pitchFamily="34" charset="-120"/>
+              </a:rPr>
+              <a:t>기존 운영 관점 (Before)</a:t>
+            </a:r>
+            <a:endParaRPr lang="en-US" sz="1700" dirty="0"/>
+          </a:p>
+        </p:txBody>
+      </p:sp>
+      <p:sp>
+        <p:nvSpPr>
+          <p:cNvPr id="8" name="Text 6"/>
+          <p:cNvSpPr/>
+          <p:nvPr/>
+        </p:nvSpPr>
+        <p:spPr>
+          <a:xfrm>
+            <a:off x="868680" y="2852928"/>
+            <a:ext cx="4754880" cy="320040"/>
+          </a:xfrm>
+          <a:prstGeom prst="rect">
+            <a:avLst/>
+          </a:prstGeom>
+          <a:noFill/>
+          <a:ln/>
+        </p:spPr>
+        <p:txBody>
+          <a:bodyPr wrap="square" lIns="0" tIns="0" rIns="0" bIns="0" rtlCol="0" anchor="ctr"/>
+          <a:lstStyle/>
+          <a:p>
+            <a:pPr indent="0" marL="0">
+              <a:buNone/>
+            </a:pPr>
+            <a:r>
+              <a:rPr lang="en-US" sz="1150" b="1" dirty="0">
+                <a:solidFill>
+                  <a:srgbClr val="5B79D6"/>
+                </a:solidFill>
+                <a:latin typeface="Calibri" pitchFamily="34" charset="0"/>
+                <a:ea typeface="Calibri" pitchFamily="34" charset="-122"/>
+                <a:cs typeface="Calibri" pitchFamily="34" charset="-120"/>
+              </a:rPr>
+              <a:t>ZENIUS 관제 · KT/NHN/Naver Cloud 운영</a:t>
+            </a:r>
+            <a:endParaRPr lang="en-US" sz="1150" dirty="0"/>
+          </a:p>
+        </p:txBody>
+      </p:sp>
+      <p:sp>
+        <p:nvSpPr>
+          <p:cNvPr id="9" name="Text 7"/>
+          <p:cNvSpPr/>
+          <p:nvPr/>
+        </p:nvSpPr>
+        <p:spPr>
+          <a:xfrm>
+            <a:off x="868680" y="3337560"/>
+            <a:ext cx="4800600" cy="2651760"/>
+          </a:xfrm>
+          <a:prstGeom prst="rect">
+            <a:avLst/>
+          </a:prstGeom>
+          <a:noFill/>
+          <a:ln/>
+        </p:spPr>
+        <p:txBody>
+          <a:bodyPr wrap="square" lIns="0" tIns="0" rIns="0" bIns="0" rtlCol="0" anchor="t"/>
+          <a:lstStyle/>
+          <a:p>
+            <a:pPr marL="342900" indent="-342900">
+              <a:spcAft>
+                <a:spcPts val="1100"/>
+              </a:spcAft>
+              <a:buSzPct val="100000"/>
+              <a:buChar char="•"/>
+            </a:pPr>
+            <a:r>
+              <a:rPr lang="en-US" sz="1250" dirty="0">
+                <a:solidFill>
+                  <a:srgbClr val="3A3F52"/>
+                </a:solidFill>
+                <a:latin typeface="Calibri" pitchFamily="34" charset="0"/>
+                <a:ea typeface="Calibri" pitchFamily="34" charset="-122"/>
+                <a:cs typeface="Calibri" pitchFamily="34" charset="-120"/>
+              </a:rPr>
+              <a:t>타인이 정의한 임계값과 경보에 대응</a:t>
+            </a:r>
+            <a:endParaRPr lang="en-US" sz="1250" dirty="0"/>
+          </a:p>
+          <a:p>
+            <a:pPr marL="342900" indent="-342900">
+              <a:spcAft>
+                <a:spcPts val="1100"/>
+              </a:spcAft>
+              <a:buSzPct val="100000"/>
+              <a:buChar char="•"/>
+            </a:pPr>
+            <a:r>
+              <a:rPr lang="en-US" sz="1250" dirty="0">
+                <a:solidFill>
+                  <a:srgbClr val="3A3F52"/>
+                </a:solidFill>
+                <a:latin typeface="Calibri" pitchFamily="34" charset="0"/>
+                <a:ea typeface="Calibri" pitchFamily="34" charset="-122"/>
+                <a:cs typeface="Calibri" pitchFamily="34" charset="-120"/>
+              </a:rPr>
+              <a:t>고객 환경의 장애를 분석하고 보고</a:t>
+            </a:r>
+            <a:endParaRPr lang="en-US" sz="1250" dirty="0"/>
+          </a:p>
+          <a:p>
+            <a:pPr marL="342900" indent="-342900">
+              <a:spcAft>
+                <a:spcPts val="1100"/>
+              </a:spcAft>
+              <a:buSzPct val="100000"/>
+              <a:buChar char="•"/>
+            </a:pPr>
+            <a:r>
+              <a:rPr lang="en-US" sz="1250" dirty="0">
+                <a:solidFill>
+                  <a:srgbClr val="3A3F52"/>
+                </a:solidFill>
+                <a:latin typeface="Calibri" pitchFamily="34" charset="0"/>
+                <a:ea typeface="Calibri" pitchFamily="34" charset="-122"/>
+                <a:cs typeface="Calibri" pitchFamily="34" charset="-120"/>
+              </a:rPr>
+              <a:t>정해진 절차로 서버·DB·백업을 점검</a:t>
+            </a:r>
+            <a:endParaRPr lang="en-US" sz="1250" dirty="0"/>
+          </a:p>
+          <a:p>
+            <a:pPr marL="342900" indent="-342900">
+              <a:spcAft>
+                <a:spcPts val="1100"/>
+              </a:spcAft>
+              <a:buSzPct val="100000"/>
+              <a:buChar char="•"/>
+            </a:pPr>
+            <a:r>
+              <a:rPr lang="en-US" sz="1250" dirty="0">
+                <a:solidFill>
+                  <a:srgbClr val="3A3F52"/>
+                </a:solidFill>
+                <a:latin typeface="Calibri" pitchFamily="34" charset="0"/>
+                <a:ea typeface="Calibri" pitchFamily="34" charset="-122"/>
+                <a:cs typeface="Calibri" pitchFamily="34" charset="-120"/>
+              </a:rPr>
+              <a:t>Docker 이미지로 환경 표준화 (제공 시간 40%↓)</a:t>
+            </a:r>
+            <a:endParaRPr lang="en-US" sz="1250" dirty="0"/>
+          </a:p>
+        </p:txBody>
+      </p:sp>
+      <p:sp>
+        <p:nvSpPr>
+          <p:cNvPr id="10" name="Shape 8"/>
+          <p:cNvSpPr/>
+          <p:nvPr/>
+        </p:nvSpPr>
+        <p:spPr>
+          <a:xfrm>
+            <a:off x="6217920" y="2194560"/>
+            <a:ext cx="5394960" cy="3977640"/>
+          </a:xfrm>
+          <a:prstGeom prst="roundRect">
+            <a:avLst>
+              <a:gd name="adj" fmla="val 2069"/>
+            </a:avLst>
+          </a:prstGeom>
+          <a:solidFill>
+            <a:srgbClr val="E8EEFB"/>
+          </a:solidFill>
+          <a:ln/>
+          <a:effectLst>
+            <a:outerShdw sx="100000" sy="100000" kx="0" ky="0" algn="bl" rotWithShape="0" blurRad="76200" dist="25400" dir="5400000">
+              <a:srgbClr val="9AA3C0">
+                <a:alpha val="30000"/>
+              </a:srgbClr>
+            </a:outerShdw>
+          </a:effectLst>
+        </p:spPr>
+      </p:sp>
+      <p:sp>
+        <p:nvSpPr>
+          <p:cNvPr id="11" name="Text 9"/>
+          <p:cNvSpPr/>
+          <p:nvPr/>
+        </p:nvSpPr>
+        <p:spPr>
+          <a:xfrm>
+            <a:off x="6537960" y="2423160"/>
+            <a:ext cx="4754880" cy="411480"/>
+          </a:xfrm>
+          <a:prstGeom prst="rect">
+            <a:avLst/>
+          </a:prstGeom>
+          <a:noFill/>
+          <a:ln/>
+        </p:spPr>
+        <p:txBody>
+          <a:bodyPr wrap="square" lIns="0" tIns="0" rIns="0" bIns="0" rtlCol="0" anchor="ctr"/>
+          <a:lstStyle/>
+          <a:p>
+            <a:pPr indent="0" marL="0">
+              <a:buNone/>
+            </a:pPr>
+            <a:r>
+              <a:rPr lang="en-US" sz="1700" b="1" dirty="0">
+                <a:solidFill>
+                  <a:srgbClr val="1E2761"/>
+                </a:solidFill>
+                <a:latin typeface="Cambria" pitchFamily="34" charset="0"/>
+                <a:ea typeface="Cambria" pitchFamily="34" charset="-122"/>
+                <a:cs typeface="Cambria" pitchFamily="34" charset="-120"/>
+              </a:rPr>
+              <a:t>새로운 관점 (After)</a:t>
+            </a:r>
+            <a:endParaRPr lang="en-US" sz="1700" dirty="0"/>
+          </a:p>
+        </p:txBody>
+      </p:sp>
+      <p:sp>
+        <p:nvSpPr>
+          <p:cNvPr id="12" name="Text 10"/>
+          <p:cNvSpPr/>
+          <p:nvPr/>
+        </p:nvSpPr>
+        <p:spPr>
+          <a:xfrm>
+            <a:off x="6537960" y="2852928"/>
+            <a:ext cx="4754880" cy="320040"/>
+          </a:xfrm>
+          <a:prstGeom prst="rect">
+            <a:avLst/>
+          </a:prstGeom>
+          <a:noFill/>
+          <a:ln/>
+        </p:spPr>
+        <p:txBody>
+          <a:bodyPr wrap="square" lIns="0" tIns="0" rIns="0" bIns="0" rtlCol="0" anchor="ctr"/>
+          <a:lstStyle/>
+          <a:p>
+            <a:pPr indent="0" marL="0">
+              <a:buNone/>
+            </a:pPr>
+            <a:r>
+              <a:rPr lang="en-US" sz="1150" b="1" dirty="0">
+                <a:solidFill>
+                  <a:srgbClr val="5B79D6"/>
+                </a:solidFill>
+                <a:latin typeface="Calibri" pitchFamily="34" charset="0"/>
+                <a:ea typeface="Calibri" pitchFamily="34" charset="-122"/>
+                <a:cs typeface="Calibri" pitchFamily="34" charset="-120"/>
+              </a:rPr>
+              <a:t>이 프로젝트 — 직접 설계·검증</a:t>
+            </a:r>
+            <a:endParaRPr lang="en-US" sz="1150" dirty="0"/>
+          </a:p>
+        </p:txBody>
+      </p:sp>
+      <p:sp>
+        <p:nvSpPr>
+          <p:cNvPr id="13" name="Text 11"/>
+          <p:cNvSpPr/>
+          <p:nvPr/>
+        </p:nvSpPr>
+        <p:spPr>
+          <a:xfrm>
+            <a:off x="6537960" y="3337560"/>
+            <a:ext cx="4800600" cy="2651760"/>
+          </a:xfrm>
+          <a:prstGeom prst="rect">
+            <a:avLst/>
+          </a:prstGeom>
+          <a:noFill/>
+          <a:ln/>
+        </p:spPr>
+        <p:txBody>
+          <a:bodyPr wrap="square" lIns="0" tIns="0" rIns="0" bIns="0" rtlCol="0" anchor="t"/>
+          <a:lstStyle/>
+          <a:p>
+            <a:pPr marL="342900" indent="-342900">
+              <a:spcAft>
+                <a:spcPts val="1100"/>
+              </a:spcAft>
+              <a:buSzPct val="100000"/>
+              <a:buChar char="•"/>
+            </a:pPr>
+            <a:r>
+              <a:rPr lang="en-US" sz="1250" dirty="0">
+                <a:solidFill>
+                  <a:srgbClr val="3A3F52"/>
+                </a:solidFill>
+                <a:latin typeface="Calibri" pitchFamily="34" charset="0"/>
+                <a:ea typeface="Calibri" pitchFamily="34" charset="-122"/>
+                <a:cs typeface="Calibri" pitchFamily="34" charset="-120"/>
+              </a:rPr>
+              <a:t>알람 임계값을 직접 판단 (HPA 50% · 재시작 감지)</a:t>
+            </a:r>
+            <a:endParaRPr lang="en-US" sz="1250" dirty="0"/>
+          </a:p>
+          <a:p>
+            <a:pPr marL="342900" indent="-342900">
+              <a:spcAft>
+                <a:spcPts val="1100"/>
+              </a:spcAft>
+              <a:buSzPct val="100000"/>
+              <a:buChar char="•"/>
+            </a:pPr>
+            <a:r>
+              <a:rPr lang="en-US" sz="1250" dirty="0">
+                <a:solidFill>
+                  <a:srgbClr val="3A3F52"/>
+                </a:solidFill>
+                <a:latin typeface="Calibri" pitchFamily="34" charset="0"/>
+                <a:ea typeface="Calibri" pitchFamily="34" charset="-122"/>
+                <a:cs typeface="Calibri" pitchFamily="34" charset="-120"/>
+              </a:rPr>
+              <a:t>장애를 직접 주입해 경보 경로를 검증</a:t>
+            </a:r>
+            <a:endParaRPr lang="en-US" sz="1250" dirty="0"/>
+          </a:p>
+          <a:p>
+            <a:pPr marL="342900" indent="-342900">
+              <a:spcAft>
+                <a:spcPts val="1100"/>
+              </a:spcAft>
+              <a:buSzPct val="100000"/>
+              <a:buChar char="•"/>
+            </a:pPr>
+            <a:r>
+              <a:rPr lang="en-US" sz="1250" dirty="0">
+                <a:solidFill>
+                  <a:srgbClr val="3A3F52"/>
+                </a:solidFill>
+                <a:latin typeface="Calibri" pitchFamily="34" charset="0"/>
+                <a:ea typeface="Calibri" pitchFamily="34" charset="-122"/>
+                <a:cs typeface="Calibri" pitchFamily="34" charset="-120"/>
+              </a:rPr>
+              <a:t>재기동 9단계·종료 4단계 절차를 직접 작성</a:t>
+            </a:r>
+            <a:endParaRPr lang="en-US" sz="1250" dirty="0"/>
+          </a:p>
+          <a:p>
+            <a:pPr marL="342900" indent="-342900">
+              <a:spcAft>
+                <a:spcPts val="1100"/>
+              </a:spcAft>
+              <a:buSzPct val="100000"/>
+              <a:buChar char="•"/>
+            </a:pPr>
+            <a:r>
+              <a:rPr lang="en-US" sz="1250" dirty="0">
+                <a:solidFill>
+                  <a:srgbClr val="3A3F52"/>
+                </a:solidFill>
+                <a:latin typeface="Calibri" pitchFamily="34" charset="0"/>
+                <a:ea typeface="Calibri" pitchFamily="34" charset="-122"/>
+                <a:cs typeface="Calibri" pitchFamily="34" charset="-120"/>
+              </a:rPr>
+              <a:t>표준화를 파이프라인 자동화로 확장 (CI→ECR→ArgoCD)</a:t>
+            </a:r>
+            <a:endParaRPr lang="en-US" sz="1250" dirty="0"/>
           </a:p>
         </p:txBody>
       </p:sp>

--- a/docs/presentation.pptx
+++ b/docs/presentation.pptx
@@ -4753,7 +4753,7 @@
                 <a:ea typeface="Calibri" pitchFamily="34" charset="-122"/>
                 <a:cs typeface="Calibri" pitchFamily="34" charset="-120"/>
               </a:rPr>
-              <a:t>총 7건을 문제→진단→해결→배운점 형식으로 문서화 — 발표에서는 대표 3건 (GitHub repo 참조)</a:t>
+              <a:t>총 7건을 S/A/B 등급으로 분류해 문서화 — 발표는 등급 상위 3건(S·S·A), 나머지 4건은 GitHub repo 참조</a:t>
             </a:r>
             <a:endParaRPr lang="en-US" sz="1200" dirty="0"/>
           </a:p>
@@ -5307,7 +5307,7 @@
 
 <file path=ppt/slides/slide14.xml><?xml version="1.0" encoding="utf-8"?>
 <p:sld xmlns:a="http://schemas.openxmlformats.org/drawingml/2006/main" xmlns:r="http://schemas.openxmlformats.org/officeDocument/2006/relationships" xmlns:p="http://schemas.openxmlformats.org/presentationml/2006/main">
-  <p:cSld name="Slide 14">
+  <p:cSld name="Slide 1">
     <p:bg>
       <p:bgPr>
         <a:solidFill>
@@ -5350,7 +5350,7 @@
           <a:bodyPr wrap="square" lIns="0" tIns="0" rIns="0" bIns="0" rtlCol="0" anchor="ctr"/>
           <a:lstStyle/>
           <a:p>
-            <a:pPr algn="l" indent="0" marL="0">
+            <a:pPr indent="0" marL="0">
               <a:buNone/>
             </a:pPr>
             <a:r>
@@ -5362,7 +5362,7 @@
                 <a:ea typeface="Cambria" pitchFamily="34" charset="-122"/>
                 <a:cs typeface="Cambria" pitchFamily="34" charset="-120"/>
               </a:rPr>
-              <a:t>07. 트러블슈팅 (3/3) — 재발 사고와 절차 개선</a:t>
+              <a:t>07. 트러블슈팅 (3/3) — 파드 전면 기동 불가</a:t>
             </a:r>
             <a:endParaRPr lang="en-US" sz="2800" dirty="0"/>
           </a:p>
@@ -5462,7 +5462,7 @@
                 <a:ea typeface="Calibri" pitchFamily="34" charset="-122"/>
                 <a:cs typeface="Calibri" pitchFamily="34" charset="-120"/>
               </a:rPr>
-              <a:t>[1차]</a:t>
+              <a:t>[문제]</a:t>
             </a:r>
             <a:endParaRPr lang="en-US" sz="1300" dirty="0"/>
           </a:p>
@@ -5501,7 +5501,7 @@
                 <a:ea typeface="Calibri" pitchFamily="34" charset="-122"/>
                 <a:cs typeface="Calibri" pitchFamily="34" charset="-120"/>
               </a:rPr>
-              <a:t>1차: 토큰 복사 시 개행 혼입 → 인증 실패 → 클립보드에서 직접 읽는 방식(pbpaste) 도입</a:t>
+              <a:t>첫 배포에서 파드 전원이 CreateContainerConfigError — 이미지 풀·Secret은 정상인데 컨테이너 생성이 거부됨</a:t>
             </a:r>
             <a:endParaRPr lang="en-US" sz="1350" dirty="0"/>
           </a:p>
@@ -5562,7 +5562,7 @@
                 <a:ea typeface="Calibri" pitchFamily="34" charset="-122"/>
                 <a:cs typeface="Calibri" pitchFamily="34" charset="-120"/>
               </a:rPr>
-              <a:t>[2차]</a:t>
+              <a:t>[진단]</a:t>
             </a:r>
             <a:endParaRPr lang="en-US" sz="1300" dirty="0"/>
           </a:p>
@@ -5601,7 +5601,7 @@
                 <a:ea typeface="Calibri" pitchFamily="34" charset="-122"/>
                 <a:cs typeface="Calibri" pitchFamily="34" charset="-120"/>
               </a:rPr>
-              <a:t>2차: 명령어를 복사하는 순간 클립보드의 토큰이 덮임 → 명령어 텍스트가 비밀번호로 등록됨</a:t>
+              <a:t>kubectl describe pod의 Events에 원인 명시 — “runAsNonRoot and image has non-numeric user (appuser), cannot verify”</a:t>
             </a:r>
             <a:endParaRPr lang="en-US" sz="1350" dirty="0"/>
           </a:p>
@@ -5701,7 +5701,7 @@
                 <a:ea typeface="Calibri" pitchFamily="34" charset="-122"/>
                 <a:cs typeface="Calibri" pitchFamily="34" charset="-120"/>
               </a:rPr>
-              <a:t>“클립보드에서 읽는다”는 설계 자체가 실행 순서에 의존 — 사람이 지키기 어려운 암묵적 전제</a:t>
+              <a:t>이미지의 USER가 이름(appuser)뿐이라 kubelet이 시작 전에 UID를 판정 불가 — 이미지·매니페스트가 각자 올바른데 조합이 검증 불가능</a:t>
             </a:r>
             <a:endParaRPr lang="en-US" sz="1350" dirty="0"/>
           </a:p>
@@ -5776,7 +5776,7 @@
                 <a:ea typeface="Calibri" pitchFamily="34" charset="-122"/>
                 <a:cs typeface="Calibri" pitchFamily="34" charset="-120"/>
               </a:rPr>
-              <a:t>클립보드를 데이터 경로에서 제거 — 화면 비표시 프롬프트로 절차 자체를 교체. 비밀값은 노출 없이 길이·접두사만으로 진단</a:t>
+              <a:t>securityContext에 runAsUser: 1000 명시 — 재빌드 없이 즉시 해결. 근본 대책(Dockerfile 숫자 UID)은 백로그로</a:t>
             </a:r>
             <a:endParaRPr lang="en-US" sz="1400" dirty="0"/>
           </a:p>
@@ -5829,7 +5829,7 @@
                 <a:ea typeface="Cambria" pitchFamily="34" charset="-122"/>
                 <a:cs typeface="Cambria" pitchFamily="34" charset="-120"/>
               </a:rPr>
-              <a:t>재발은 사람의 부주의가 아니라 프로세스의 결함 신호</a:t>
+              <a:t>보안 설정은 “각자 올바름”이 아니라 “조합이 검증 가능함”까지 확인해야 한다</a:t>
             </a:r>
             <a:endParaRPr lang="en-US" sz="1600" dirty="0"/>
           </a:p>

--- a/docs/presentation.pptx
+++ b/docs/presentation.pptx
@@ -13521,7 +13521,7 @@
 
 <file path=ppt/slides/slide5.xml><?xml version="1.0" encoding="utf-8"?>
 <p:sld xmlns:a="http://schemas.openxmlformats.org/drawingml/2006/main" xmlns:r="http://schemas.openxmlformats.org/officeDocument/2006/relationships" xmlns:p="http://schemas.openxmlformats.org/presentationml/2006/main">
-  <p:cSld name="Slide 5">
+  <p:cSld name="Slide 1">
     <p:bg>
       <p:bgPr>
         <a:solidFill>
@@ -13564,7 +13564,7 @@
           <a:bodyPr wrap="square" lIns="0" tIns="0" rIns="0" bIns="0" rtlCol="0" anchor="ctr"/>
           <a:lstStyle/>
           <a:p>
-            <a:pPr algn="l" indent="0" marL="0">
+            <a:pPr indent="0" marL="0">
               <a:buNone/>
             </a:pPr>
             <a:r>
@@ -13629,7 +13629,7 @@
         </p:nvSpPr>
         <p:spPr>
           <a:xfrm>
-            <a:off x="548640" y="1234440"/>
+            <a:off x="548640" y="1188720"/>
             <a:ext cx="1627632" cy="566928"/>
           </a:xfrm>
           <a:prstGeom prst="roundRect">
@@ -13656,7 +13656,7 @@
         </p:nvSpPr>
         <p:spPr>
           <a:xfrm>
-            <a:off x="594360" y="1234440"/>
+            <a:off x="594360" y="1188720"/>
             <a:ext cx="1536192" cy="566928"/>
           </a:xfrm>
           <a:prstGeom prst="rect">
@@ -13695,7 +13695,7 @@
         </p:nvSpPr>
         <p:spPr>
           <a:xfrm>
-            <a:off x="2203704" y="1417320"/>
+            <a:off x="2203704" y="1371600"/>
             <a:ext cx="201168" cy="201168"/>
           </a:xfrm>
           <a:prstGeom prst="rightArrow">
@@ -13715,7 +13715,7 @@
         </p:nvSpPr>
         <p:spPr>
           <a:xfrm>
-            <a:off x="2432304" y="1234440"/>
+            <a:off x="2432304" y="1188720"/>
             <a:ext cx="1627632" cy="566928"/>
           </a:xfrm>
           <a:prstGeom prst="roundRect">
@@ -13742,7 +13742,7 @@
         </p:nvSpPr>
         <p:spPr>
           <a:xfrm>
-            <a:off x="2478024" y="1234440"/>
+            <a:off x="2478024" y="1188720"/>
             <a:ext cx="1536192" cy="566928"/>
           </a:xfrm>
           <a:prstGeom prst="rect">
@@ -13798,7 +13798,7 @@
         </p:nvSpPr>
         <p:spPr>
           <a:xfrm>
-            <a:off x="4087368" y="1417320"/>
+            <a:off x="4087368" y="1371600"/>
             <a:ext cx="201168" cy="201168"/>
           </a:xfrm>
           <a:prstGeom prst="rightArrow">
@@ -13818,7 +13818,7 @@
         </p:nvSpPr>
         <p:spPr>
           <a:xfrm>
-            <a:off x="4315968" y="1234440"/>
+            <a:off x="4315968" y="1188720"/>
             <a:ext cx="1627632" cy="566928"/>
           </a:xfrm>
           <a:prstGeom prst="roundRect">
@@ -13845,7 +13845,7 @@
         </p:nvSpPr>
         <p:spPr>
           <a:xfrm>
-            <a:off x="4361688" y="1234440"/>
+            <a:off x="4361688" y="1188720"/>
             <a:ext cx="1536192" cy="566928"/>
           </a:xfrm>
           <a:prstGeom prst="rect">
@@ -13884,7 +13884,7 @@
         </p:nvSpPr>
         <p:spPr>
           <a:xfrm>
-            <a:off x="5971032" y="1417320"/>
+            <a:off x="5971032" y="1371600"/>
             <a:ext cx="201168" cy="201168"/>
           </a:xfrm>
           <a:prstGeom prst="rightArrow">
@@ -13904,7 +13904,7 @@
         </p:nvSpPr>
         <p:spPr>
           <a:xfrm>
-            <a:off x="6199632" y="1234440"/>
+            <a:off x="6199632" y="1188720"/>
             <a:ext cx="1627632" cy="566928"/>
           </a:xfrm>
           <a:prstGeom prst="roundRect">
@@ -13931,7 +13931,7 @@
         </p:nvSpPr>
         <p:spPr>
           <a:xfrm>
-            <a:off x="6245352" y="1234440"/>
+            <a:off x="6245352" y="1188720"/>
             <a:ext cx="1536192" cy="566928"/>
           </a:xfrm>
           <a:prstGeom prst="rect">
@@ -13987,7 +13987,7 @@
         </p:nvSpPr>
         <p:spPr>
           <a:xfrm>
-            <a:off x="7854696" y="1417320"/>
+            <a:off x="7854696" y="1371600"/>
             <a:ext cx="201168" cy="201168"/>
           </a:xfrm>
           <a:prstGeom prst="rightArrow">
@@ -14007,7 +14007,7 @@
         </p:nvSpPr>
         <p:spPr>
           <a:xfrm>
-            <a:off x="8083296" y="1234440"/>
+            <a:off x="8083296" y="1188720"/>
             <a:ext cx="1627632" cy="566928"/>
           </a:xfrm>
           <a:prstGeom prst="roundRect">
@@ -14034,7 +14034,7 @@
         </p:nvSpPr>
         <p:spPr>
           <a:xfrm>
-            <a:off x="8129016" y="1234440"/>
+            <a:off x="8129016" y="1188720"/>
             <a:ext cx="1536192" cy="566928"/>
           </a:xfrm>
           <a:prstGeom prst="rect">
@@ -14090,7 +14090,7 @@
         </p:nvSpPr>
         <p:spPr>
           <a:xfrm>
-            <a:off x="9738360" y="1417320"/>
+            <a:off x="9738360" y="1371600"/>
             <a:ext cx="201168" cy="201168"/>
           </a:xfrm>
           <a:prstGeom prst="rightArrow">
@@ -14110,7 +14110,7 @@
         </p:nvSpPr>
         <p:spPr>
           <a:xfrm>
-            <a:off x="9966960" y="1234440"/>
+            <a:off x="9966960" y="1188720"/>
             <a:ext cx="1627632" cy="566928"/>
           </a:xfrm>
           <a:prstGeom prst="roundRect">
@@ -14137,7 +14137,7 @@
         </p:nvSpPr>
         <p:spPr>
           <a:xfrm>
-            <a:off x="10012680" y="1234440"/>
+            <a:off x="10012680" y="1188720"/>
             <a:ext cx="1536192" cy="566928"/>
           </a:xfrm>
           <a:prstGeom prst="rect">
@@ -14185,397 +14185,40 @@
           </a:p>
         </p:txBody>
       </p:sp>
-      <p:sp>
-        <p:nvSpPr>
-          <p:cNvPr id="21" name="Shape 19"/>
-          <p:cNvSpPr/>
-          <p:nvPr/>
-        </p:nvSpPr>
-        <p:spPr>
-          <a:xfrm>
-            <a:off x="548640" y="2148840"/>
-            <a:ext cx="7498080" cy="3291840"/>
-          </a:xfrm>
-          <a:prstGeom prst="roundRect">
-            <a:avLst>
-              <a:gd name="adj" fmla="val 2222"/>
-            </a:avLst>
-          </a:prstGeom>
-          <a:solidFill>
-            <a:srgbClr val="F4F6FC"/>
-          </a:solidFill>
-          <a:ln w="19050">
-            <a:solidFill>
-              <a:srgbClr val="1E2761"/>
-            </a:solidFill>
-            <a:prstDash val="solid"/>
-          </a:ln>
-        </p:spPr>
-      </p:sp>
-      <p:sp>
-        <p:nvSpPr>
-          <p:cNvPr id="22" name="Text 20"/>
-          <p:cNvSpPr/>
-          <p:nvPr/>
-        </p:nvSpPr>
-        <p:spPr>
-          <a:xfrm>
-            <a:off x="777240" y="2286000"/>
-            <a:ext cx="7040880" cy="320040"/>
-          </a:xfrm>
-          <a:prstGeom prst="rect">
-            <a:avLst/>
-          </a:prstGeom>
-          <a:noFill/>
-          <a:ln/>
-        </p:spPr>
-        <p:txBody>
-          <a:bodyPr wrap="square" lIns="0" tIns="0" rIns="0" bIns="0" rtlCol="0" anchor="ctr"/>
-          <a:lstStyle/>
-          <a:p>
-            <a:pPr indent="0" marL="0">
-              <a:buNone/>
-            </a:pPr>
-            <a:r>
-              <a:rPr lang="en-US" sz="1300" b="1" dirty="0">
-                <a:solidFill>
-                  <a:srgbClr val="1E2761"/>
-                </a:solidFill>
-                <a:latin typeface="Calibri" pitchFamily="34" charset="0"/>
-                <a:ea typeface="Calibri" pitchFamily="34" charset="-122"/>
-                <a:cs typeface="Calibri" pitchFamily="34" charset="-120"/>
-              </a:rPr>
-              <a:t>VPC 10.0.0.0/16  (2개 가용영역)</a:t>
-            </a:r>
-            <a:endParaRPr lang="en-US" sz="1300" dirty="0"/>
-          </a:p>
-        </p:txBody>
-      </p:sp>
-      <p:sp>
-        <p:nvSpPr>
-          <p:cNvPr id="23" name="Shape 21"/>
-          <p:cNvSpPr/>
-          <p:nvPr/>
-        </p:nvSpPr>
-        <p:spPr>
-          <a:xfrm>
-            <a:off x="777240" y="2697480"/>
-            <a:ext cx="7040880" cy="731520"/>
-          </a:xfrm>
-          <a:prstGeom prst="roundRect">
-            <a:avLst>
-              <a:gd name="adj" fmla="val 7500"/>
-            </a:avLst>
-          </a:prstGeom>
-          <a:solidFill>
-            <a:srgbClr val="FFFFFF"/>
-          </a:solidFill>
-          <a:ln w="12700">
-            <a:solidFill>
-              <a:srgbClr val="B9C6EA"/>
-            </a:solidFill>
-            <a:prstDash val="solid"/>
-          </a:ln>
-        </p:spPr>
-      </p:sp>
-      <p:sp>
-        <p:nvSpPr>
-          <p:cNvPr id="24" name="Text 22"/>
-          <p:cNvSpPr/>
-          <p:nvPr/>
-        </p:nvSpPr>
-        <p:spPr>
-          <a:xfrm>
-            <a:off x="960120" y="2770632"/>
-            <a:ext cx="1920240" cy="274320"/>
-          </a:xfrm>
-          <a:prstGeom prst="rect">
-            <a:avLst/>
-          </a:prstGeom>
-          <a:noFill/>
-          <a:ln/>
-        </p:spPr>
-        <p:txBody>
-          <a:bodyPr wrap="square" lIns="0" tIns="0" rIns="0" bIns="0" rtlCol="0" anchor="ctr"/>
-          <a:lstStyle/>
-          <a:p>
-            <a:pPr indent="0" marL="0">
-              <a:buNone/>
-            </a:pPr>
-            <a:r>
-              <a:rPr lang="en-US" sz="1250" b="1" dirty="0">
-                <a:solidFill>
-                  <a:srgbClr val="1E2761"/>
-                </a:solidFill>
-                <a:latin typeface="Calibri" pitchFamily="34" charset="0"/>
-                <a:ea typeface="Calibri" pitchFamily="34" charset="-122"/>
-                <a:cs typeface="Calibri" pitchFamily="34" charset="-120"/>
-              </a:rPr>
-              <a:t>Public 서브넷</a:t>
-            </a:r>
-            <a:endParaRPr lang="en-US" sz="1250" dirty="0"/>
-          </a:p>
-        </p:txBody>
-      </p:sp>
-      <p:sp>
-        <p:nvSpPr>
-          <p:cNvPr id="25" name="Text 23"/>
-          <p:cNvSpPr/>
-          <p:nvPr/>
-        </p:nvSpPr>
-        <p:spPr>
-          <a:xfrm>
-            <a:off x="960120" y="3063240"/>
-            <a:ext cx="6675120" cy="292608"/>
-          </a:xfrm>
-          <a:prstGeom prst="rect">
-            <a:avLst/>
-          </a:prstGeom>
-          <a:noFill/>
-          <a:ln/>
-        </p:spPr>
-        <p:txBody>
-          <a:bodyPr wrap="square" lIns="0" tIns="0" rIns="0" bIns="0" rtlCol="0" anchor="ctr"/>
-          <a:lstStyle/>
-          <a:p>
-            <a:pPr indent="0" marL="0">
-              <a:buNone/>
-            </a:pPr>
-            <a:r>
-              <a:rPr lang="en-US" sz="1100" dirty="0">
-                <a:solidFill>
-                  <a:srgbClr val="3A3F52"/>
-                </a:solidFill>
-                <a:latin typeface="Calibri" pitchFamily="34" charset="0"/>
-                <a:ea typeface="Calibri" pitchFamily="34" charset="-122"/>
-                <a:cs typeface="Calibri" pitchFamily="34" charset="-120"/>
-              </a:rPr>
-              <a:t>ALB (internet-facing) · NAT Gateway ×1</a:t>
-            </a:r>
-            <a:endParaRPr lang="en-US" sz="1100" dirty="0"/>
-          </a:p>
-        </p:txBody>
-      </p:sp>
-      <p:sp>
-        <p:nvSpPr>
-          <p:cNvPr id="26" name="Shape 24"/>
-          <p:cNvSpPr/>
-          <p:nvPr/>
-        </p:nvSpPr>
-        <p:spPr>
-          <a:xfrm>
-            <a:off x="777240" y="3566160"/>
-            <a:ext cx="7040880" cy="731520"/>
-          </a:xfrm>
-          <a:prstGeom prst="roundRect">
-            <a:avLst>
-              <a:gd name="adj" fmla="val 7500"/>
-            </a:avLst>
-          </a:prstGeom>
-          <a:solidFill>
-            <a:srgbClr val="FFFFFF"/>
-          </a:solidFill>
-          <a:ln w="12700">
-            <a:solidFill>
-              <a:srgbClr val="B9C6EA"/>
-            </a:solidFill>
-            <a:prstDash val="solid"/>
-          </a:ln>
-        </p:spPr>
-      </p:sp>
-      <p:sp>
-        <p:nvSpPr>
-          <p:cNvPr id="27" name="Text 25"/>
-          <p:cNvSpPr/>
-          <p:nvPr/>
-        </p:nvSpPr>
-        <p:spPr>
-          <a:xfrm>
-            <a:off x="960120" y="3639312"/>
-            <a:ext cx="1920240" cy="274320"/>
-          </a:xfrm>
-          <a:prstGeom prst="rect">
-            <a:avLst/>
-          </a:prstGeom>
-          <a:noFill/>
-          <a:ln/>
-        </p:spPr>
-        <p:txBody>
-          <a:bodyPr wrap="square" lIns="0" tIns="0" rIns="0" bIns="0" rtlCol="0" anchor="ctr"/>
-          <a:lstStyle/>
-          <a:p>
-            <a:pPr indent="0" marL="0">
-              <a:buNone/>
-            </a:pPr>
-            <a:r>
-              <a:rPr lang="en-US" sz="1250" b="1" dirty="0">
-                <a:solidFill>
-                  <a:srgbClr val="1E2761"/>
-                </a:solidFill>
-                <a:latin typeface="Calibri" pitchFamily="34" charset="0"/>
-                <a:ea typeface="Calibri" pitchFamily="34" charset="-122"/>
-                <a:cs typeface="Calibri" pitchFamily="34" charset="-120"/>
-              </a:rPr>
-              <a:t>Private 서브넷</a:t>
-            </a:r>
-            <a:endParaRPr lang="en-US" sz="1250" dirty="0"/>
-          </a:p>
-        </p:txBody>
-      </p:sp>
-      <p:sp>
-        <p:nvSpPr>
-          <p:cNvPr id="28" name="Text 26"/>
-          <p:cNvSpPr/>
-          <p:nvPr/>
-        </p:nvSpPr>
-        <p:spPr>
-          <a:xfrm>
-            <a:off x="960120" y="3931920"/>
-            <a:ext cx="6675120" cy="292608"/>
-          </a:xfrm>
-          <a:prstGeom prst="rect">
-            <a:avLst/>
-          </a:prstGeom>
-          <a:noFill/>
-          <a:ln/>
-        </p:spPr>
-        <p:txBody>
-          <a:bodyPr wrap="square" lIns="0" tIns="0" rIns="0" bIns="0" rtlCol="0" anchor="ctr"/>
-          <a:lstStyle/>
-          <a:p>
-            <a:pPr indent="0" marL="0">
-              <a:buNone/>
-            </a:pPr>
-            <a:r>
-              <a:rPr lang="en-US" sz="1100" dirty="0">
-                <a:solidFill>
-                  <a:srgbClr val="3A3F52"/>
-                </a:solidFill>
-                <a:latin typeface="Calibri" pitchFamily="34" charset="0"/>
-                <a:ea typeface="Calibri" pitchFamily="34" charset="-122"/>
-                <a:cs typeface="Calibri" pitchFamily="34" charset="-120"/>
-              </a:rPr>
-              <a:t>EKS 1.31 노드 (Spot ×2) — 앱 파드 2~6 (HPA) · ArgoCD · Prometheus/Grafana</a:t>
-            </a:r>
-            <a:endParaRPr lang="en-US" sz="1100" dirty="0"/>
-          </a:p>
-        </p:txBody>
-      </p:sp>
-      <p:sp>
-        <p:nvSpPr>
-          <p:cNvPr id="29" name="Shape 27"/>
-          <p:cNvSpPr/>
-          <p:nvPr/>
-        </p:nvSpPr>
-        <p:spPr>
-          <a:xfrm>
-            <a:off x="777240" y="4434840"/>
-            <a:ext cx="7040880" cy="731520"/>
-          </a:xfrm>
-          <a:prstGeom prst="roundRect">
-            <a:avLst>
-              <a:gd name="adj" fmla="val 7500"/>
-            </a:avLst>
-          </a:prstGeom>
-          <a:solidFill>
-            <a:srgbClr val="FFFFFF"/>
-          </a:solidFill>
-          <a:ln w="12700">
-            <a:solidFill>
-              <a:srgbClr val="B9C6EA"/>
-            </a:solidFill>
-            <a:prstDash val="solid"/>
-          </a:ln>
-        </p:spPr>
-      </p:sp>
-      <p:sp>
-        <p:nvSpPr>
-          <p:cNvPr id="30" name="Text 28"/>
-          <p:cNvSpPr/>
-          <p:nvPr/>
-        </p:nvSpPr>
-        <p:spPr>
-          <a:xfrm>
-            <a:off x="960120" y="4507992"/>
-            <a:ext cx="1920240" cy="274320"/>
-          </a:xfrm>
-          <a:prstGeom prst="rect">
-            <a:avLst/>
-          </a:prstGeom>
-          <a:noFill/>
-          <a:ln/>
-        </p:spPr>
-        <p:txBody>
-          <a:bodyPr wrap="square" lIns="0" tIns="0" rIns="0" bIns="0" rtlCol="0" anchor="ctr"/>
-          <a:lstStyle/>
-          <a:p>
-            <a:pPr indent="0" marL="0">
-              <a:buNone/>
-            </a:pPr>
-            <a:r>
-              <a:rPr lang="en-US" sz="1250" b="1" dirty="0">
-                <a:solidFill>
-                  <a:srgbClr val="1E2761"/>
-                </a:solidFill>
-                <a:latin typeface="Calibri" pitchFamily="34" charset="0"/>
-                <a:ea typeface="Calibri" pitchFamily="34" charset="-122"/>
-                <a:cs typeface="Calibri" pitchFamily="34" charset="-120"/>
-              </a:rPr>
-              <a:t>DB 서브넷</a:t>
-            </a:r>
-            <a:endParaRPr lang="en-US" sz="1250" dirty="0"/>
-          </a:p>
-        </p:txBody>
-      </p:sp>
-      <p:sp>
-        <p:nvSpPr>
-          <p:cNvPr id="31" name="Text 29"/>
-          <p:cNvSpPr/>
-          <p:nvPr/>
-        </p:nvSpPr>
-        <p:spPr>
-          <a:xfrm>
-            <a:off x="960120" y="4800600"/>
-            <a:ext cx="6675120" cy="292608"/>
-          </a:xfrm>
-          <a:prstGeom prst="rect">
-            <a:avLst/>
-          </a:prstGeom>
-          <a:noFill/>
-          <a:ln/>
-        </p:spPr>
-        <p:txBody>
-          <a:bodyPr wrap="square" lIns="0" tIns="0" rIns="0" bIns="0" rtlCol="0" anchor="ctr"/>
-          <a:lstStyle/>
-          <a:p>
-            <a:pPr indent="0" marL="0">
-              <a:buNone/>
-            </a:pPr>
-            <a:r>
-              <a:rPr lang="en-US" sz="1100" dirty="0">
-                <a:solidFill>
-                  <a:srgbClr val="3A3F52"/>
-                </a:solidFill>
-                <a:latin typeface="Calibri" pitchFamily="34" charset="0"/>
-                <a:ea typeface="Calibri" pitchFamily="34" charset="-122"/>
-                <a:cs typeface="Calibri" pitchFamily="34" charset="-120"/>
-              </a:rPr>
-              <a:t>RDS PostgreSQL 17 (db.t3.micro)</a:t>
-            </a:r>
-            <a:endParaRPr lang="en-US" sz="1100" dirty="0"/>
-          </a:p>
-        </p:txBody>
-      </p:sp>
-      <p:sp>
-        <p:nvSpPr>
-          <p:cNvPr id="32" name="Text 30"/>
-          <p:cNvSpPr/>
-          <p:nvPr/>
-        </p:nvSpPr>
-        <p:spPr>
-          <a:xfrm>
-            <a:off x="548640" y="5577840"/>
-            <a:ext cx="7498080" cy="365760"/>
+      <p:pic>
+        <p:nvPicPr>
+          <p:cNvPr id="21" name="Image 0" descr="/Users/kohyeokbae/고혁배/claude/eks-gitops-portfolio/docs/images/architecture.png">    </p:cNvPr>
+          <p:cNvPicPr>
+            <a:picLocks noChangeAspect="1"/>
+          </p:cNvPicPr>
+          <p:nvPr/>
+        </p:nvPicPr>
+        <p:blipFill>
+          <a:blip r:embed="rId1"/>
+          <a:stretch>
+            <a:fillRect/>
+          </a:stretch>
+        </p:blipFill>
+        <p:spPr>
+          <a:xfrm>
+            <a:off x="548640" y="2011680"/>
+            <a:ext cx="7040880" cy="4005072"/>
+          </a:xfrm>
+          <a:prstGeom prst="rect">
+            <a:avLst/>
+          </a:prstGeom>
+        </p:spPr>
+      </p:pic>
+      <p:sp>
+        <p:nvSpPr>
+          <p:cNvPr id="22" name="Text 19"/>
+          <p:cNvSpPr/>
+          <p:nvPr/>
+        </p:nvSpPr>
+        <p:spPr>
+          <a:xfrm>
+            <a:off x="548640" y="6053328"/>
+            <a:ext cx="7040880" cy="274320"/>
           </a:xfrm>
           <a:prstGeom prst="rect">
             <a:avLst/>
@@ -14591,7 +14234,7 @@
               <a:buNone/>
             </a:pPr>
             <a:r>
-              <a:rPr lang="en-US" sz="1250" dirty="0">
+              <a:rPr lang="en-US" sz="1050" i="1" dirty="0">
                 <a:solidFill>
                   <a:srgbClr val="6B7089"/>
                 </a:solidFill>
@@ -14599,22 +14242,22 @@
                 <a:ea typeface="Calibri" pitchFamily="34" charset="-122"/>
                 <a:cs typeface="Calibri" pitchFamily="34" charset="-120"/>
               </a:rPr>
-              <a:t>사용자 → ALB → 파드 → RDS / Claude API</a:t>
-            </a:r>
-            <a:endParaRPr lang="en-US" sz="1250" dirty="0"/>
-          </a:p>
-        </p:txBody>
-      </p:sp>
-      <p:sp>
-        <p:nvSpPr>
-          <p:cNvPr id="33" name="Text 31"/>
-          <p:cNvSpPr/>
-          <p:nvPr/>
-        </p:nvSpPr>
-        <p:spPr>
-          <a:xfrm>
-            <a:off x="8412480" y="2148840"/>
-            <a:ext cx="3200400" cy="365760"/>
+              <a:t>런타임 구성도 — 3계층 격리 · 아웃바운드 단일 경로(NAT) · 지표 중계(RDS→CloudWatch→EKS)</a:t>
+            </a:r>
+            <a:endParaRPr lang="en-US" sz="1050" dirty="0"/>
+          </a:p>
+        </p:txBody>
+      </p:sp>
+      <p:sp>
+        <p:nvSpPr>
+          <p:cNvPr id="23" name="Text 20"/>
+          <p:cNvSpPr/>
+          <p:nvPr/>
+        </p:nvSpPr>
+        <p:spPr>
+          <a:xfrm>
+            <a:off x="7955280" y="2103120"/>
+            <a:ext cx="3657600" cy="365760"/>
           </a:xfrm>
           <a:prstGeom prst="rect">
             <a:avLst/>
@@ -14646,13 +14289,13 @@
       </p:sp>
       <p:sp>
         <p:nvSpPr>
-          <p:cNvPr id="34" name="Shape 32"/>
-          <p:cNvSpPr/>
-          <p:nvPr/>
-        </p:nvSpPr>
-        <p:spPr>
-          <a:xfrm>
-            <a:off x="8412480" y="2651760"/>
+          <p:cNvPr id="24" name="Shape 21"/>
+          <p:cNvSpPr/>
+          <p:nvPr/>
+        </p:nvSpPr>
+        <p:spPr>
+          <a:xfrm>
+            <a:off x="7955280" y="2697480"/>
             <a:ext cx="329184" cy="329184"/>
           </a:xfrm>
           <a:prstGeom prst="ellipse">
@@ -14666,13 +14309,13 @@
       </p:sp>
       <p:sp>
         <p:nvSpPr>
-          <p:cNvPr id="35" name="Text 33"/>
-          <p:cNvSpPr/>
-          <p:nvPr/>
-        </p:nvSpPr>
-        <p:spPr>
-          <a:xfrm>
-            <a:off x="8412480" y="2651760"/>
+          <p:cNvPr id="25" name="Text 22"/>
+          <p:cNvSpPr/>
+          <p:nvPr/>
+        </p:nvSpPr>
+        <p:spPr>
+          <a:xfrm>
+            <a:off x="7955280" y="2697480"/>
             <a:ext cx="329184" cy="329184"/>
           </a:xfrm>
           <a:prstGeom prst="rect">
@@ -14689,7 +14332,7 @@
               <a:buNone/>
             </a:pPr>
             <a:r>
-              <a:rPr lang="en-US" sz="1400" b="1" dirty="0">
+              <a:rPr lang="en-US" sz="1300" b="1" dirty="0">
                 <a:solidFill>
                   <a:srgbClr val="1E2761"/>
                 </a:solidFill>
@@ -14699,20 +14342,20 @@
               </a:rPr>
               <a:t>1</a:t>
             </a:r>
-            <a:endParaRPr lang="en-US" sz="1400" dirty="0"/>
-          </a:p>
-        </p:txBody>
-      </p:sp>
-      <p:sp>
-        <p:nvSpPr>
-          <p:cNvPr id="36" name="Text 34"/>
-          <p:cNvSpPr/>
-          <p:nvPr/>
-        </p:nvSpPr>
-        <p:spPr>
-          <a:xfrm>
-            <a:off x="8869680" y="2615184"/>
-            <a:ext cx="2834640" cy="320040"/>
+            <a:endParaRPr lang="en-US" sz="1300" dirty="0"/>
+          </a:p>
+        </p:txBody>
+      </p:sp>
+      <p:sp>
+        <p:nvSpPr>
+          <p:cNvPr id="26" name="Text 23"/>
+          <p:cNvSpPr/>
+          <p:nvPr/>
+        </p:nvSpPr>
+        <p:spPr>
+          <a:xfrm>
+            <a:off x="8412480" y="2660904"/>
+            <a:ext cx="3200400" cy="320040"/>
           </a:xfrm>
           <a:prstGeom prst="rect">
             <a:avLst/>
@@ -14744,14 +14387,14 @@
       </p:sp>
       <p:sp>
         <p:nvSpPr>
-          <p:cNvPr id="37" name="Text 35"/>
-          <p:cNvSpPr/>
-          <p:nvPr/>
-        </p:nvSpPr>
-        <p:spPr>
-          <a:xfrm>
-            <a:off x="8869680" y="2926080"/>
-            <a:ext cx="2834640" cy="320040"/>
+          <p:cNvPr id="27" name="Text 24"/>
+          <p:cNvSpPr/>
+          <p:nvPr/>
+        </p:nvSpPr>
+        <p:spPr>
+          <a:xfrm>
+            <a:off x="8412480" y="2971800"/>
+            <a:ext cx="3200400" cy="320040"/>
           </a:xfrm>
           <a:prstGeom prst="rect">
             <a:avLst/>
@@ -14783,13 +14426,13 @@
       </p:sp>
       <p:sp>
         <p:nvSpPr>
-          <p:cNvPr id="38" name="Shape 36"/>
-          <p:cNvSpPr/>
-          <p:nvPr/>
-        </p:nvSpPr>
-        <p:spPr>
-          <a:xfrm>
-            <a:off x="8412480" y="3611880"/>
+          <p:cNvPr id="28" name="Shape 25"/>
+          <p:cNvSpPr/>
+          <p:nvPr/>
+        </p:nvSpPr>
+        <p:spPr>
+          <a:xfrm>
+            <a:off x="7955280" y="3749040"/>
             <a:ext cx="329184" cy="329184"/>
           </a:xfrm>
           <a:prstGeom prst="ellipse">
@@ -14803,13 +14446,13 @@
       </p:sp>
       <p:sp>
         <p:nvSpPr>
-          <p:cNvPr id="39" name="Text 37"/>
-          <p:cNvSpPr/>
-          <p:nvPr/>
-        </p:nvSpPr>
-        <p:spPr>
-          <a:xfrm>
-            <a:off x="8412480" y="3611880"/>
+          <p:cNvPr id="29" name="Text 26"/>
+          <p:cNvSpPr/>
+          <p:nvPr/>
+        </p:nvSpPr>
+        <p:spPr>
+          <a:xfrm>
+            <a:off x="7955280" y="3749040"/>
             <a:ext cx="329184" cy="329184"/>
           </a:xfrm>
           <a:prstGeom prst="rect">
@@ -14826,7 +14469,7 @@
               <a:buNone/>
             </a:pPr>
             <a:r>
-              <a:rPr lang="en-US" sz="1400" b="1" dirty="0">
+              <a:rPr lang="en-US" sz="1300" b="1" dirty="0">
                 <a:solidFill>
                   <a:srgbClr val="1E2761"/>
                 </a:solidFill>
@@ -14836,20 +14479,20 @@
               </a:rPr>
               <a:t>2</a:t>
             </a:r>
-            <a:endParaRPr lang="en-US" sz="1400" dirty="0"/>
-          </a:p>
-        </p:txBody>
-      </p:sp>
-      <p:sp>
-        <p:nvSpPr>
-          <p:cNvPr id="40" name="Text 38"/>
-          <p:cNvSpPr/>
-          <p:nvPr/>
-        </p:nvSpPr>
-        <p:spPr>
-          <a:xfrm>
-            <a:off x="8869680" y="3575304"/>
-            <a:ext cx="2834640" cy="320040"/>
+            <a:endParaRPr lang="en-US" sz="1300" dirty="0"/>
+          </a:p>
+        </p:txBody>
+      </p:sp>
+      <p:sp>
+        <p:nvSpPr>
+          <p:cNvPr id="30" name="Text 27"/>
+          <p:cNvSpPr/>
+          <p:nvPr/>
+        </p:nvSpPr>
+        <p:spPr>
+          <a:xfrm>
+            <a:off x="8412480" y="3712464"/>
+            <a:ext cx="3200400" cy="320040"/>
           </a:xfrm>
           <a:prstGeom prst="rect">
             <a:avLst/>
@@ -14881,14 +14524,14 @@
       </p:sp>
       <p:sp>
         <p:nvSpPr>
-          <p:cNvPr id="41" name="Text 39"/>
-          <p:cNvSpPr/>
-          <p:nvPr/>
-        </p:nvSpPr>
-        <p:spPr>
-          <a:xfrm>
-            <a:off x="8869680" y="3886200"/>
-            <a:ext cx="2834640" cy="320040"/>
+          <p:cNvPr id="31" name="Text 28"/>
+          <p:cNvSpPr/>
+          <p:nvPr/>
+        </p:nvSpPr>
+        <p:spPr>
+          <a:xfrm>
+            <a:off x="8412480" y="4023360"/>
+            <a:ext cx="3200400" cy="320040"/>
           </a:xfrm>
           <a:prstGeom prst="rect">
             <a:avLst/>
@@ -14912,7 +14555,7 @@
                 <a:ea typeface="Calibri" pitchFamily="34" charset="-122"/>
                 <a:cs typeface="Calibri" pitchFamily="34" charset="-120"/>
               </a:rPr>
-              <a:t>IRSA로 파드 단위 권한 분리</a:t>
+              <a:t>IRSA 4종으로 권한 분리</a:t>
             </a:r>
             <a:endParaRPr lang="en-US" sz="1200" dirty="0"/>
           </a:p>
@@ -14920,13 +14563,13 @@
       </p:sp>
       <p:sp>
         <p:nvSpPr>
-          <p:cNvPr id="42" name="Shape 40"/>
-          <p:cNvSpPr/>
-          <p:nvPr/>
-        </p:nvSpPr>
-        <p:spPr>
-          <a:xfrm>
-            <a:off x="8412480" y="4572000"/>
+          <p:cNvPr id="32" name="Shape 29"/>
+          <p:cNvSpPr/>
+          <p:nvPr/>
+        </p:nvSpPr>
+        <p:spPr>
+          <a:xfrm>
+            <a:off x="7955280" y="4800600"/>
             <a:ext cx="329184" cy="329184"/>
           </a:xfrm>
           <a:prstGeom prst="ellipse">
@@ -14940,13 +14583,13 @@
       </p:sp>
       <p:sp>
         <p:nvSpPr>
-          <p:cNvPr id="43" name="Text 41"/>
-          <p:cNvSpPr/>
-          <p:nvPr/>
-        </p:nvSpPr>
-        <p:spPr>
-          <a:xfrm>
-            <a:off x="8412480" y="4572000"/>
+          <p:cNvPr id="33" name="Text 30"/>
+          <p:cNvSpPr/>
+          <p:nvPr/>
+        </p:nvSpPr>
+        <p:spPr>
+          <a:xfrm>
+            <a:off x="7955280" y="4800600"/>
             <a:ext cx="329184" cy="329184"/>
           </a:xfrm>
           <a:prstGeom prst="rect">
@@ -14963,7 +14606,7 @@
               <a:buNone/>
             </a:pPr>
             <a:r>
-              <a:rPr lang="en-US" sz="1400" b="1" dirty="0">
+              <a:rPr lang="en-US" sz="1300" b="1" dirty="0">
                 <a:solidFill>
                   <a:srgbClr val="1E2761"/>
                 </a:solidFill>
@@ -14973,20 +14616,20 @@
               </a:rPr>
               <a:t>3</a:t>
             </a:r>
-            <a:endParaRPr lang="en-US" sz="1400" dirty="0"/>
-          </a:p>
-        </p:txBody>
-      </p:sp>
-      <p:sp>
-        <p:nvSpPr>
-          <p:cNvPr id="44" name="Text 42"/>
-          <p:cNvSpPr/>
-          <p:nvPr/>
-        </p:nvSpPr>
-        <p:spPr>
-          <a:xfrm>
-            <a:off x="8869680" y="4535424"/>
-            <a:ext cx="2834640" cy="320040"/>
+            <a:endParaRPr lang="en-US" sz="1300" dirty="0"/>
+          </a:p>
+        </p:txBody>
+      </p:sp>
+      <p:sp>
+        <p:nvSpPr>
+          <p:cNvPr id="34" name="Text 31"/>
+          <p:cNvSpPr/>
+          <p:nvPr/>
+        </p:nvSpPr>
+        <p:spPr>
+          <a:xfrm>
+            <a:off x="8412480" y="4764024"/>
+            <a:ext cx="3200400" cy="320040"/>
           </a:xfrm>
           <a:prstGeom prst="rect">
             <a:avLst/>
@@ -15018,14 +14661,14 @@
       </p:sp>
       <p:sp>
         <p:nvSpPr>
-          <p:cNvPr id="45" name="Text 43"/>
-          <p:cNvSpPr/>
-          <p:nvPr/>
-        </p:nvSpPr>
-        <p:spPr>
-          <a:xfrm>
-            <a:off x="8869680" y="4846320"/>
-            <a:ext cx="2834640" cy="320040"/>
+          <p:cNvPr id="35" name="Text 32"/>
+          <p:cNvSpPr/>
+          <p:nvPr/>
+        </p:nvSpPr>
+        <p:spPr>
+          <a:xfrm>
+            <a:off x="8412480" y="5074920"/>
+            <a:ext cx="3200400" cy="320040"/>
           </a:xfrm>
           <a:prstGeom prst="rect">
             <a:avLst/>

--- a/docs/presentation.pptx
+++ b/docs/presentation.pptx
@@ -3596,7 +3596,7 @@
         </p:nvSpPr>
         <p:spPr>
           <a:xfrm>
-            <a:off x="548640" y="1024128"/>
+            <a:off x="548640" y="987552"/>
             <a:ext cx="11064240" cy="256032"/>
           </a:xfrm>
           <a:prstGeom prst="rect">
@@ -3629,7 +3629,7 @@
       </p:sp>
       <p:pic>
         <p:nvPicPr>
-          <p:cNvPr id="5" name="Image 0" descr="/Users/kohyeokbae/고혁배/claude/eks-gitops-portfolio/docs/images/HPA Status.png">    </p:cNvPr>
+          <p:cNvPr id="5" name="Image 0" descr="/private/tmp/claude-501/-Users-kohyeokbae-----claude/54364cdd-dcdd-49c1-bb3a-3e6e8bf637be/scratchpad/hpa-crop.png">    </p:cNvPr>
           <p:cNvPicPr>
             <a:picLocks noChangeAspect="1"/>
           </p:cNvPicPr>
@@ -3643,8 +3643,8 @@
         </p:blipFill>
         <p:spPr>
           <a:xfrm>
-            <a:off x="548640" y="1298448"/>
-            <a:ext cx="11064240" cy="1664208"/>
+            <a:off x="548640" y="1243584"/>
+            <a:ext cx="11064240" cy="1453896"/>
           </a:xfrm>
           <a:prstGeom prst="rect">
             <a:avLst/>
@@ -3659,8 +3659,8 @@
         </p:nvSpPr>
         <p:spPr>
           <a:xfrm>
-            <a:off x="548640" y="3127248"/>
-            <a:ext cx="5669280" cy="256032"/>
+            <a:off x="548640" y="2834640"/>
+            <a:ext cx="11064240" cy="256032"/>
           </a:xfrm>
           <a:prstGeom prst="rect">
             <a:avLst/>
@@ -3684,7 +3684,7 @@
                 <a:ea typeface="Calibri" pitchFamily="34" charset="-122"/>
                 <a:cs typeface="Calibri" pitchFamily="34" charset="-120"/>
               </a:rPr>
-              <a:t>Grafana — 부하 투입 시 CPU 306% 스파이크 → summarizer 파드 6개로 증설(범례)</a:t>
+              <a:t>Grafana CPU Usage — 부하 투입 시 스파이크, summarizer 파드 6개로 증설 (우측 범례)</a:t>
             </a:r>
             <a:endParaRPr lang="en-US" sz="1150" dirty="0"/>
           </a:p>
@@ -3692,7 +3692,7 @@
       </p:sp>
       <p:pic>
         <p:nvPicPr>
-          <p:cNvPr id="7" name="Image 1" descr="/Users/kohyeokbae/고혁배/claude/eks-gitops-portfolio/docs/images/app pods monitoring1.png">    </p:cNvPr>
+          <p:cNvPr id="7" name="Image 1" descr="/private/tmp/claude-501/-Users-kohyeokbae-----claude/54364cdd-dcdd-49c1-bb3a-3e6e8bf637be/scratchpad/mon1-crop.png">    </p:cNvPr>
           <p:cNvPicPr>
             <a:picLocks noChangeAspect="1"/>
           </p:cNvPicPr>
@@ -3706,8 +3706,8 @@
         </p:blipFill>
         <p:spPr>
           <a:xfrm>
-            <a:off x="548640" y="3401568"/>
-            <a:ext cx="5230368" cy="3063240"/>
+            <a:off x="548640" y="3090672"/>
+            <a:ext cx="11064240" cy="2093976"/>
           </a:xfrm>
           <a:prstGeom prst="rect">
             <a:avLst/>
@@ -3722,11 +3722,256 @@
         </p:nvSpPr>
         <p:spPr>
           <a:xfrm>
-            <a:off x="6172200" y="3310128"/>
-            <a:ext cx="310896" cy="310896"/>
-          </a:xfrm>
-          <a:prstGeom prst="ellipse">
-            <a:avLst/>
+            <a:off x="548640" y="5413248"/>
+            <a:ext cx="2468880" cy="566928"/>
+          </a:xfrm>
+          <a:prstGeom prst="roundRect">
+            <a:avLst>
+              <a:gd name="adj" fmla="val 12903"/>
+            </a:avLst>
+          </a:prstGeom>
+          <a:solidFill>
+            <a:srgbClr val="F4F6FC"/>
+          </a:solidFill>
+          <a:ln/>
+        </p:spPr>
+      </p:sp>
+      <p:sp>
+        <p:nvSpPr>
+          <p:cNvPr id="9" name="Text 5"/>
+          <p:cNvSpPr/>
+          <p:nvPr/>
+        </p:nvSpPr>
+        <p:spPr>
+          <a:xfrm>
+            <a:off x="621792" y="5413248"/>
+            <a:ext cx="2322576" cy="566928"/>
+          </a:xfrm>
+          <a:prstGeom prst="rect">
+            <a:avLst/>
+          </a:prstGeom>
+          <a:noFill/>
+          <a:ln/>
+        </p:spPr>
+        <p:txBody>
+          <a:bodyPr wrap="square" lIns="0" tIns="0" rIns="0" bIns="0" rtlCol="0" anchor="ctr"/>
+          <a:lstStyle/>
+          <a:p>
+            <a:pPr algn="ctr" indent="0" marL="0">
+              <a:buNone/>
+            </a:pPr>
+            <a:r>
+              <a:rPr lang="en-US" sz="1150" b="1" dirty="0">
+                <a:solidFill>
+                  <a:srgbClr val="1E2761"/>
+                </a:solidFill>
+                <a:latin typeface="Calibri" pitchFamily="34" charset="0"/>
+                <a:ea typeface="Calibri" pitchFamily="34" charset="-122"/>
+                <a:cs typeface="Calibri" pitchFamily="34" charset="-120"/>
+              </a:rPr>
+              <a:t>① 부하 투입 — busybox ×3</a:t>
+            </a:r>
+            <a:endParaRPr lang="en-US" sz="1150" dirty="0"/>
+          </a:p>
+        </p:txBody>
+      </p:sp>
+      <p:sp>
+        <p:nvSpPr>
+          <p:cNvPr id="10" name="Shape 6"/>
+          <p:cNvSpPr/>
+          <p:nvPr/>
+        </p:nvSpPr>
+        <p:spPr>
+          <a:xfrm>
+            <a:off x="3054096" y="5605272"/>
+            <a:ext cx="338328" cy="182880"/>
+          </a:xfrm>
+          <a:prstGeom prst="rightArrow">
+            <a:avLst/>
+          </a:prstGeom>
+          <a:solidFill>
+            <a:srgbClr val="CADCFC"/>
+          </a:solidFill>
+          <a:ln/>
+        </p:spPr>
+      </p:sp>
+      <p:sp>
+        <p:nvSpPr>
+          <p:cNvPr id="11" name="Shape 7"/>
+          <p:cNvSpPr/>
+          <p:nvPr/>
+        </p:nvSpPr>
+        <p:spPr>
+          <a:xfrm>
+            <a:off x="3429000" y="5413248"/>
+            <a:ext cx="2468880" cy="566928"/>
+          </a:xfrm>
+          <a:prstGeom prst="roundRect">
+            <a:avLst>
+              <a:gd name="adj" fmla="val 12903"/>
+            </a:avLst>
+          </a:prstGeom>
+          <a:solidFill>
+            <a:srgbClr val="F4F6FC"/>
+          </a:solidFill>
+          <a:ln/>
+        </p:spPr>
+      </p:sp>
+      <p:sp>
+        <p:nvSpPr>
+          <p:cNvPr id="12" name="Text 8"/>
+          <p:cNvSpPr/>
+          <p:nvPr/>
+        </p:nvSpPr>
+        <p:spPr>
+          <a:xfrm>
+            <a:off x="3502152" y="5413248"/>
+            <a:ext cx="2322576" cy="566928"/>
+          </a:xfrm>
+          <a:prstGeom prst="rect">
+            <a:avLst/>
+          </a:prstGeom>
+          <a:noFill/>
+          <a:ln/>
+        </p:spPr>
+        <p:txBody>
+          <a:bodyPr wrap="square" lIns="0" tIns="0" rIns="0" bIns="0" rtlCol="0" anchor="ctr"/>
+          <a:lstStyle/>
+          <a:p>
+            <a:pPr algn="ctr" indent="0" marL="0">
+              <a:buNone/>
+            </a:pPr>
+            <a:r>
+              <a:rPr lang="en-US" sz="1150" b="1" dirty="0">
+                <a:solidFill>
+                  <a:srgbClr val="1E2761"/>
+                </a:solidFill>
+                <a:latin typeface="Calibri" pitchFamily="34" charset="0"/>
+                <a:ea typeface="Calibri" pitchFamily="34" charset="-122"/>
+                <a:cs typeface="Calibri" pitchFamily="34" charset="-120"/>
+              </a:rPr>
+              <a:t>② CPU 306% → 파드 2→6</a:t>
+            </a:r>
+            <a:endParaRPr lang="en-US" sz="1150" dirty="0"/>
+          </a:p>
+        </p:txBody>
+      </p:sp>
+      <p:sp>
+        <p:nvSpPr>
+          <p:cNvPr id="13" name="Shape 9"/>
+          <p:cNvSpPr/>
+          <p:nvPr/>
+        </p:nvSpPr>
+        <p:spPr>
+          <a:xfrm>
+            <a:off x="5934456" y="5605272"/>
+            <a:ext cx="338328" cy="182880"/>
+          </a:xfrm>
+          <a:prstGeom prst="rightArrow">
+            <a:avLst/>
+          </a:prstGeom>
+          <a:solidFill>
+            <a:srgbClr val="CADCFC"/>
+          </a:solidFill>
+          <a:ln/>
+        </p:spPr>
+      </p:sp>
+      <p:sp>
+        <p:nvSpPr>
+          <p:cNvPr id="14" name="Shape 10"/>
+          <p:cNvSpPr/>
+          <p:nvPr/>
+        </p:nvSpPr>
+        <p:spPr>
+          <a:xfrm>
+            <a:off x="6309360" y="5413248"/>
+            <a:ext cx="2468880" cy="566928"/>
+          </a:xfrm>
+          <a:prstGeom prst="roundRect">
+            <a:avLst>
+              <a:gd name="adj" fmla="val 12903"/>
+            </a:avLst>
+          </a:prstGeom>
+          <a:solidFill>
+            <a:srgbClr val="F4F6FC"/>
+          </a:solidFill>
+          <a:ln/>
+        </p:spPr>
+      </p:sp>
+      <p:sp>
+        <p:nvSpPr>
+          <p:cNvPr id="15" name="Text 11"/>
+          <p:cNvSpPr/>
+          <p:nvPr/>
+        </p:nvSpPr>
+        <p:spPr>
+          <a:xfrm>
+            <a:off x="6382512" y="5413248"/>
+            <a:ext cx="2322576" cy="566928"/>
+          </a:xfrm>
+          <a:prstGeom prst="rect">
+            <a:avLst/>
+          </a:prstGeom>
+          <a:noFill/>
+          <a:ln/>
+        </p:spPr>
+        <p:txBody>
+          <a:bodyPr wrap="square" lIns="0" tIns="0" rIns="0" bIns="0" rtlCol="0" anchor="ctr"/>
+          <a:lstStyle/>
+          <a:p>
+            <a:pPr algn="ctr" indent="0" marL="0">
+              <a:buNone/>
+            </a:pPr>
+            <a:r>
+              <a:rPr lang="en-US" sz="1150" b="1" dirty="0">
+                <a:solidFill>
+                  <a:srgbClr val="1E2761"/>
+                </a:solidFill>
+                <a:latin typeface="Calibri" pitchFamily="34" charset="0"/>
+                <a:ea typeface="Calibri" pitchFamily="34" charset="-122"/>
+                <a:cs typeface="Calibri" pitchFamily="34" charset="-120"/>
+              </a:rPr>
+              <a:t>③ 부하 제거 → CPU 2%</a:t>
+            </a:r>
+            <a:endParaRPr lang="en-US" sz="1150" dirty="0"/>
+          </a:p>
+        </p:txBody>
+      </p:sp>
+      <p:sp>
+        <p:nvSpPr>
+          <p:cNvPr id="16" name="Shape 12"/>
+          <p:cNvSpPr/>
+          <p:nvPr/>
+        </p:nvSpPr>
+        <p:spPr>
+          <a:xfrm>
+            <a:off x="8814816" y="5605272"/>
+            <a:ext cx="338328" cy="182880"/>
+          </a:xfrm>
+          <a:prstGeom prst="rightArrow">
+            <a:avLst/>
+          </a:prstGeom>
+          <a:solidFill>
+            <a:srgbClr val="CADCFC"/>
+          </a:solidFill>
+          <a:ln/>
+        </p:spPr>
+      </p:sp>
+      <p:sp>
+        <p:nvSpPr>
+          <p:cNvPr id="17" name="Shape 13"/>
+          <p:cNvSpPr/>
+          <p:nvPr/>
+        </p:nvSpPr>
+        <p:spPr>
+          <a:xfrm>
+            <a:off x="9189720" y="5413248"/>
+            <a:ext cx="2468880" cy="566928"/>
+          </a:xfrm>
+          <a:prstGeom prst="roundRect">
+            <a:avLst>
+              <a:gd name="adj" fmla="val 12903"/>
+            </a:avLst>
           </a:prstGeom>
           <a:solidFill>
             <a:srgbClr val="1E2761"/>
@@ -3736,14 +3981,14 @@
       </p:sp>
       <p:sp>
         <p:nvSpPr>
-          <p:cNvPr id="9" name="Text 5"/>
-          <p:cNvSpPr/>
-          <p:nvPr/>
-        </p:nvSpPr>
-        <p:spPr>
-          <a:xfrm>
-            <a:off x="6172200" y="3310128"/>
-            <a:ext cx="310896" cy="310896"/>
+          <p:cNvPr id="18" name="Text 14"/>
+          <p:cNvSpPr/>
+          <p:nvPr/>
+        </p:nvSpPr>
+        <p:spPr>
+          <a:xfrm>
+            <a:off x="9262872" y="5413248"/>
+            <a:ext cx="2322576" cy="566928"/>
           </a:xfrm>
           <a:prstGeom prst="rect">
             <a:avLst/>
@@ -3759,7 +4004,7 @@
               <a:buNone/>
             </a:pPr>
             <a:r>
-              <a:rPr lang="en-US" sz="1200" b="1" dirty="0">
+              <a:rPr lang="en-US" sz="1150" b="1" dirty="0">
                 <a:solidFill>
                   <a:srgbClr val="FFFFFF"/>
                 </a:solidFill>
@@ -3767,81 +4012,22 @@
                 <a:ea typeface="Calibri" pitchFamily="34" charset="-122"/>
                 <a:cs typeface="Calibri" pitchFamily="34" charset="-120"/>
               </a:rPr>
-              <a:t>1</a:t>
-            </a:r>
-            <a:endParaRPr lang="en-US" sz="1200" dirty="0"/>
-          </a:p>
-        </p:txBody>
-      </p:sp>
-      <p:sp>
-        <p:nvSpPr>
-          <p:cNvPr id="10" name="Text 6"/>
-          <p:cNvSpPr/>
-          <p:nvPr/>
-        </p:nvSpPr>
-        <p:spPr>
-          <a:xfrm>
-            <a:off x="6629400" y="3264408"/>
-            <a:ext cx="5029200" cy="411480"/>
-          </a:xfrm>
-          <a:prstGeom prst="rect">
-            <a:avLst/>
-          </a:prstGeom>
-          <a:noFill/>
-          <a:ln/>
-        </p:spPr>
-        <p:txBody>
-          <a:bodyPr wrap="square" lIns="0" tIns="0" rIns="0" bIns="0" rtlCol="0" anchor="ctr"/>
-          <a:lstStyle/>
-          <a:p>
-            <a:pPr indent="0" marL="0">
-              <a:buNone/>
-            </a:pPr>
-            <a:r>
-              <a:rPr lang="en-US" sz="1250" dirty="0">
-                <a:solidFill>
-                  <a:srgbClr val="3A3F52"/>
-                </a:solidFill>
-                <a:latin typeface="Calibri" pitchFamily="34" charset="0"/>
-                <a:ea typeface="Calibri" pitchFamily="34" charset="-122"/>
-                <a:cs typeface="Calibri" pitchFamily="34" charset="-120"/>
-              </a:rPr>
-              <a:t>부하 투입 — busybox 무한 요청 3기</a:t>
-            </a:r>
-            <a:endParaRPr lang="en-US" sz="1250" dirty="0"/>
-          </a:p>
-        </p:txBody>
-      </p:sp>
-      <p:sp>
-        <p:nvSpPr>
-          <p:cNvPr id="11" name="Shape 7"/>
-          <p:cNvSpPr/>
-          <p:nvPr/>
-        </p:nvSpPr>
-        <p:spPr>
-          <a:xfrm>
-            <a:off x="6172200" y="3877056"/>
-            <a:ext cx="310896" cy="310896"/>
-          </a:xfrm>
-          <a:prstGeom prst="ellipse">
-            <a:avLst/>
-          </a:prstGeom>
-          <a:solidFill>
-            <a:srgbClr val="1E2761"/>
-          </a:solidFill>
-          <a:ln/>
-        </p:spPr>
-      </p:sp>
-      <p:sp>
-        <p:nvSpPr>
-          <p:cNvPr id="12" name="Text 8"/>
-          <p:cNvSpPr/>
-          <p:nvPr/>
-        </p:nvSpPr>
-        <p:spPr>
-          <a:xfrm>
-            <a:off x="6172200" y="3877056"/>
-            <a:ext cx="310896" cy="310896"/>
+              <a:t>④ 안정화 창 후 6→2 복귀</a:t>
+            </a:r>
+            <a:endParaRPr lang="en-US" sz="1150" dirty="0"/>
+          </a:p>
+        </p:txBody>
+      </p:sp>
+      <p:sp>
+        <p:nvSpPr>
+          <p:cNvPr id="19" name="Text 15"/>
+          <p:cNvSpPr/>
+          <p:nvPr/>
+        </p:nvSpPr>
+        <p:spPr>
+          <a:xfrm>
+            <a:off x="548640" y="6199632"/>
+            <a:ext cx="9875520" cy="320040"/>
           </a:xfrm>
           <a:prstGeom prst="rect">
             <a:avLst/>
@@ -3857,328 +4043,17 @@
               <a:buNone/>
             </a:pPr>
             <a:r>
-              <a:rPr lang="en-US" sz="1200" b="1" dirty="0">
-                <a:solidFill>
-                  <a:srgbClr val="FFFFFF"/>
-                </a:solidFill>
-                <a:latin typeface="Calibri" pitchFamily="34" charset="0"/>
-                <a:ea typeface="Calibri" pitchFamily="34" charset="-122"/>
-                <a:cs typeface="Calibri" pitchFamily="34" charset="-120"/>
-              </a:rPr>
-              <a:t>2</a:t>
-            </a:r>
-            <a:endParaRPr lang="en-US" sz="1200" dirty="0"/>
-          </a:p>
-        </p:txBody>
-      </p:sp>
-      <p:sp>
-        <p:nvSpPr>
-          <p:cNvPr id="13" name="Text 9"/>
-          <p:cNvSpPr/>
-          <p:nvPr/>
-        </p:nvSpPr>
-        <p:spPr>
-          <a:xfrm>
-            <a:off x="6629400" y="3831336"/>
-            <a:ext cx="5029200" cy="411480"/>
-          </a:xfrm>
-          <a:prstGeom prst="rect">
-            <a:avLst/>
-          </a:prstGeom>
-          <a:noFill/>
-          <a:ln/>
-        </p:spPr>
-        <p:txBody>
-          <a:bodyPr wrap="square" lIns="0" tIns="0" rIns="0" bIns="0" rtlCol="0" anchor="ctr"/>
-          <a:lstStyle/>
-          <a:p>
-            <a:pPr indent="0" marL="0">
-              <a:buNone/>
-            </a:pPr>
-            <a:r>
-              <a:rPr lang="en-US" sz="1250" dirty="0">
-                <a:solidFill>
-                  <a:srgbClr val="3A3F52"/>
-                </a:solidFill>
-                <a:latin typeface="Calibri" pitchFamily="34" charset="0"/>
-                <a:ea typeface="Calibri" pitchFamily="34" charset="-122"/>
-                <a:cs typeface="Calibri" pitchFamily="34" charset="-120"/>
-              </a:rPr>
-              <a:t>CPU 306% 감지 → 파드 2 → 6 증설 (약 2분)</a:t>
-            </a:r>
-            <a:endParaRPr lang="en-US" sz="1250" dirty="0"/>
-          </a:p>
-        </p:txBody>
-      </p:sp>
-      <p:sp>
-        <p:nvSpPr>
-          <p:cNvPr id="14" name="Shape 10"/>
-          <p:cNvSpPr/>
-          <p:nvPr/>
-        </p:nvSpPr>
-        <p:spPr>
-          <a:xfrm>
-            <a:off x="6172200" y="4443984"/>
-            <a:ext cx="310896" cy="310896"/>
-          </a:xfrm>
-          <a:prstGeom prst="ellipse">
-            <a:avLst/>
-          </a:prstGeom>
-          <a:solidFill>
-            <a:srgbClr val="1E2761"/>
-          </a:solidFill>
-          <a:ln/>
-        </p:spPr>
-      </p:sp>
-      <p:sp>
-        <p:nvSpPr>
-          <p:cNvPr id="15" name="Text 11"/>
-          <p:cNvSpPr/>
-          <p:nvPr/>
-        </p:nvSpPr>
-        <p:spPr>
-          <a:xfrm>
-            <a:off x="6172200" y="4443984"/>
-            <a:ext cx="310896" cy="310896"/>
-          </a:xfrm>
-          <a:prstGeom prst="rect">
-            <a:avLst/>
-          </a:prstGeom>
-          <a:noFill/>
-          <a:ln/>
-        </p:spPr>
-        <p:txBody>
-          <a:bodyPr wrap="square" lIns="0" tIns="0" rIns="0" bIns="0" rtlCol="0" anchor="ctr"/>
-          <a:lstStyle/>
-          <a:p>
-            <a:pPr algn="ctr" indent="0" marL="0">
-              <a:buNone/>
-            </a:pPr>
-            <a:r>
-              <a:rPr lang="en-US" sz="1200" b="1" dirty="0">
-                <a:solidFill>
-                  <a:srgbClr val="FFFFFF"/>
-                </a:solidFill>
-                <a:latin typeface="Calibri" pitchFamily="34" charset="0"/>
-                <a:ea typeface="Calibri" pitchFamily="34" charset="-122"/>
-                <a:cs typeface="Calibri" pitchFamily="34" charset="-120"/>
-              </a:rPr>
-              <a:t>3</a:t>
-            </a:r>
-            <a:endParaRPr lang="en-US" sz="1200" dirty="0"/>
-          </a:p>
-        </p:txBody>
-      </p:sp>
-      <p:sp>
-        <p:nvSpPr>
-          <p:cNvPr id="16" name="Text 12"/>
-          <p:cNvSpPr/>
-          <p:nvPr/>
-        </p:nvSpPr>
-        <p:spPr>
-          <a:xfrm>
-            <a:off x="6629400" y="4398264"/>
-            <a:ext cx="5029200" cy="411480"/>
-          </a:xfrm>
-          <a:prstGeom prst="rect">
-            <a:avLst/>
-          </a:prstGeom>
-          <a:noFill/>
-          <a:ln/>
-        </p:spPr>
-        <p:txBody>
-          <a:bodyPr wrap="square" lIns="0" tIns="0" rIns="0" bIns="0" rtlCol="0" anchor="ctr"/>
-          <a:lstStyle/>
-          <a:p>
-            <a:pPr indent="0" marL="0">
-              <a:buNone/>
-            </a:pPr>
-            <a:r>
-              <a:rPr lang="en-US" sz="1250" dirty="0">
-                <a:solidFill>
-                  <a:srgbClr val="3A3F52"/>
-                </a:solidFill>
-                <a:latin typeface="Calibri" pitchFamily="34" charset="0"/>
-                <a:ea typeface="Calibri" pitchFamily="34" charset="-122"/>
-                <a:cs typeface="Calibri" pitchFamily="34" charset="-120"/>
-              </a:rPr>
-              <a:t>부하 제거 → CPU 2%, 안정화 창 대기</a:t>
-            </a:r>
-            <a:endParaRPr lang="en-US" sz="1250" dirty="0"/>
-          </a:p>
-        </p:txBody>
-      </p:sp>
-      <p:sp>
-        <p:nvSpPr>
-          <p:cNvPr id="17" name="Shape 13"/>
-          <p:cNvSpPr/>
-          <p:nvPr/>
-        </p:nvSpPr>
-        <p:spPr>
-          <a:xfrm>
-            <a:off x="6172200" y="5010912"/>
-            <a:ext cx="310896" cy="310896"/>
-          </a:xfrm>
-          <a:prstGeom prst="ellipse">
-            <a:avLst/>
-          </a:prstGeom>
-          <a:solidFill>
-            <a:srgbClr val="1E2761"/>
-          </a:solidFill>
-          <a:ln/>
-        </p:spPr>
-      </p:sp>
-      <p:sp>
-        <p:nvSpPr>
-          <p:cNvPr id="18" name="Text 14"/>
-          <p:cNvSpPr/>
-          <p:nvPr/>
-        </p:nvSpPr>
-        <p:spPr>
-          <a:xfrm>
-            <a:off x="6172200" y="5010912"/>
-            <a:ext cx="310896" cy="310896"/>
-          </a:xfrm>
-          <a:prstGeom prst="rect">
-            <a:avLst/>
-          </a:prstGeom>
-          <a:noFill/>
-          <a:ln/>
-        </p:spPr>
-        <p:txBody>
-          <a:bodyPr wrap="square" lIns="0" tIns="0" rIns="0" bIns="0" rtlCol="0" anchor="ctr"/>
-          <a:lstStyle/>
-          <a:p>
-            <a:pPr algn="ctr" indent="0" marL="0">
-              <a:buNone/>
-            </a:pPr>
-            <a:r>
-              <a:rPr lang="en-US" sz="1200" b="1" dirty="0">
-                <a:solidFill>
-                  <a:srgbClr val="FFFFFF"/>
-                </a:solidFill>
-                <a:latin typeface="Calibri" pitchFamily="34" charset="0"/>
-                <a:ea typeface="Calibri" pitchFamily="34" charset="-122"/>
-                <a:cs typeface="Calibri" pitchFamily="34" charset="-120"/>
-              </a:rPr>
-              <a:t>4</a:t>
-            </a:r>
-            <a:endParaRPr lang="en-US" sz="1200" dirty="0"/>
-          </a:p>
-        </p:txBody>
-      </p:sp>
-      <p:sp>
-        <p:nvSpPr>
-          <p:cNvPr id="19" name="Text 15"/>
-          <p:cNvSpPr/>
-          <p:nvPr/>
-        </p:nvSpPr>
-        <p:spPr>
-          <a:xfrm>
-            <a:off x="6629400" y="4965192"/>
-            <a:ext cx="5029200" cy="411480"/>
-          </a:xfrm>
-          <a:prstGeom prst="rect">
-            <a:avLst/>
-          </a:prstGeom>
-          <a:noFill/>
-          <a:ln/>
-        </p:spPr>
-        <p:txBody>
-          <a:bodyPr wrap="square" lIns="0" tIns="0" rIns="0" bIns="0" rtlCol="0" anchor="ctr"/>
-          <a:lstStyle/>
-          <a:p>
-            <a:pPr indent="0" marL="0">
-              <a:buNone/>
-            </a:pPr>
-            <a:r>
-              <a:rPr lang="en-US" sz="1250" dirty="0">
-                <a:solidFill>
-                  <a:srgbClr val="3A3F52"/>
-                </a:solidFill>
-                <a:latin typeface="Calibri" pitchFamily="34" charset="0"/>
-                <a:ea typeface="Calibri" pitchFamily="34" charset="-122"/>
-                <a:cs typeface="Calibri" pitchFamily="34" charset="-120"/>
-              </a:rPr>
-              <a:t>약 6.5분 후 6 → 2 자동 축소 (설계된 지연)</a:t>
-            </a:r>
-            <a:endParaRPr lang="en-US" sz="1250" dirty="0"/>
-          </a:p>
-        </p:txBody>
-      </p:sp>
-      <p:sp>
-        <p:nvSpPr>
-          <p:cNvPr id="20" name="Shape 16"/>
-          <p:cNvSpPr/>
-          <p:nvPr/>
-        </p:nvSpPr>
-        <p:spPr>
-          <a:xfrm>
-            <a:off x="6172200" y="5623560"/>
-            <a:ext cx="5468112" cy="868680"/>
-          </a:xfrm>
-          <a:prstGeom prst="roundRect">
-            <a:avLst>
-              <a:gd name="adj" fmla="val 8421"/>
-            </a:avLst>
-          </a:prstGeom>
-          <a:solidFill>
-            <a:srgbClr val="CADCFC"/>
-          </a:solidFill>
-          <a:ln/>
-        </p:spPr>
-      </p:sp>
-      <p:sp>
-        <p:nvSpPr>
-          <p:cNvPr id="21" name="Text 17"/>
-          <p:cNvSpPr/>
-          <p:nvPr/>
-        </p:nvSpPr>
-        <p:spPr>
-          <a:xfrm>
-            <a:off x="6400800" y="5623560"/>
-            <a:ext cx="5074920" cy="868680"/>
-          </a:xfrm>
-          <a:prstGeom prst="rect">
-            <a:avLst/>
-          </a:prstGeom>
-          <a:noFill/>
-          <a:ln/>
-        </p:spPr>
-        <p:txBody>
-          <a:bodyPr wrap="square" lIns="0" tIns="0" rIns="0" bIns="0" rtlCol="0" anchor="ctr"/>
-          <a:lstStyle/>
-          <a:p>
-            <a:pPr indent="0" marL="0">
-              <a:buNone/>
-            </a:pPr>
-            <a:r>
-              <a:rPr lang="en-US" sz="1200" b="1" dirty="0">
-                <a:solidFill>
-                  <a:srgbClr val="1E2761"/>
-                </a:solidFill>
-                <a:latin typeface="Calibri" pitchFamily="34" charset="0"/>
-                <a:ea typeface="Calibri" pitchFamily="34" charset="-122"/>
-                <a:cs typeface="Calibri" pitchFamily="34" charset="-120"/>
-              </a:rPr>
-              <a:t>관찰 — 6번째 파드 Pending(“Too many pods”)
-</a:t>
-            </a:r>
-            <a:pPr indent="0" marL="0">
-              <a:buNone/>
-            </a:pPr>
-            <a:r>
-              <a:rPr lang="en-US" sz="1150" dirty="0">
-                <a:solidFill>
-                  <a:srgbClr val="24305E"/>
-                </a:solidFill>
-                <a:latin typeface="Calibri" pitchFamily="34" charset="0"/>
-                <a:ea typeface="Calibri" pitchFamily="34" charset="-122"/>
-                <a:cs typeface="Calibri" pitchFamily="34" charset="-120"/>
-              </a:rPr>
-              <a:t>노드 확장은 Cluster Autoscaler의 몫 — HPA의 한계까지 실증 (백로그 근거)</a:t>
-            </a:r>
-            <a:endParaRPr lang="en-US" sz="1200" dirty="0"/>
+              <a:rPr lang="en-US" sz="1150" i="1" dirty="0">
+                <a:solidFill>
+                  <a:srgbClr val="6B7089"/>
+                </a:solidFill>
+                <a:latin typeface="Calibri" pitchFamily="34" charset="0"/>
+                <a:ea typeface="Calibri" pitchFamily="34" charset="-122"/>
+                <a:cs typeface="Calibri" pitchFamily="34" charset="-120"/>
+              </a:rPr>
+              <a:t>관찰 — 6번째 파드는 Pending(“Too many pods”): 노드 확장은 Cluster Autoscaler의 몫 · HPA의 한계까지 실증 (백로그 근거)</a:t>
+            </a:r>
+            <a:endParaRPr lang="en-US" sz="1150" dirty="0"/>
           </a:p>
         </p:txBody>
       </p:sp>

--- a/docs/presentation.pptx
+++ b/docs/presentation.pptx
@@ -3470,8 +3470,8 @@
         </p:blipFill>
         <p:spPr>
           <a:xfrm>
-            <a:off x="9189720" y="1325880"/>
-            <a:ext cx="2450592" cy="5029200"/>
+            <a:off x="9059832" y="1325880"/>
+            <a:ext cx="2580480" cy="5029200"/>
           </a:xfrm>
           <a:prstGeom prst="rect">
             <a:avLst/>
